--- a/briefings/Codi_Presentation_Sandra_Vermaak.pptx
+++ b/briefings/Codi_Presentation_Sandra_Vermaak.pptx
@@ -4,6 +4,9 @@
   <p:sldMasterIdLst>
     <p:sldMasterId id="2147483648" r:id="rId1"/>
   </p:sldMasterIdLst>
+  <p:notesMasterIdLst>
+    <p:notesMasterId r:id="rId9"/>
+  </p:notesMasterIdLst>
   <p:sldIdLst>
     <p:sldId id="256" r:id="rId2"/>
     <p:sldId id="257" r:id="rId3"/>
@@ -13,9 +16,6 @@
     <p:sldId id="261" r:id="rId7"/>
     <p:sldId id="262" r:id="rId8"/>
   </p:sldIdLst>
-  <p:notesMasterIdLst>
-    <p:notesMasterId r:id="rId9"/>
-  </p:notesMasterIdLst>
   <p:sldSz cx="12192000" cy="6858000"/>
   <p:notesSz cx="6858000" cy="12192000"/>
   <p:defaultTextStyle>
@@ -110,6 +110,11 @@
       </a:defRPr>
     </a:lvl9pPr>
   </p:defaultTextStyle>
+  <p:extLst>
+    <p:ext uri="{EFAFB233-063F-42B5-8137-9DF3F51BA10A}">
+      <p15:sldGuideLst xmlns:p15="http://schemas.microsoft.com/office/powerpoint/2012/main"/>
+    </p:ext>
+  </p:extLst>
 </p:presentation>
 </file>
 
@@ -135,234 +140,10 @@
           <a:chExt cx="0" cy="0"/>
         </a:xfrm>
       </p:grpSpPr>
-      <p:sp>
-        <p:nvSpPr>
-          <p:cNvPr id="2" name="Header Placeholder 1"/>
-          <p:cNvSpPr>
-            <a:spLocks noGrp="1"/>
-          </p:cNvSpPr>
-          <p:nvPr>
-            <p:ph type="hdr" sz="quarter"/>
-          </p:nvPr>
-        </p:nvSpPr>
-        <p:spPr>
-          <a:xfrm>
-            <a:off x="0" y="0"/>
-            <a:ext cx="2971800" cy="458788"/>
-          </a:xfrm>
-          <a:prstGeom prst="rect">
-            <a:avLst/>
-          </a:prstGeom>
-        </p:spPr>
-        <p:txBody>
-          <a:bodyPr vert="horz" lIns="91440" tIns="45720" rIns="91440" bIns="45720" rtlCol="0"/>
-          <a:lstStyle>
-            <a:lvl1pPr algn="l">
-              <a:defRPr sz="1200"/>
-            </a:lvl1pPr>
-          </a:lstStyle>
-          <a:p>
-            <a:endParaRPr lang="en-US"/>
-          </a:p>
-        </p:txBody>
-      </p:sp>
-      <p:sp>
-        <p:nvSpPr>
-          <p:cNvPr id="3" name="Date Placeholder 2"/>
-          <p:cNvSpPr>
-            <a:spLocks noGrp="1"/>
-          </p:cNvSpPr>
-          <p:nvPr>
-            <p:ph type="dt" idx="1"/>
-          </p:nvPr>
-        </p:nvSpPr>
-        <p:spPr>
-          <a:xfrm>
-            <a:off x="3884613" y="0"/>
-            <a:ext cx="2971800" cy="458788"/>
-          </a:xfrm>
-          <a:prstGeom prst="rect">
-            <a:avLst/>
-          </a:prstGeom>
-        </p:spPr>
-        <p:txBody>
-          <a:bodyPr vert="horz" lIns="91440" tIns="45720" rIns="91440" bIns="45720" rtlCol="0"/>
-          <a:lstStyle>
-            <a:lvl1pPr algn="r">
-              <a:defRPr sz="1200"/>
-            </a:lvl1pPr>
-          </a:lstStyle>
-          <a:p>
-            <a:fld id="{5282F153-3F37-0F45-9E97-73ACFA13230C}" type="datetimeFigureOut">
-              <a:rPr lang="en-US"/>
-              <a:t>7/23/19</a:t>
-            </a:fld>
-            <a:endParaRPr lang="en-US"/>
-          </a:p>
-        </p:txBody>
-      </p:sp>
-      <p:sp>
-        <p:nvSpPr>
-          <p:cNvPr id="4" name="Slide Image Placeholder 3"/>
-          <p:cNvSpPr>
-            <a:spLocks noGrp="1" noRot="1" noChangeAspect="1"/>
-          </p:cNvSpPr>
-          <p:nvPr>
-            <p:ph type="sldImg" idx="2"/>
-          </p:nvPr>
-        </p:nvSpPr>
-        <p:spPr>
-          <a:xfrm>
-            <a:off x="685800" y="1143000"/>
-            <a:ext cx="5486400" cy="3086100"/>
-          </a:xfrm>
-          <a:prstGeom prst="rect">
-            <a:avLst/>
-          </a:prstGeom>
-          <a:noFill/>
-          <a:ln w="12700">
-            <a:solidFill>
-              <a:prstClr val="black"/>
-            </a:solidFill>
-          </a:ln>
-        </p:spPr>
-        <p:txBody>
-          <a:bodyPr vert="horz" lIns="91440" tIns="45720" rIns="91440" bIns="45720" rtlCol="0" anchor="ctr"/>
-          <a:lstStyle/>
-          <a:p>
-            <a:endParaRPr lang="en-US"/>
-          </a:p>
-        </p:txBody>
-      </p:sp>
-      <p:sp>
-        <p:nvSpPr>
-          <p:cNvPr id="5" name="Notes Placeholder 4"/>
-          <p:cNvSpPr>
-            <a:spLocks noGrp="1"/>
-          </p:cNvSpPr>
-          <p:nvPr>
-            <p:ph type="body" sz="quarter" idx="3"/>
-          </p:nvPr>
-        </p:nvSpPr>
-        <p:spPr>
-          <a:xfrm>
-            <a:off x="685800" y="4400550"/>
-            <a:ext cx="5486400" cy="3600450"/>
-          </a:xfrm>
-          <a:prstGeom prst="rect">
-            <a:avLst/>
-          </a:prstGeom>
-        </p:spPr>
-        <p:txBody>
-          <a:bodyPr vert="horz" lIns="91440" tIns="45720" rIns="91440" bIns="45720" rtlCol="0"/>
-          <a:lstStyle/>
-          <a:p>
-            <a:pPr lvl="0"/>
-            <a:r>
-              <a:rPr lang="en-US"/>
-              <a:t>Click to edit Master text styles</a:t>
-            </a:r>
-          </a:p>
-          <a:p>
-            <a:pPr lvl="1"/>
-            <a:r>
-              <a:rPr lang="en-US"/>
-              <a:t>Second level</a:t>
-            </a:r>
-          </a:p>
-          <a:p>
-            <a:pPr lvl="2"/>
-            <a:r>
-              <a:rPr lang="en-US"/>
-              <a:t>Third level</a:t>
-            </a:r>
-          </a:p>
-          <a:p>
-            <a:pPr lvl="3"/>
-            <a:r>
-              <a:rPr lang="en-US"/>
-              <a:t>Fourth level</a:t>
-            </a:r>
-          </a:p>
-          <a:p>
-            <a:pPr lvl="4"/>
-            <a:r>
-              <a:rPr lang="en-US"/>
-              <a:t>Fifth level</a:t>
-            </a:r>
-          </a:p>
-        </p:txBody>
-      </p:sp>
-      <p:sp>
-        <p:nvSpPr>
-          <p:cNvPr id="6" name="Footer Placeholder 5"/>
-          <p:cNvSpPr>
-            <a:spLocks noGrp="1"/>
-          </p:cNvSpPr>
-          <p:nvPr>
-            <p:ph type="ftr" sz="quarter" idx="4"/>
-          </p:nvPr>
-        </p:nvSpPr>
-        <p:spPr>
-          <a:xfrm>
-            <a:off x="0" y="8685213"/>
-            <a:ext cx="2971800" cy="458787"/>
-          </a:xfrm>
-          <a:prstGeom prst="rect">
-            <a:avLst/>
-          </a:prstGeom>
-        </p:spPr>
-        <p:txBody>
-          <a:bodyPr vert="horz" lIns="91440" tIns="45720" rIns="91440" bIns="45720" rtlCol="0" anchor="b"/>
-          <a:lstStyle>
-            <a:lvl1pPr algn="l">
-              <a:defRPr sz="1200"/>
-            </a:lvl1pPr>
-          </a:lstStyle>
-          <a:p>
-            <a:endParaRPr lang="en-US"/>
-          </a:p>
-        </p:txBody>
-      </p:sp>
-      <p:sp>
-        <p:nvSpPr>
-          <p:cNvPr id="7" name="Slide Number Placeholder 6"/>
-          <p:cNvSpPr>
-            <a:spLocks noGrp="1"/>
-          </p:cNvSpPr>
-          <p:nvPr>
-            <p:ph type="sldNum" sz="quarter" idx="5"/>
-          </p:nvPr>
-        </p:nvSpPr>
-        <p:spPr>
-          <a:xfrm>
-            <a:off x="3884613" y="8685213"/>
-            <a:ext cx="2971800" cy="458787"/>
-          </a:xfrm>
-          <a:prstGeom prst="rect">
-            <a:avLst/>
-          </a:prstGeom>
-        </p:spPr>
-        <p:txBody>
-          <a:bodyPr vert="horz" lIns="91440" tIns="45720" rIns="91440" bIns="45720" rtlCol="0" anchor="b"/>
-          <a:lstStyle>
-            <a:lvl1pPr algn="r">
-              <a:defRPr sz="1200"/>
-            </a:lvl1pPr>
-          </a:lstStyle>
-          <a:p>
-            <a:fld id="{CE5E9CC1-C706-0F49-92D6-E571CC5EEA8F}" type="slidenum">
-              <a:rPr lang="en-US"/>
-              <a:t>‹#›</a:t>
-            </a:fld>
-            <a:endParaRPr lang="en-US"/>
-          </a:p>
-        </p:txBody>
-      </p:sp>
     </p:spTree>
     <p:extLst>
       <p:ext uri="{BB962C8B-B14F-4D97-AF65-F5344CB8AC3E}">
-        <p14:creationId xmlns:p14="http://schemas.microsoft.com/office/powerpoint/2010/main" val="1024086991"/>
+        <p14:creationId xmlns:p14="http://schemas.microsoft.com/office/powerpoint/2010/main" val="2950222104"/>
       </p:ext>
     </p:extLst>
   </p:cSld>
@@ -513,7 +294,6 @@
 I'll cover scoping the number, the three hypotheses I'd arrive with, rebuilding the forecast with budget holders, what I'd do about it, how I'd escalate, and what I'd measure.
 One caveat. This is my recommended approach, not a claim about how Codi works today. Figures are either published or clearly illustrative, and I'll say which.</a:t>
             </a:r>
-            <a:endParaRPr lang="en-US" dirty="0"/>
           </a:p>
         </p:txBody>
       </p:sp>
@@ -605,7 +385,6 @@
 So my first question would be where that line is drawn and how consistently it is applied, particularly post-merger where two legacy capitalisation policies may still be in use. Reclassifying spend is not a saving, and I'd want to be sure no part of the position depends on it.
 [Source] Homes figure from public reporting on the merger. The £100m is the interview scenario. Category split is illustrative.</a:t>
             </a:r>
-            <a:endParaRPr lang="en-US" dirty="0"/>
           </a:p>
         </p:txBody>
       </p:sp>
@@ -690,16 +469,44 @@
           <a:lstStyle/>
           <a:p>
             <a:r>
-              <a:rPr lang="en-US" dirty="0"/>
-              <a:t>PACE 2:05  ·  Running total 4:10.
-I wouldn't arrive with an open mind and no shape. I'd bring three hypotheses and the data to kill or confirm each quickly.
-First, delivery mix. Publicly, Pobl expanded its in-house trades team by about fifty per cent in 2024, thirty-four roles, while running an eleven-lot framework for responsive repairs, voids and out-of-hours to support the internal team. Sensible model, but it is exactly where double-running appears. The test: has contractor spend fallen in proportion to the capacity brought in-house, or are we paying for both? I'd compare contractor call-off value per month against internal jobs completed and operative hours.
-Second, regulation. The WHQS hazard response requirements took effect on the first of April this year. Where harm is judged imminent you investigate within twenty-four hours and remedy within a further twenty-four; otherwise ten working days, then five. Compressed timescales push work out of hours and into premium call-off, and make it harder to batch jobs, so cost per job rises even when volume doesn't. Response times also have to be published and reported, so this is not a place to look for savings.
-Third, price. Sector surveys put expected responsive repairs increases around twenty-three per cent this year, well ahead of the ten per cent implied by the regulator's global accounts. That is UK-wide and indicative rather than Welsh, but it tells me to separate rate from volume before concluding anything about efficiency.
-If I'm wrong on all three I've still narrowed the search quickly. I'd rather be corrected in week one than confirm a number in month six.
-[Source] Pobl in-house trades announcement (2024); Pobl responsive repairs and voids framework notice, 11 lots (Dec 2023); Welsh Government WHQS responding-to-hazards statement (Dec 2025), in force 1 April 2026; UK repairs cost survey commentary. Context, not claims about Codi's position.</a:t>
-            </a:r>
-            <a:endParaRPr lang="en-US" dirty="0"/>
+              <a:t>PACE 2:05  ·  Running total 4:10.</a:t>
+            </a:r>
+          </a:p>
+          <a:p/>
+          <a:p>
+            <a:r>
+              <a:t>I wouldn't turn up with no idea what was going on. I'd come with three things I want to check, and the data I'd need to prove or rule out each one.</a:t>
+            </a:r>
+          </a:p>
+          <a:p/>
+          <a:p>
+            <a:r>
+              <a:t>First, who does the work. Pobl grew its in-house trades team by about half in 2024, thirty-four roles, and there's also a contractor framework across eleven lots covering repairs, voids and out-of-hours. That's a sensible set-up, but it's exactly where you can end up paying twice. So I'd check whether contractor spend has come down in line with the work we brought in-house, comparing it month by month against the jobs our own teams complete.</a:t>
+            </a:r>
+          </a:p>
+          <a:p/>
+          <a:p>
+            <a:r>
+              <a:t>Second, the new repair rules. Since the first of April this year, WHQS sets response times. If a hazard is urgent, it's twenty-four hours to investigate and another twenty-four to put it right. Otherwise it's ten working days, then five. Tighter deadlines mean more out-of-hours and more emergency call-outs, and they make it harder to group jobs together sensibly, so the cost per job goes up even when the number of jobs doesn't. And because response times have to be published, this isn't somewhere to look for savings.</a:t>
+            </a:r>
+          </a:p>
+          <a:p/>
+          <a:p>
+            <a:r>
+              <a:t>Third, costs going up. Across the sector, repairs costs are expected to rise by about twenty-three per cent this year, against nearer ten in the regulator's published figures. That's UK-wide rather than Welsh, so I'd use it as a reason to separate price from volume, not as a number to lean on.</a:t>
+            </a:r>
+          </a:p>
+          <a:p/>
+          <a:p>
+            <a:r>
+              <a:t>If none of the three is right, I've still narrowed it down quickly. I'd rather be put right in week one than be confident and wrong in month six.</a:t>
+            </a:r>
+          </a:p>
+          <a:p/>
+          <a:p>
+            <a:r>
+              <a:t>[Source] Pobl in-house trades announcement (2024); Pobl responsive repairs and voids framework notice, 11 lots (Dec 2023); Welsh Government WHQS responding-to-hazards statement (Dec 2025), in force 1 April 2026; UK repairs cost survey commentary. Context, not claims about Codi's position.</a:t>
+            </a:r>
           </a:p>
         </p:txBody>
       </p:sp>
@@ -791,7 +598,6 @@
 I'd record the owner and confidence level of every material assumption, and run a base case and a downside, such as sustained contractor reliance or a harder winter. The point is to show the range and identify which two or three assumptions actually move the answer.
 One discipline I'd hold firmly. The delivery forecast stays visible before mitigation. Only owned, time-phased, achievable actions come off it; anything less certain is shown separately as an opportunity. A savings target is not a forecast, and the moment those blend the number stops being useful.</a:t>
             </a:r>
-            <a:endParaRPr lang="en-US" dirty="0"/>
           </a:p>
         </p:txBody>
       </p:sp>
@@ -885,7 +691,6 @@
 Fourth, and only then, rephasing discretionary planned work with asset and service leads.
 And I'd be explicit about the second-order effect. Deferring planned work tends to increase responsive demand later, and moves spend that would have been capitalised into revenue. That lands on operating surplus, not just between years. Every action needs an owner, a date, a cost and an evidenced benefit.</a:t>
             </a:r>
-            <a:endParaRPr lang="en-US" dirty="0"/>
           </a:p>
         </p:txBody>
       </p:sp>
@@ -978,7 +783,6 @@
 Put those together and a repairs overspend touches operating surplus, interest cover and potentially the cost of borrowing. That is the frame I'd use, and why I'd want treasury in the conversation early.
 [Source] Codi Group regulatory judgement, published July 2026; reporting on Codi's £130m sustainability-linked facility.</a:t>
             </a:r>
-            <a:endParaRPr lang="en-US" dirty="0"/>
           </a:p>
         </p:txBody>
       </p:sp>
@@ -1070,7 +874,6 @@
 On service: WHQS hazard response compliance, first-time fix, jobs per operative to show whether insourced capacity is landing, backlog age and overdue safety work, and satisfaction or repeat contact. Those are the early warning that a saving is coming out of the resident rather than out of the cost.
 A number the operation recognises, a forecast that stops moving, and a resident who does not have to ring twice. Thank you, and I'm happy to take questions.</a:t>
             </a:r>
-            <a:endParaRPr lang="en-US" dirty="0"/>
           </a:p>
         </p:txBody>
       </p:sp>
@@ -1143,6 +946,11 @@
 <file path=ppt/slideMasters/slideMaster1.xml><?xml version="1.0" encoding="utf-8"?>
 <p:sldMaster xmlns:a="http://schemas.openxmlformats.org/drawingml/2006/main" xmlns:r="http://schemas.openxmlformats.org/officeDocument/2006/relationships" xmlns:p="http://schemas.openxmlformats.org/presentationml/2006/main">
   <p:cSld>
+    <p:bg>
+      <p:bgRef idx="1001">
+        <a:schemeClr val="bg1"/>
+      </p:bgRef>
+    </p:bg>
     <p:spTree>
       <p:nvGrpSpPr>
         <p:cNvPr id="1" name=""/>
@@ -1157,6 +965,54 @@
           <a:chExt cx="0" cy="0"/>
         </a:xfrm>
       </p:grpSpPr>
+      <p:sp>
+        <p:nvSpPr>
+          <p:cNvPr id="3" name="TextBox 2">
+            <a:extLst>
+              <a:ext uri="{FF2B5EF4-FFF2-40B4-BE49-F238E27FC236}">
+                <a16:creationId xmlns:a16="http://schemas.microsoft.com/office/drawing/2014/main" id="{4322D005-52EF-5A44-6380-0A6FDC5E0C3B}"/>
+              </a:ext>
+            </a:extLst>
+          </p:cNvPr>
+          <p:cNvSpPr txBox="1"/>
+          <p:nvPr userDrawn="1">
+            <p:extLst>
+              <p:ext uri="{1162E1C5-73C7-4A58-AE30-91384D911F3F}">
+                <p184:classification xmlns:p184="http://schemas.microsoft.com/office/powerpoint/2018/4/main" val="ftr"/>
+              </p:ext>
+            </p:extLst>
+          </p:nvPr>
+        </p:nvSpPr>
+        <p:spPr>
+          <a:xfrm>
+            <a:off x="5778500" y="6642100"/>
+            <a:ext cx="669925" cy="152400"/>
+          </a:xfrm>
+          <a:prstGeom prst="rect">
+            <a:avLst/>
+          </a:prstGeom>
+        </p:spPr>
+        <p:txBody>
+          <a:bodyPr horzOverflow="overflow" lIns="0" tIns="0" rIns="0" bIns="0">
+            <a:spAutoFit/>
+          </a:bodyPr>
+          <a:lstStyle/>
+          <a:p>
+            <a:pPr algn="l"/>
+            <a:r>
+              <a:rPr lang="en-GB" sz="1000">
+                <a:solidFill>
+                  <a:srgbClr val="000000">
+                    <a:alpha val="50000"/>
+                  </a:srgbClr>
+                </a:solidFill>
+                <a:latin typeface="Mylius Modern" panose="020B0504020202020204" pitchFamily="34" charset="0"/>
+              </a:rPr>
+              <a:t>INTERNAL</a:t>
+            </a:r>
+          </a:p>
+        </p:txBody>
+      </p:sp>
     </p:spTree>
   </p:cSld>
   <p:clrMap bg1="lt1" tx1="dk1" bg2="lt2" tx2="dk2" accent1="accent1" accent2="accent2" accent3="accent3" accent4="accent4" accent5="accent5" accent6="accent6" hlink="hlink" folHlink="folHlink"/>
@@ -1425,6 +1281,7 @@
         <a:solidFill>
           <a:srgbClr val="13453B"/>
         </a:solidFill>
+        <a:effectLst/>
       </p:bgPr>
     </p:bg>
     <p:spTree>
@@ -1462,11 +1319,11 @@
           <a:bodyPr wrap="square" lIns="0" tIns="0" rIns="0" bIns="0" rtlCol="0" anchor="ctr"/>
           <a:lstStyle/>
           <a:p>
-            <a:pPr indent="0" marL="0">
-              <a:buNone/>
-            </a:pPr>
-            <a:r>
-              <a:rPr lang="en-US" sz="1100" b="1" spc="240" kern="0" dirty="0">
+            <a:pPr marL="0" indent="0">
+              <a:buNone/>
+            </a:pPr>
+            <a:r>
+              <a:rPr lang="en-US" sz="1100" b="1" kern="0" spc="240" dirty="0">
                 <a:solidFill>
                   <a:srgbClr val="8FBFAE"/>
                 </a:solidFill>
@@ -1501,7 +1358,7 @@
           <a:bodyPr wrap="square" lIns="0" tIns="0" rIns="0" bIns="0" rtlCol="0" anchor="ctr"/>
           <a:lstStyle/>
           <a:p>
-            <a:pPr indent="0" marL="0">
+            <a:pPr marL="0" indent="0">
               <a:lnSpc>
                 <a:spcPts val="4600"/>
               </a:lnSpc>
@@ -1521,7 +1378,7 @@
             <a:endParaRPr lang="en-US" sz="4000" dirty="0"/>
           </a:p>
           <a:p>
-            <a:pPr indent="0" marL="0">
+            <a:pPr marL="0" indent="0">
               <a:lnSpc>
                 <a:spcPts val="4600"/>
               </a:lnSpc>
@@ -1539,45 +1396,6 @@
               <a:t>Across Repairs &amp; Maintenance</a:t>
             </a:r>
             <a:endParaRPr lang="en-US" sz="4000" dirty="0"/>
-          </a:p>
-        </p:txBody>
-      </p:sp>
-      <p:sp>
-        <p:nvSpPr>
-          <p:cNvPr id="4" name="Text 2"/>
-          <p:cNvSpPr txBox="1"/>
-          <p:nvPr/>
-        </p:nvSpPr>
-        <p:spPr>
-          <a:xfrm>
-            <a:off x="548640" y="3794760"/>
-            <a:ext cx="10607040" cy="411480"/>
-          </a:xfrm>
-          <a:prstGeom prst="rect">
-            <a:avLst/>
-          </a:prstGeom>
-          <a:noFill/>
-          <a:ln/>
-        </p:spPr>
-        <p:txBody>
-          <a:bodyPr wrap="square" lIns="0" tIns="0" rIns="0" bIns="0" rtlCol="0" anchor="ctr"/>
-          <a:lstStyle/>
-          <a:p>
-            <a:pPr indent="0" marL="0">
-              <a:buNone/>
-            </a:pPr>
-            <a:r>
-              <a:rPr lang="en-US" sz="1700" i="1" dirty="0">
-                <a:solidFill>
-                  <a:srgbClr val="C8892F"/>
-                </a:solidFill>
-                <a:latin typeface="Calibri" pitchFamily="34" charset="0"/>
-                <a:ea typeface="Calibri" pitchFamily="34" charset="-122"/>
-                <a:cs typeface="Calibri" pitchFamily="34" charset="-120"/>
-              </a:rPr>
-              <a:t>Size it.  Explain it.  Own it together.  Protect the home.</a:t>
-            </a:r>
-            <a:endParaRPr lang="en-US" sz="1700" dirty="0"/>
           </a:p>
         </p:txBody>
       </p:sp>
@@ -1603,6 +1421,13 @@
             <a:prstDash val="solid"/>
           </a:ln>
         </p:spPr>
+        <p:txBody>
+          <a:bodyPr/>
+          <a:lstStyle/>
+          <a:p>
+            <a:endParaRPr lang="en-GB"/>
+          </a:p>
+        </p:txBody>
       </p:sp>
       <p:sp>
         <p:nvSpPr>
@@ -1625,7 +1450,7 @@
           <a:bodyPr wrap="square" lIns="0" tIns="0" rIns="0" bIns="0" rtlCol="0" anchor="ctr"/>
           <a:lstStyle/>
           <a:p>
-            <a:pPr indent="0" marL="0">
+            <a:pPr marL="0" indent="0">
               <a:buNone/>
             </a:pPr>
             <a:r>
@@ -1664,7 +1489,7 @@
           <a:bodyPr wrap="square" lIns="0" tIns="0" rIns="0" bIns="0" rtlCol="0" anchor="ctr"/>
           <a:lstStyle/>
           <a:p>
-            <a:pPr indent="0" marL="0">
+            <a:pPr marL="0" indent="0">
               <a:buNone/>
             </a:pPr>
             <a:r>
@@ -1698,6 +1523,7 @@
         <a:solidFill>
           <a:srgbClr val="FFFFFF"/>
         </a:solidFill>
+        <a:effectLst/>
       </p:bgPr>
     </p:bg>
     <p:spTree>
@@ -1735,11 +1561,11 @@
           <a:bodyPr wrap="square" lIns="0" tIns="0" rIns="0" bIns="0" rtlCol="0" anchor="ctr"/>
           <a:lstStyle/>
           <a:p>
-            <a:pPr indent="0" marL="0">
-              <a:buNone/>
-            </a:pPr>
-            <a:r>
-              <a:rPr lang="en-US" sz="1000" b="1" spc="220" kern="0" dirty="0">
+            <a:pPr marL="0" indent="0">
+              <a:buNone/>
+            </a:pPr>
+            <a:r>
+              <a:rPr lang="en-US" sz="1000" b="1" kern="0" spc="220" dirty="0">
                 <a:solidFill>
                   <a:srgbClr val="C8892F"/>
                 </a:solidFill>
@@ -1761,7 +1587,7 @@
         </p:nvSpPr>
         <p:spPr>
           <a:xfrm>
-            <a:off x="548640" y="658368"/>
+            <a:off x="548640" y="612648"/>
             <a:ext cx="11094415" cy="566928"/>
           </a:xfrm>
           <a:prstGeom prst="rect">
@@ -1774,7 +1600,7 @@
           <a:bodyPr wrap="square" lIns="0" tIns="0" rIns="0" bIns="0" rtlCol="0" anchor="ctr"/>
           <a:lstStyle/>
           <a:p>
-            <a:pPr indent="0" marL="0">
+            <a:pPr marL="0" indent="0">
               <a:buNone/>
             </a:pPr>
             <a:r>
@@ -1786,7 +1612,7 @@
                 <a:ea typeface="Cambria" pitchFamily="34" charset="-122"/>
                 <a:cs typeface="Cambria" pitchFamily="34" charset="-120"/>
               </a:rPr>
-              <a:t>Scope the number before you explain it</a:t>
+              <a:t>Scope the number</a:t>
             </a:r>
             <a:endParaRPr lang="en-US" sz="3000" dirty="0"/>
           </a:p>
@@ -1818,6 +1644,13 @@
             <a:prstDash val="solid"/>
           </a:ln>
         </p:spPr>
+        <p:txBody>
+          <a:bodyPr/>
+          <a:lstStyle/>
+          <a:p>
+            <a:endParaRPr lang="en-GB"/>
+          </a:p>
+        </p:txBody>
       </p:sp>
       <p:sp>
         <p:nvSpPr>
@@ -1840,7 +1673,7 @@
           <a:bodyPr wrap="square" lIns="0" tIns="0" rIns="0" bIns="0" rtlCol="0" anchor="ctr"/>
           <a:lstStyle/>
           <a:p>
-            <a:pPr indent="0" marL="0">
+            <a:pPr marL="0" indent="0">
               <a:buNone/>
             </a:pPr>
             <a:r>
@@ -1879,7 +1712,7 @@
           <a:bodyPr wrap="square" lIns="0" tIns="0" rIns="0" bIns="0" rtlCol="0" anchor="ctr"/>
           <a:lstStyle/>
           <a:p>
-            <a:pPr indent="0" marL="0">
+            <a:pPr marL="0" indent="0">
               <a:buNone/>
             </a:pPr>
             <a:r>
@@ -1918,7 +1751,7 @@
           <a:bodyPr wrap="square" lIns="0" tIns="0" rIns="0" bIns="0" rtlCol="0" anchor="ctr"/>
           <a:lstStyle/>
           <a:p>
-            <a:pPr indent="0" marL="0">
+            <a:pPr marL="0" indent="0">
               <a:buNone/>
             </a:pPr>
             <a:r>
@@ -1945,7 +1778,7 @@
         <p:spPr>
           <a:xfrm>
             <a:off x="548640" y="3931920"/>
-            <a:ext cx="4114800" cy="914400"/>
+            <a:ext cx="4114800" cy="1033272"/>
           </a:xfrm>
           <a:prstGeom prst="rect">
             <a:avLst/>
@@ -1957,7 +1790,7 @@
           <a:bodyPr wrap="square" lIns="0" tIns="0" rIns="0" bIns="0" rtlCol="0" anchor="t"/>
           <a:lstStyle/>
           <a:p>
-            <a:pPr indent="0" marL="0">
+            <a:pPr marL="0" indent="0">
               <a:lnSpc>
                 <a:spcPts val="1900"/>
               </a:lnSpc>
@@ -1972,7 +1805,7 @@
                 <a:ea typeface="Calibri" pitchFamily="34" charset="-122"/>
                 <a:cs typeface="Calibri" pitchFamily="34" charset="-120"/>
               </a:rPr>
-              <a:t>At that level this is not a responsive repairs budget. It spans several services with different cost behaviours — and it straddles the revenue and capital boundary.</a:t>
+              <a:t>At that level this is not only a responsive repairs budget. It spans several services with different cost behaviours — and it straddles both Revenue (operational expenditure) and Capital.</a:t>
             </a:r>
             <a:endParaRPr lang="en-US" sz="1300" dirty="0"/>
           </a:p>
@@ -1980,18 +1813,18 @@
       </p:sp>
       <p:sp>
         <p:nvSpPr>
-          <p:cNvPr id="9" name="Shape 7"/>
+          <p:cNvPr id="11" name="Shape 9"/>
           <p:cNvSpPr/>
           <p:nvPr/>
         </p:nvSpPr>
         <p:spPr>
           <a:xfrm>
-            <a:off x="548640" y="4937760"/>
-            <a:ext cx="4114800" cy="1170432"/>
+            <a:off x="5029200" y="1600200"/>
+            <a:ext cx="6611112" cy="1024128"/>
           </a:xfrm>
           <a:prstGeom prst="roundRect">
             <a:avLst>
-              <a:gd name="adj" fmla="val 4688"/>
+              <a:gd name="adj" fmla="val 5357"/>
             </a:avLst>
           </a:prstGeom>
           <a:solidFill>
@@ -2004,75 +1837,140 @@
             <a:prstDash val="solid"/>
           </a:ln>
         </p:spPr>
-      </p:sp>
-      <p:sp>
-        <p:nvSpPr>
-          <p:cNvPr id="10" name="Text 8"/>
-          <p:cNvSpPr txBox="1"/>
-          <p:nvPr/>
-        </p:nvSpPr>
-        <p:spPr>
-          <a:xfrm>
-            <a:off x="804672" y="4937760"/>
-            <a:ext cx="3602736" cy="1170432"/>
-          </a:xfrm>
-          <a:prstGeom prst="rect">
-            <a:avLst/>
-          </a:prstGeom>
-          <a:noFill/>
-          <a:ln/>
-        </p:spPr>
-        <p:txBody>
-          <a:bodyPr wrap="square" lIns="0" tIns="0" rIns="0" bIns="0" rtlCol="0" anchor="ctr"/>
-          <a:lstStyle/>
-          <a:p>
-            <a:pPr indent="0" marL="0">
-              <a:lnSpc>
-                <a:spcPts val="1700"/>
-              </a:lnSpc>
-              <a:buNone/>
-            </a:pPr>
-            <a:r>
-              <a:rPr lang="en-US" sz="1200" b="1" dirty="0">
-                <a:solidFill>
-                  <a:srgbClr val="13453B"/>
-                </a:solidFill>
-                <a:latin typeface="Calibri" pitchFamily="34" charset="0"/>
-                <a:ea typeface="Calibri" pitchFamily="34" charset="-122"/>
-                <a:cs typeface="Calibri" pitchFamily="34" charset="-120"/>
-              </a:rPr>
-              <a:t>First question I'd ask.  </a:t>
-            </a:r>
-            <a:pPr indent="0" marL="0">
-              <a:lnSpc>
-                <a:spcPts val="1700"/>
-              </a:lnSpc>
-              <a:buNone/>
-            </a:pPr>
-            <a:r>
-              <a:rPr lang="en-US" sz="1200" dirty="0">
-                <a:solidFill>
-                  <a:srgbClr val="33423D"/>
-                </a:solidFill>
-                <a:latin typeface="Calibri" pitchFamily="34" charset="0"/>
-                <a:ea typeface="Calibri" pitchFamily="34" charset="-122"/>
-                <a:cs typeface="Calibri" pitchFamily="34" charset="-120"/>
-              </a:rPr>
-              <a:t>Where is the revenue/capital line drawn — and is it applied the same way across both legacy policies?</a:t>
-            </a:r>
-            <a:endParaRPr lang="en-US" sz="1200" dirty="0"/>
-          </a:p>
-        </p:txBody>
-      </p:sp>
-      <p:sp>
-        <p:nvSpPr>
-          <p:cNvPr id="11" name="Shape 9"/>
+        <p:txBody>
+          <a:bodyPr/>
+          <a:lstStyle/>
+          <a:p>
+            <a:endParaRPr lang="en-GB"/>
+          </a:p>
+        </p:txBody>
+      </p:sp>
+      <p:sp>
+        <p:nvSpPr>
+          <p:cNvPr id="12" name="Text 10"/>
+          <p:cNvSpPr txBox="1"/>
+          <p:nvPr/>
+        </p:nvSpPr>
+        <p:spPr>
+          <a:xfrm>
+            <a:off x="5303520" y="1746504"/>
+            <a:ext cx="4206240" cy="292608"/>
+          </a:xfrm>
+          <a:prstGeom prst="rect">
+            <a:avLst/>
+          </a:prstGeom>
+          <a:noFill/>
+          <a:ln/>
+        </p:spPr>
+        <p:txBody>
+          <a:bodyPr wrap="square" lIns="0" tIns="0" rIns="0" bIns="0" rtlCol="0" anchor="ctr"/>
+          <a:lstStyle/>
+          <a:p>
+            <a:pPr marL="0" indent="0">
+              <a:buNone/>
+            </a:pPr>
+            <a:r>
+              <a:rPr lang="en-US" sz="1400" b="1" dirty="0">
+                <a:solidFill>
+                  <a:srgbClr val="16211E"/>
+                </a:solidFill>
+                <a:latin typeface="Calibri" pitchFamily="34" charset="0"/>
+                <a:ea typeface="Calibri" pitchFamily="34" charset="-122"/>
+                <a:cs typeface="Calibri" pitchFamily="34" charset="-120"/>
+              </a:rPr>
+              <a:t>Responsive / reactive repairs</a:t>
+            </a:r>
+            <a:endParaRPr lang="en-US" sz="1400" dirty="0"/>
+          </a:p>
+        </p:txBody>
+      </p:sp>
+      <p:sp>
+        <p:nvSpPr>
+          <p:cNvPr id="13" name="Text 11"/>
+          <p:cNvSpPr txBox="1"/>
+          <p:nvPr/>
+        </p:nvSpPr>
+        <p:spPr>
+          <a:xfrm>
+            <a:off x="5303520" y="2075688"/>
+            <a:ext cx="4754880" cy="365760"/>
+          </a:xfrm>
+          <a:prstGeom prst="rect">
+            <a:avLst/>
+          </a:prstGeom>
+          <a:noFill/>
+          <a:ln/>
+        </p:spPr>
+        <p:txBody>
+          <a:bodyPr wrap="square" lIns="0" tIns="0" rIns="0" bIns="0" rtlCol="0" anchor="ctr"/>
+          <a:lstStyle/>
+          <a:p>
+            <a:pPr marL="0" indent="0">
+              <a:buNone/>
+            </a:pPr>
+            <a:r>
+              <a:rPr lang="en-US" sz="1150" dirty="0">
+                <a:solidFill>
+                  <a:srgbClr val="6E7D78"/>
+                </a:solidFill>
+                <a:latin typeface="Calibri" pitchFamily="34" charset="0"/>
+                <a:ea typeface="Calibri" pitchFamily="34" charset="-122"/>
+                <a:cs typeface="Calibri" pitchFamily="34" charset="-120"/>
+              </a:rPr>
+              <a:t>Demand-led, volatile, difficult to forecast</a:t>
+            </a:r>
+            <a:endParaRPr lang="en-US" sz="1150" dirty="0"/>
+          </a:p>
+        </p:txBody>
+      </p:sp>
+      <p:sp>
+        <p:nvSpPr>
+          <p:cNvPr id="14" name="Text 12"/>
+          <p:cNvSpPr txBox="1"/>
+          <p:nvPr/>
+        </p:nvSpPr>
+        <p:spPr>
+          <a:xfrm>
+            <a:off x="9966960" y="1746504"/>
+            <a:ext cx="1463040" cy="274320"/>
+          </a:xfrm>
+          <a:prstGeom prst="rect">
+            <a:avLst/>
+          </a:prstGeom>
+          <a:noFill/>
+          <a:ln/>
+        </p:spPr>
+        <p:txBody>
+          <a:bodyPr wrap="square" lIns="0" tIns="0" rIns="0" bIns="0" rtlCol="0" anchor="ctr"/>
+          <a:lstStyle/>
+          <a:p>
+            <a:pPr marL="0" indent="0" algn="r">
+              <a:buNone/>
+            </a:pPr>
+            <a:r>
+              <a:rPr lang="en-US" sz="1050" b="1" dirty="0">
+                <a:solidFill>
+                  <a:srgbClr val="2E7D68"/>
+                </a:solidFill>
+                <a:latin typeface="Calibri" pitchFamily="34" charset="0"/>
+                <a:ea typeface="Calibri" pitchFamily="34" charset="-122"/>
+                <a:cs typeface="Calibri" pitchFamily="34" charset="-120"/>
+              </a:rPr>
+              <a:t>Revenue</a:t>
+            </a:r>
+            <a:endParaRPr lang="en-US" sz="1050" dirty="0"/>
+          </a:p>
+        </p:txBody>
+      </p:sp>
+      <p:sp>
+        <p:nvSpPr>
+          <p:cNvPr id="15" name="Shape 13"/>
           <p:cNvSpPr/>
           <p:nvPr/>
         </p:nvSpPr>
         <p:spPr>
           <a:xfrm>
-            <a:off x="5029200" y="1600200"/>
+            <a:off x="5029200" y="2762374"/>
             <a:ext cx="6611112" cy="1024128"/>
           </a:xfrm>
           <a:prstGeom prst="roundRect">
@@ -2090,16 +1988,23 @@
             <a:prstDash val="solid"/>
           </a:ln>
         </p:spPr>
-      </p:sp>
-      <p:sp>
-        <p:nvSpPr>
-          <p:cNvPr id="12" name="Text 10"/>
-          <p:cNvSpPr txBox="1"/>
-          <p:nvPr/>
-        </p:nvSpPr>
-        <p:spPr>
-          <a:xfrm>
-            <a:off x="5303520" y="1746504"/>
+        <p:txBody>
+          <a:bodyPr/>
+          <a:lstStyle/>
+          <a:p>
+            <a:endParaRPr lang="en-GB"/>
+          </a:p>
+        </p:txBody>
+      </p:sp>
+      <p:sp>
+        <p:nvSpPr>
+          <p:cNvPr id="16" name="Text 14"/>
+          <p:cNvSpPr txBox="1"/>
+          <p:nvPr/>
+        </p:nvSpPr>
+        <p:spPr>
+          <a:xfrm>
+            <a:off x="5303520" y="2916936"/>
             <a:ext cx="4206240" cy="292608"/>
           </a:xfrm>
           <a:prstGeom prst="rect">
@@ -2112,7 +2017,7 @@
           <a:bodyPr wrap="square" lIns="0" tIns="0" rIns="0" bIns="0" rtlCol="0" anchor="ctr"/>
           <a:lstStyle/>
           <a:p>
-            <a:pPr indent="0" marL="0">
+            <a:pPr marL="0" indent="0">
               <a:buNone/>
             </a:pPr>
             <a:r>
@@ -2124,7 +2029,7 @@
                 <a:ea typeface="Calibri" pitchFamily="34" charset="-122"/>
                 <a:cs typeface="Calibri" pitchFamily="34" charset="-120"/>
               </a:rPr>
-              <a:t>Responsive repairs &amp; voids</a:t>
+              <a:t>Cyclical</a:t>
             </a:r>
             <a:endParaRPr lang="en-US" sz="1400" dirty="0"/>
           </a:p>
@@ -2132,13 +2037,13 @@
       </p:sp>
       <p:sp>
         <p:nvSpPr>
-          <p:cNvPr id="13" name="Text 11"/>
-          <p:cNvSpPr txBox="1"/>
-          <p:nvPr/>
-        </p:nvSpPr>
-        <p:spPr>
-          <a:xfrm>
-            <a:off x="5303520" y="2075688"/>
+          <p:cNvPr id="17" name="Text 15"/>
+          <p:cNvSpPr txBox="1"/>
+          <p:nvPr/>
+        </p:nvSpPr>
+        <p:spPr>
+          <a:xfrm>
+            <a:off x="5303520" y="3246120"/>
             <a:ext cx="4754880" cy="365760"/>
           </a:xfrm>
           <a:prstGeom prst="rect">
@@ -2151,7 +2056,7 @@
           <a:bodyPr wrap="square" lIns="0" tIns="0" rIns="0" bIns="0" rtlCol="0" anchor="ctr"/>
           <a:lstStyle/>
           <a:p>
-            <a:pPr indent="0" marL="0">
+            <a:pPr marL="0" indent="0">
               <a:buNone/>
             </a:pPr>
             <a:r>
@@ -2163,7 +2068,7 @@
                 <a:ea typeface="Calibri" pitchFamily="34" charset="-122"/>
                 <a:cs typeface="Calibri" pitchFamily="34" charset="-120"/>
               </a:rPr>
-              <a:t>Demand-led, volatile, hardest to forecast</a:t>
+              <a:t>Servicing, decoration – predictable</a:t>
             </a:r>
             <a:endParaRPr lang="en-US" sz="1150" dirty="0"/>
           </a:p>
@@ -2171,13 +2076,13 @@
       </p:sp>
       <p:sp>
         <p:nvSpPr>
-          <p:cNvPr id="14" name="Text 12"/>
-          <p:cNvSpPr txBox="1"/>
-          <p:nvPr/>
-        </p:nvSpPr>
-        <p:spPr>
-          <a:xfrm>
-            <a:off x="9966960" y="1746504"/>
+          <p:cNvPr id="18" name="Text 16"/>
+          <p:cNvSpPr txBox="1"/>
+          <p:nvPr/>
+        </p:nvSpPr>
+        <p:spPr>
+          <a:xfrm>
+            <a:off x="10009918" y="2909293"/>
             <a:ext cx="1463040" cy="274320"/>
           </a:xfrm>
           <a:prstGeom prst="rect">
@@ -2190,7 +2095,7 @@
           <a:bodyPr wrap="square" lIns="0" tIns="0" rIns="0" bIns="0" rtlCol="0" anchor="ctr"/>
           <a:lstStyle/>
           <a:p>
-            <a:pPr algn="r" indent="0" marL="0">
+            <a:pPr marL="0" indent="0" algn="r">
               <a:buNone/>
             </a:pPr>
             <a:r>
@@ -2210,13 +2115,13 @@
       </p:sp>
       <p:sp>
         <p:nvSpPr>
-          <p:cNvPr id="15" name="Shape 13"/>
+          <p:cNvPr id="19" name="Shape 17"/>
           <p:cNvSpPr/>
           <p:nvPr/>
         </p:nvSpPr>
         <p:spPr>
           <a:xfrm>
-            <a:off x="5029200" y="2770632"/>
+            <a:off x="5029200" y="5404104"/>
             <a:ext cx="6611112" cy="1024128"/>
           </a:xfrm>
           <a:prstGeom prst="roundRect">
@@ -2234,16 +2139,23 @@
             <a:prstDash val="solid"/>
           </a:ln>
         </p:spPr>
-      </p:sp>
-      <p:sp>
-        <p:nvSpPr>
-          <p:cNvPr id="16" name="Text 14"/>
-          <p:cNvSpPr txBox="1"/>
-          <p:nvPr/>
-        </p:nvSpPr>
-        <p:spPr>
-          <a:xfrm>
-            <a:off x="5303520" y="2916936"/>
+        <p:txBody>
+          <a:bodyPr/>
+          <a:lstStyle/>
+          <a:p>
+            <a:endParaRPr lang="en-GB"/>
+          </a:p>
+        </p:txBody>
+      </p:sp>
+      <p:sp>
+        <p:nvSpPr>
+          <p:cNvPr id="20" name="Text 18"/>
+          <p:cNvSpPr txBox="1"/>
+          <p:nvPr/>
+        </p:nvSpPr>
+        <p:spPr>
+          <a:xfrm>
+            <a:off x="5303520" y="5545372"/>
             <a:ext cx="4206240" cy="292608"/>
           </a:xfrm>
           <a:prstGeom prst="rect">
@@ -2256,7 +2168,7 @@
           <a:bodyPr wrap="square" lIns="0" tIns="0" rIns="0" bIns="0" rtlCol="0" anchor="ctr"/>
           <a:lstStyle/>
           <a:p>
-            <a:pPr indent="0" marL="0">
+            <a:pPr marL="0" indent="0">
               <a:buNone/>
             </a:pPr>
             <a:r>
@@ -2268,7 +2180,7 @@
                 <a:ea typeface="Calibri" pitchFamily="34" charset="-122"/>
                 <a:cs typeface="Calibri" pitchFamily="34" charset="-120"/>
               </a:rPr>
-              <a:t>Cyclical &amp; compliance</a:t>
+              <a:t>Planned &amp; major works</a:t>
             </a:r>
             <a:endParaRPr lang="en-US" sz="1400" dirty="0"/>
           </a:p>
@@ -2276,13 +2188,13 @@
       </p:sp>
       <p:sp>
         <p:nvSpPr>
-          <p:cNvPr id="17" name="Text 15"/>
-          <p:cNvSpPr txBox="1"/>
-          <p:nvPr/>
-        </p:nvSpPr>
-        <p:spPr>
-          <a:xfrm>
-            <a:off x="5303520" y="3246120"/>
+          <p:cNvPr id="21" name="Text 19"/>
+          <p:cNvSpPr txBox="1"/>
+          <p:nvPr/>
+        </p:nvSpPr>
+        <p:spPr>
+          <a:xfrm>
+            <a:off x="5303520" y="5954397"/>
             <a:ext cx="4754880" cy="365760"/>
           </a:xfrm>
           <a:prstGeom prst="rect">
@@ -2295,7 +2207,7 @@
           <a:bodyPr wrap="square" lIns="0" tIns="0" rIns="0" bIns="0" rtlCol="0" anchor="ctr"/>
           <a:lstStyle/>
           <a:p>
-            <a:pPr indent="0" marL="0">
+            <a:pPr marL="0" indent="0">
               <a:buNone/>
             </a:pPr>
             <a:r>
@@ -2307,7 +2219,7 @@
                 <a:ea typeface="Calibri" pitchFamily="34" charset="-122"/>
                 <a:cs typeface="Calibri" pitchFamily="34" charset="-120"/>
               </a:rPr>
-              <a:t>Servicing and the big six — protected spend</a:t>
+              <a:t>Component replacement, WHQS, retrofit</a:t>
             </a:r>
             <a:endParaRPr lang="en-US" sz="1150" dirty="0"/>
           </a:p>
@@ -2315,13 +2227,13 @@
       </p:sp>
       <p:sp>
         <p:nvSpPr>
-          <p:cNvPr id="18" name="Text 16"/>
-          <p:cNvSpPr txBox="1"/>
-          <p:nvPr/>
-        </p:nvSpPr>
-        <p:spPr>
-          <a:xfrm>
-            <a:off x="9966960" y="2916936"/>
+          <p:cNvPr id="22" name="Text 20"/>
+          <p:cNvSpPr txBox="1"/>
+          <p:nvPr/>
+        </p:nvSpPr>
+        <p:spPr>
+          <a:xfrm>
+            <a:off x="10058400" y="5467867"/>
             <a:ext cx="1463040" cy="274320"/>
           </a:xfrm>
           <a:prstGeom prst="rect">
@@ -2334,257 +2246,21 @@
           <a:bodyPr wrap="square" lIns="0" tIns="0" rIns="0" bIns="0" rtlCol="0" anchor="ctr"/>
           <a:lstStyle/>
           <a:p>
-            <a:pPr algn="r" indent="0" marL="0">
+            <a:pPr marL="0" indent="0" algn="r">
               <a:buNone/>
             </a:pPr>
             <a:r>
               <a:rPr lang="en-US" sz="1050" b="1" dirty="0">
                 <a:solidFill>
-                  <a:srgbClr val="2E7D68"/>
-                </a:solidFill>
-                <a:latin typeface="Calibri" pitchFamily="34" charset="0"/>
-                <a:ea typeface="Calibri" pitchFamily="34" charset="-122"/>
-                <a:cs typeface="Calibri" pitchFamily="34" charset="-120"/>
-              </a:rPr>
-              <a:t>Revenue</a:t>
+                  <a:srgbClr val="C8892F"/>
+                </a:solidFill>
+                <a:latin typeface="Calibri" pitchFamily="34" charset="0"/>
+                <a:ea typeface="Calibri" pitchFamily="34" charset="-122"/>
+                <a:cs typeface="Calibri" pitchFamily="34" charset="-120"/>
+              </a:rPr>
+              <a:t>Largely capital</a:t>
             </a:r>
             <a:endParaRPr lang="en-US" sz="1050" dirty="0"/>
-          </a:p>
-        </p:txBody>
-      </p:sp>
-      <p:sp>
-        <p:nvSpPr>
-          <p:cNvPr id="19" name="Shape 17"/>
-          <p:cNvSpPr/>
-          <p:nvPr/>
-        </p:nvSpPr>
-        <p:spPr>
-          <a:xfrm>
-            <a:off x="5029200" y="3941064"/>
-            <a:ext cx="6611112" cy="1024128"/>
-          </a:xfrm>
-          <a:prstGeom prst="roundRect">
-            <a:avLst>
-              <a:gd name="adj" fmla="val 5357"/>
-            </a:avLst>
-          </a:prstGeom>
-          <a:solidFill>
-            <a:srgbClr val="F1F5F3"/>
-          </a:solidFill>
-          <a:ln w="12700">
-            <a:solidFill>
-              <a:srgbClr val="F1F5F3"/>
-            </a:solidFill>
-            <a:prstDash val="solid"/>
-          </a:ln>
-        </p:spPr>
-      </p:sp>
-      <p:sp>
-        <p:nvSpPr>
-          <p:cNvPr id="20" name="Text 18"/>
-          <p:cNvSpPr txBox="1"/>
-          <p:nvPr/>
-        </p:nvSpPr>
-        <p:spPr>
-          <a:xfrm>
-            <a:off x="5303520" y="4087368"/>
-            <a:ext cx="4206240" cy="292608"/>
-          </a:xfrm>
-          <a:prstGeom prst="rect">
-            <a:avLst/>
-          </a:prstGeom>
-          <a:noFill/>
-          <a:ln/>
-        </p:spPr>
-        <p:txBody>
-          <a:bodyPr wrap="square" lIns="0" tIns="0" rIns="0" bIns="0" rtlCol="0" anchor="ctr"/>
-          <a:lstStyle/>
-          <a:p>
-            <a:pPr indent="0" marL="0">
-              <a:buNone/>
-            </a:pPr>
-            <a:r>
-              <a:rPr lang="en-US" sz="1400" b="1" dirty="0">
-                <a:solidFill>
-                  <a:srgbClr val="16211E"/>
-                </a:solidFill>
-                <a:latin typeface="Calibri" pitchFamily="34" charset="0"/>
-                <a:ea typeface="Calibri" pitchFamily="34" charset="-122"/>
-                <a:cs typeface="Calibri" pitchFamily="34" charset="-120"/>
-              </a:rPr>
-              <a:t>Planned &amp; major works</a:t>
-            </a:r>
-            <a:endParaRPr lang="en-US" sz="1400" dirty="0"/>
-          </a:p>
-        </p:txBody>
-      </p:sp>
-      <p:sp>
-        <p:nvSpPr>
-          <p:cNvPr id="21" name="Text 19"/>
-          <p:cNvSpPr txBox="1"/>
-          <p:nvPr/>
-        </p:nvSpPr>
-        <p:spPr>
-          <a:xfrm>
-            <a:off x="5303520" y="4416552"/>
-            <a:ext cx="4754880" cy="365760"/>
-          </a:xfrm>
-          <a:prstGeom prst="rect">
-            <a:avLst/>
-          </a:prstGeom>
-          <a:noFill/>
-          <a:ln/>
-        </p:spPr>
-        <p:txBody>
-          <a:bodyPr wrap="square" lIns="0" tIns="0" rIns="0" bIns="0" rtlCol="0" anchor="ctr"/>
-          <a:lstStyle/>
-          <a:p>
-            <a:pPr indent="0" marL="0">
-              <a:buNone/>
-            </a:pPr>
-            <a:r>
-              <a:rPr lang="en-US" sz="1150" dirty="0">
-                <a:solidFill>
-                  <a:srgbClr val="6E7D78"/>
-                </a:solidFill>
-                <a:latin typeface="Calibri" pitchFamily="34" charset="0"/>
-                <a:ea typeface="Calibri" pitchFamily="34" charset="-122"/>
-                <a:cs typeface="Calibri" pitchFamily="34" charset="-120"/>
-              </a:rPr>
-              <a:t>Component replacement, WHQS, retrofit</a:t>
-            </a:r>
-            <a:endParaRPr lang="en-US" sz="1150" dirty="0"/>
-          </a:p>
-        </p:txBody>
-      </p:sp>
-      <p:sp>
-        <p:nvSpPr>
-          <p:cNvPr id="22" name="Text 20"/>
-          <p:cNvSpPr txBox="1"/>
-          <p:nvPr/>
-        </p:nvSpPr>
-        <p:spPr>
-          <a:xfrm>
-            <a:off x="9966960" y="4087368"/>
-            <a:ext cx="1463040" cy="274320"/>
-          </a:xfrm>
-          <a:prstGeom prst="rect">
-            <a:avLst/>
-          </a:prstGeom>
-          <a:noFill/>
-          <a:ln/>
-        </p:spPr>
-        <p:txBody>
-          <a:bodyPr wrap="square" lIns="0" tIns="0" rIns="0" bIns="0" rtlCol="0" anchor="ctr"/>
-          <a:lstStyle/>
-          <a:p>
-            <a:pPr algn="r" indent="0" marL="0">
-              <a:buNone/>
-            </a:pPr>
-            <a:r>
-              <a:rPr lang="en-US" sz="1050" b="1" dirty="0">
-                <a:solidFill>
-                  <a:srgbClr val="C8892F"/>
-                </a:solidFill>
-                <a:latin typeface="Calibri" pitchFamily="34" charset="0"/>
-                <a:ea typeface="Calibri" pitchFamily="34" charset="-122"/>
-                <a:cs typeface="Calibri" pitchFamily="34" charset="-120"/>
-              </a:rPr>
-              <a:t>Largely capital</a:t>
-            </a:r>
-            <a:endParaRPr lang="en-US" sz="1050" dirty="0"/>
-          </a:p>
-        </p:txBody>
-      </p:sp>
-      <p:sp>
-        <p:nvSpPr>
-          <p:cNvPr id="23" name="Text 21"/>
-          <p:cNvSpPr txBox="1"/>
-          <p:nvPr/>
-        </p:nvSpPr>
-        <p:spPr>
-          <a:xfrm>
-            <a:off x="5029200" y="5166360"/>
-            <a:ext cx="6611112" cy="411480"/>
-          </a:xfrm>
-          <a:prstGeom prst="rect">
-            <a:avLst/>
-          </a:prstGeom>
-          <a:noFill/>
-          <a:ln/>
-        </p:spPr>
-        <p:txBody>
-          <a:bodyPr wrap="square" lIns="0" tIns="0" rIns="0" bIns="0" rtlCol="0" anchor="ctr"/>
-          <a:lstStyle/>
-          <a:p>
-            <a:pPr indent="0" marL="0">
-              <a:buNone/>
-            </a:pPr>
-            <a:r>
-              <a:rPr lang="en-US" sz="1350" b="1" dirty="0">
-                <a:solidFill>
-                  <a:srgbClr val="16211E"/>
-                </a:solidFill>
-                <a:latin typeface="Calibri" pitchFamily="34" charset="0"/>
-                <a:ea typeface="Calibri" pitchFamily="34" charset="-122"/>
-                <a:cs typeface="Calibri" pitchFamily="34" charset="-120"/>
-              </a:rPr>
-              <a:t>One budget, three very different cost behaviours. </a:t>
-            </a:r>
-            <a:pPr indent="0" marL="0">
-              <a:buNone/>
-            </a:pPr>
-            <a:r>
-              <a:rPr lang="en-US" sz="1350" dirty="0">
-                <a:solidFill>
-                  <a:srgbClr val="33423D"/>
-                </a:solidFill>
-                <a:latin typeface="Calibri" pitchFamily="34" charset="0"/>
-                <a:ea typeface="Calibri" pitchFamily="34" charset="-122"/>
-                <a:cs typeface="Calibri" pitchFamily="34" charset="-120"/>
-              </a:rPr>
-              <a:t>You cannot forecast the total — you forecast the drivers underneath it.</a:t>
-            </a:r>
-            <a:endParaRPr lang="en-US" sz="1350" dirty="0"/>
-          </a:p>
-        </p:txBody>
-      </p:sp>
-      <p:sp>
-        <p:nvSpPr>
-          <p:cNvPr id="24" name="Text 22"/>
-          <p:cNvSpPr txBox="1"/>
-          <p:nvPr/>
-        </p:nvSpPr>
-        <p:spPr>
-          <a:xfrm>
-            <a:off x="5029200" y="5669280"/>
-            <a:ext cx="6611112" cy="274320"/>
-          </a:xfrm>
-          <a:prstGeom prst="rect">
-            <a:avLst/>
-          </a:prstGeom>
-          <a:noFill/>
-          <a:ln/>
-        </p:spPr>
-        <p:txBody>
-          <a:bodyPr wrap="square" lIns="0" tIns="0" rIns="0" bIns="0" rtlCol="0" anchor="ctr"/>
-          <a:lstStyle/>
-          <a:p>
-            <a:pPr indent="0" marL="0">
-              <a:buNone/>
-            </a:pPr>
-            <a:r>
-              <a:rPr lang="en-US" sz="1000" i="1" dirty="0">
-                <a:solidFill>
-                  <a:srgbClr val="6E7D78"/>
-                </a:solidFill>
-                <a:latin typeface="Calibri" pitchFamily="34" charset="0"/>
-                <a:ea typeface="Calibri" pitchFamily="34" charset="-122"/>
-                <a:cs typeface="Calibri" pitchFamily="34" charset="-120"/>
-              </a:rPr>
-              <a:t>Illustrative categories, to show how I would cut the budget — not Codi's actual structure.</a:t>
-            </a:r>
-            <a:endParaRPr lang="en-US" sz="1000" dirty="0"/>
           </a:p>
         </p:txBody>
       </p:sp>
@@ -2609,7 +2285,7 @@
           <a:bodyPr wrap="square" lIns="0" tIns="0" rIns="0" bIns="0" rtlCol="0" anchor="ctr"/>
           <a:lstStyle/>
           <a:p>
-            <a:pPr algn="l" indent="0" marL="0">
+            <a:pPr marL="0" indent="0" algn="l">
               <a:buNone/>
             </a:pPr>
             <a:r>
@@ -2648,7 +2324,7 @@
           <a:bodyPr wrap="square" lIns="0" tIns="0" rIns="0" bIns="0" rtlCol="0" anchor="ctr"/>
           <a:lstStyle/>
           <a:p>
-            <a:pPr algn="r" indent="0" marL="0">
+            <a:pPr marL="0" indent="0" algn="r">
               <a:buNone/>
             </a:pPr>
             <a:r>
@@ -2663,6 +2339,178 @@
               <a:t>2</a:t>
             </a:r>
             <a:endParaRPr lang="en-US" sz="900" dirty="0"/>
+          </a:p>
+        </p:txBody>
+      </p:sp>
+      <p:pic>
+        <p:nvPicPr>
+          <p:cNvPr id="28" name="Picture 27">
+            <a:extLst>
+              <a:ext uri="{FF2B5EF4-FFF2-40B4-BE49-F238E27FC236}">
+                <a16:creationId xmlns:a16="http://schemas.microsoft.com/office/drawing/2014/main" id="{91873581-5BEA-A6D0-06D1-E24C0FDDC8D0}"/>
+              </a:ext>
+            </a:extLst>
+          </p:cNvPr>
+          <p:cNvPicPr>
+            <a:picLocks noChangeAspect="1"/>
+          </p:cNvPicPr>
+          <p:nvPr/>
+        </p:nvPicPr>
+        <p:blipFill>
+          <a:blip r:embed="rId3"/>
+          <a:stretch>
+            <a:fillRect/>
+          </a:stretch>
+        </p:blipFill>
+        <p:spPr>
+          <a:xfrm>
+            <a:off x="5031674" y="4001474"/>
+            <a:ext cx="6626926" cy="1036410"/>
+          </a:xfrm>
+          <a:prstGeom prst="rect">
+            <a:avLst/>
+          </a:prstGeom>
+        </p:spPr>
+      </p:pic>
+      <p:sp>
+        <p:nvSpPr>
+          <p:cNvPr id="30" name="TextBox 29">
+            <a:extLst>
+              <a:ext uri="{FF2B5EF4-FFF2-40B4-BE49-F238E27FC236}">
+                <a16:creationId xmlns:a16="http://schemas.microsoft.com/office/drawing/2014/main" id="{DC4C8514-6341-1D8D-594B-9017E794FA69}"/>
+              </a:ext>
+            </a:extLst>
+          </p:cNvPr>
+          <p:cNvSpPr txBox="1"/>
+          <p:nvPr/>
+        </p:nvSpPr>
+        <p:spPr>
+          <a:xfrm>
+            <a:off x="5178020" y="4111824"/>
+            <a:ext cx="6097022" cy="307777"/>
+          </a:xfrm>
+          <a:prstGeom prst="rect">
+            <a:avLst/>
+          </a:prstGeom>
+          <a:noFill/>
+        </p:spPr>
+        <p:txBody>
+          <a:bodyPr wrap="square">
+            <a:spAutoFit/>
+          </a:bodyPr>
+          <a:lstStyle/>
+          <a:p>
+            <a:r>
+              <a:rPr lang="en-US" sz="1400" b="1" dirty="0">
+                <a:solidFill>
+                  <a:srgbClr val="16211E"/>
+                </a:solidFill>
+                <a:latin typeface="Calibri" pitchFamily="34" charset="0"/>
+                <a:ea typeface="Calibri" pitchFamily="34" charset="-122"/>
+                <a:cs typeface="Calibri" pitchFamily="34" charset="-120"/>
+              </a:rPr>
+              <a:t>C</a:t>
+            </a:r>
+            <a:r>
+              <a:rPr kumimoji="0" lang="en-US" sz="1400" b="1" i="0" u="none" strike="noStrike" kern="1200" cap="none" spc="0" normalizeH="0" baseline="0" noProof="0" dirty="0" err="1">
+                <a:ln>
+                  <a:noFill/>
+                </a:ln>
+                <a:solidFill>
+                  <a:srgbClr val="16211E"/>
+                </a:solidFill>
+                <a:effectLst/>
+                <a:uLnTx/>
+                <a:uFillTx/>
+                <a:latin typeface="Calibri" pitchFamily="34" charset="0"/>
+                <a:ea typeface="Calibri" pitchFamily="34" charset="-122"/>
+                <a:cs typeface="Calibri" pitchFamily="34" charset="-120"/>
+              </a:rPr>
+              <a:t>ompliance</a:t>
+            </a:r>
+            <a:endParaRPr lang="en-GB" dirty="0"/>
+          </a:p>
+        </p:txBody>
+      </p:sp>
+      <p:sp>
+        <p:nvSpPr>
+          <p:cNvPr id="34" name="Text 15">
+            <a:extLst>
+              <a:ext uri="{FF2B5EF4-FFF2-40B4-BE49-F238E27FC236}">
+                <a16:creationId xmlns:a16="http://schemas.microsoft.com/office/drawing/2014/main" id="{FBC68662-6999-3504-A7BC-7667B3F8FFF3}"/>
+              </a:ext>
+            </a:extLst>
+          </p:cNvPr>
+          <p:cNvSpPr txBox="1"/>
+          <p:nvPr/>
+        </p:nvSpPr>
+        <p:spPr>
+          <a:xfrm>
+            <a:off x="5303520" y="4435455"/>
+            <a:ext cx="4754880" cy="365760"/>
+          </a:xfrm>
+          <a:prstGeom prst="rect">
+            <a:avLst/>
+          </a:prstGeom>
+          <a:noFill/>
+          <a:ln/>
+        </p:spPr>
+        <p:txBody>
+          <a:bodyPr wrap="square" lIns="0" tIns="0" rIns="0" bIns="0" rtlCol="0" anchor="ctr"/>
+          <a:lstStyle/>
+          <a:p>
+            <a:pPr marL="0" indent="0">
+              <a:buNone/>
+            </a:pPr>
+            <a:r>
+              <a:rPr lang="en-US" sz="1150" dirty="0"/>
+              <a:t>Non-negotiable spend</a:t>
+            </a:r>
+          </a:p>
+        </p:txBody>
+      </p:sp>
+      <p:sp>
+        <p:nvSpPr>
+          <p:cNvPr id="36" name="Text 16">
+            <a:extLst>
+              <a:ext uri="{FF2B5EF4-FFF2-40B4-BE49-F238E27FC236}">
+                <a16:creationId xmlns:a16="http://schemas.microsoft.com/office/drawing/2014/main" id="{A0315F99-5FF9-C772-D5E8-EAB1771A3726}"/>
+              </a:ext>
+            </a:extLst>
+          </p:cNvPr>
+          <p:cNvSpPr txBox="1"/>
+          <p:nvPr/>
+        </p:nvSpPr>
+        <p:spPr>
+          <a:xfrm>
+            <a:off x="10058400" y="4020576"/>
+            <a:ext cx="1463040" cy="274320"/>
+          </a:xfrm>
+          <a:prstGeom prst="rect">
+            <a:avLst/>
+          </a:prstGeom>
+          <a:noFill/>
+          <a:ln/>
+        </p:spPr>
+        <p:txBody>
+          <a:bodyPr wrap="square" lIns="0" tIns="0" rIns="0" bIns="0" rtlCol="0" anchor="ctr"/>
+          <a:lstStyle/>
+          <a:p>
+            <a:pPr marL="0" indent="0" algn="r">
+              <a:buNone/>
+            </a:pPr>
+            <a:r>
+              <a:rPr lang="en-US" sz="1050" b="1" dirty="0">
+                <a:solidFill>
+                  <a:srgbClr val="2E7D68"/>
+                </a:solidFill>
+                <a:latin typeface="Calibri" pitchFamily="34" charset="0"/>
+                <a:ea typeface="Calibri" pitchFamily="34" charset="-122"/>
+                <a:cs typeface="Calibri" pitchFamily="34" charset="-120"/>
+              </a:rPr>
+              <a:t>Revenue</a:t>
+            </a:r>
+            <a:endParaRPr lang="en-US" sz="1050" dirty="0"/>
           </a:p>
         </p:txBody>
       </p:sp>
@@ -2682,6 +2530,7 @@
         <a:solidFill>
           <a:srgbClr val="FFFFFF"/>
         </a:solidFill>
+        <a:effectLst/>
       </p:bgPr>
     </p:bg>
     <p:spTree>
@@ -2719,11 +2568,11 @@
           <a:bodyPr wrap="square" lIns="0" tIns="0" rIns="0" bIns="0" rtlCol="0" anchor="ctr"/>
           <a:lstStyle/>
           <a:p>
-            <a:pPr indent="0" marL="0">
-              <a:buNone/>
-            </a:pPr>
-            <a:r>
-              <a:rPr lang="en-US" sz="1000" b="1" spc="220" kern="0" dirty="0">
+            <a:pPr marL="0" indent="0">
+              <a:buNone/>
+            </a:pPr>
+            <a:r>
+              <a:rPr lang="en-US" sz="1000" b="1" kern="0" spc="220" dirty="0">
                 <a:solidFill>
                   <a:srgbClr val="C8892F"/>
                 </a:solidFill>
@@ -2758,7 +2607,7 @@
           <a:bodyPr wrap="square" lIns="0" tIns="0" rIns="0" bIns="0" rtlCol="0" anchor="ctr"/>
           <a:lstStyle/>
           <a:p>
-            <a:pPr indent="0" marL="0">
+            <a:pPr marL="0" indent="0">
               <a:buNone/>
             </a:pPr>
             <a:r>
@@ -2770,7 +2619,7 @@
                 <a:ea typeface="Cambria" pitchFamily="34" charset="-122"/>
                 <a:cs typeface="Cambria" pitchFamily="34" charset="-120"/>
               </a:rPr>
-              <a:t>Three hypotheses I would arrive with</a:t>
+              <a:t>Three things I'd check first</a:t>
             </a:r>
             <a:endParaRPr lang="en-US" sz="3000" dirty="0"/>
           </a:p>
@@ -2797,7 +2646,7 @@
           <a:bodyPr wrap="square" lIns="0" tIns="0" rIns="0" bIns="0" rtlCol="0" anchor="ctr"/>
           <a:lstStyle/>
           <a:p>
-            <a:pPr indent="0" marL="0">
+            <a:pPr marL="0" indent="0">
               <a:buNone/>
             </a:pPr>
             <a:r>
@@ -2809,7 +2658,7 @@
                 <a:ea typeface="Calibri" pitchFamily="34" charset="-122"/>
                 <a:cs typeface="Calibri" pitchFamily="34" charset="-120"/>
               </a:rPr>
-              <a:t>Each is a question with a data test attached — not a conclusion.</a:t>
+              <a:t>These are questions, not answers. Each one has something I can go and check.</a:t>
             </a:r>
             <a:endParaRPr lang="en-US" sz="1350" dirty="0"/>
           </a:p>
@@ -2841,6 +2690,13 @@
             <a:prstDash val="solid"/>
           </a:ln>
         </p:spPr>
+        <p:txBody>
+          <a:bodyPr/>
+          <a:lstStyle/>
+          <a:p>
+            <a:endParaRPr lang="en-GB"/>
+          </a:p>
+        </p:txBody>
       </p:sp>
       <p:sp>
         <p:nvSpPr>
@@ -2861,6 +2717,13 @@
           </a:solidFill>
           <a:ln/>
         </p:spPr>
+        <p:txBody>
+          <a:bodyPr/>
+          <a:lstStyle/>
+          <a:p>
+            <a:endParaRPr lang="en-GB"/>
+          </a:p>
+        </p:txBody>
       </p:sp>
       <p:sp>
         <p:nvSpPr>
@@ -2883,7 +2746,7 @@
           <a:bodyPr wrap="square" lIns="0" tIns="0" rIns="0" bIns="0" rtlCol="0" anchor="ctr"/>
           <a:lstStyle/>
           <a:p>
-            <a:pPr algn="ctr" indent="0" marL="0">
+            <a:pPr marL="0" indent="0" algn="ctr">
               <a:buNone/>
             </a:pPr>
             <a:r>
@@ -2922,7 +2785,7 @@
           <a:bodyPr wrap="square" lIns="0" tIns="0" rIns="0" bIns="0" rtlCol="0" anchor="ctr"/>
           <a:lstStyle/>
           <a:p>
-            <a:pPr indent="0" marL="0">
+            <a:pPr marL="0" indent="0">
               <a:buNone/>
             </a:pPr>
             <a:r>
@@ -2934,7 +2797,7 @@
                 <a:ea typeface="Cambria" pitchFamily="34" charset="-122"/>
                 <a:cs typeface="Cambria" pitchFamily="34" charset="-120"/>
               </a:rPr>
-              <a:t>Delivery mix</a:t>
+              <a:t>Who does the work</a:t>
             </a:r>
             <a:endParaRPr lang="en-US" sz="1900" dirty="0"/>
           </a:p>
@@ -2961,7 +2824,7 @@
           <a:bodyPr wrap="square" lIns="0" tIns="0" rIns="0" bIns="0" rtlCol="0" anchor="t"/>
           <a:lstStyle/>
           <a:p>
-            <a:pPr indent="0" marL="0">
+            <a:pPr marL="0" indent="0">
               <a:lnSpc>
                 <a:spcPts val="1700"/>
               </a:lnSpc>
@@ -2976,7 +2839,7 @@
                 <a:ea typeface="Calibri" pitchFamily="34" charset="-122"/>
                 <a:cs typeface="Calibri" pitchFamily="34" charset="-120"/>
               </a:rPr>
-              <a:t>Pobl expanded its in-house trades team by c.50% — 34 roles — in 2024, alongside an 11-lot framework for responsive repairs, voids and out-of-hours.</a:t>
+              <a:t>Pobl grew its in-house trades team by about half (34 roles) in 2024. There is also a contractor framework of 11 lots covering repairs, voids and out-of-hours.</a:t>
             </a:r>
             <a:endParaRPr lang="en-US" sz="1200" dirty="0"/>
           </a:p>
@@ -3003,11 +2866,11 @@
           <a:bodyPr wrap="square" lIns="0" tIns="0" rIns="0" bIns="0" rtlCol="0" anchor="ctr"/>
           <a:lstStyle/>
           <a:p>
-            <a:pPr indent="0" marL="0">
-              <a:buNone/>
-            </a:pPr>
-            <a:r>
-              <a:rPr lang="en-US" sz="900" b="1" spc="180" kern="0" dirty="0">
+            <a:pPr marL="0" indent="0">
+              <a:buNone/>
+            </a:pPr>
+            <a:r>
+              <a:rPr lang="en-US" sz="900" b="1" kern="0" spc="180" dirty="0">
                 <a:solidFill>
                   <a:srgbClr val="C8892F"/>
                 </a:solidFill>
@@ -3015,7 +2878,7 @@
                 <a:ea typeface="Calibri" pitchFamily="34" charset="-122"/>
                 <a:cs typeface="Calibri" pitchFamily="34" charset="-120"/>
               </a:rPr>
-              <a:t>THE TEST</a:t>
+              <a:t>WHAT I'D CHECK</a:t>
             </a:r>
             <a:endParaRPr lang="en-US" sz="900" dirty="0"/>
           </a:p>
@@ -3042,7 +2905,7 @@
           <a:bodyPr wrap="square" lIns="0" tIns="0" rIns="0" bIns="0" rtlCol="0" anchor="t"/>
           <a:lstStyle/>
           <a:p>
-            <a:pPr indent="0" marL="0">
+            <a:pPr marL="0" indent="0">
               <a:lnSpc>
                 <a:spcPts val="1600"/>
               </a:lnSpc>
@@ -3057,7 +2920,7 @@
                 <a:ea typeface="Calibri" pitchFamily="34" charset="-122"/>
                 <a:cs typeface="Calibri" pitchFamily="34" charset="-120"/>
               </a:rPr>
-              <a:t>Has external spend stepped down in proportion to the capacity we insourced, or are we carrying both?</a:t>
+              <a:t>Has contractor spend come down now we do more in-house, or are we paying for both?</a:t>
             </a:r>
             <a:endParaRPr lang="en-US" sz="1150" dirty="0"/>
           </a:p>
@@ -3089,6 +2952,13 @@
             <a:prstDash val="solid"/>
           </a:ln>
         </p:spPr>
+        <p:txBody>
+          <a:bodyPr/>
+          <a:lstStyle/>
+          <a:p>
+            <a:endParaRPr lang="en-GB"/>
+          </a:p>
+        </p:txBody>
       </p:sp>
       <p:sp>
         <p:nvSpPr>
@@ -3109,6 +2979,13 @@
           </a:solidFill>
           <a:ln/>
         </p:spPr>
+        <p:txBody>
+          <a:bodyPr/>
+          <a:lstStyle/>
+          <a:p>
+            <a:endParaRPr lang="en-GB"/>
+          </a:p>
+        </p:txBody>
       </p:sp>
       <p:sp>
         <p:nvSpPr>
@@ -3131,7 +3008,7 @@
           <a:bodyPr wrap="square" lIns="0" tIns="0" rIns="0" bIns="0" rtlCol="0" anchor="ctr"/>
           <a:lstStyle/>
           <a:p>
-            <a:pPr algn="ctr" indent="0" marL="0">
+            <a:pPr marL="0" indent="0" algn="ctr">
               <a:buNone/>
             </a:pPr>
             <a:r>
@@ -3170,7 +3047,7 @@
           <a:bodyPr wrap="square" lIns="0" tIns="0" rIns="0" bIns="0" rtlCol="0" anchor="ctr"/>
           <a:lstStyle/>
           <a:p>
-            <a:pPr indent="0" marL="0">
+            <a:pPr marL="0" indent="0">
               <a:buNone/>
             </a:pPr>
             <a:r>
@@ -3182,7 +3059,7 @@
                 <a:ea typeface="Cambria" pitchFamily="34" charset="-122"/>
                 <a:cs typeface="Cambria" pitchFamily="34" charset="-120"/>
               </a:rPr>
-              <a:t>Regulation</a:t>
+              <a:t>The new repair rules</a:t>
             </a:r>
             <a:endParaRPr lang="en-US" sz="1900" dirty="0"/>
           </a:p>
@@ -3209,7 +3086,7 @@
           <a:bodyPr wrap="square" lIns="0" tIns="0" rIns="0" bIns="0" rtlCol="0" anchor="t"/>
           <a:lstStyle/>
           <a:p>
-            <a:pPr indent="0" marL="0">
+            <a:pPr marL="0" indent="0">
               <a:lnSpc>
                 <a:spcPts val="1700"/>
               </a:lnSpc>
@@ -3224,7 +3101,7 @@
                 <a:ea typeface="Calibri" pitchFamily="34" charset="-122"/>
                 <a:cs typeface="Calibri" pitchFamily="34" charset="-120"/>
               </a:rPr>
-              <a:t>WHQS hazard response took effect 1 April 2026: investigate and remedy within 24 hours each where harm is imminent; 10 then 5 working days otherwise.</a:t>
+              <a:t>From 1 April 2026, WHQS sets response times. Urgent hazards: 24 hours to investigate, 24 to fix. Everything else: 10 working days, then 5.</a:t>
             </a:r>
             <a:endParaRPr lang="en-US" sz="1200" dirty="0"/>
           </a:p>
@@ -3251,11 +3128,11 @@
           <a:bodyPr wrap="square" lIns="0" tIns="0" rIns="0" bIns="0" rtlCol="0" anchor="ctr"/>
           <a:lstStyle/>
           <a:p>
-            <a:pPr indent="0" marL="0">
-              <a:buNone/>
-            </a:pPr>
-            <a:r>
-              <a:rPr lang="en-US" sz="900" b="1" spc="180" kern="0" dirty="0">
+            <a:pPr marL="0" indent="0">
+              <a:buNone/>
+            </a:pPr>
+            <a:r>
+              <a:rPr lang="en-US" sz="900" b="1" kern="0" spc="180" dirty="0">
                 <a:solidFill>
                   <a:srgbClr val="C8892F"/>
                 </a:solidFill>
@@ -3263,7 +3140,7 @@
                 <a:ea typeface="Calibri" pitchFamily="34" charset="-122"/>
                 <a:cs typeface="Calibri" pitchFamily="34" charset="-120"/>
               </a:rPr>
-              <a:t>THE TEST</a:t>
+              <a:t>WHAT I'D CHECK</a:t>
             </a:r>
             <a:endParaRPr lang="en-US" sz="900" dirty="0"/>
           </a:p>
@@ -3290,7 +3167,7 @@
           <a:bodyPr wrap="square" lIns="0" tIns="0" rIns="0" bIns="0" rtlCol="0" anchor="t"/>
           <a:lstStyle/>
           <a:p>
-            <a:pPr indent="0" marL="0">
+            <a:pPr marL="0" indent="0">
               <a:lnSpc>
                 <a:spcPts val="1600"/>
               </a:lnSpc>
@@ -3305,7 +3182,7 @@
                 <a:ea typeface="Calibri" pitchFamily="34" charset="-122"/>
                 <a:cs typeface="Calibri" pitchFamily="34" charset="-120"/>
               </a:rPr>
-              <a:t>What has that done to job volume, out-of-hours and premium call-off, and to how densely we can schedule?</a:t>
+              <a:t>How much extra out-of-hours and emergency work has this created, and is it harder to plan jobs?</a:t>
             </a:r>
             <a:endParaRPr lang="en-US" sz="1150" dirty="0"/>
           </a:p>
@@ -3337,6 +3214,13 @@
             <a:prstDash val="solid"/>
           </a:ln>
         </p:spPr>
+        <p:txBody>
+          <a:bodyPr/>
+          <a:lstStyle/>
+          <a:p>
+            <a:endParaRPr lang="en-GB"/>
+          </a:p>
+        </p:txBody>
       </p:sp>
       <p:sp>
         <p:nvSpPr>
@@ -3357,6 +3241,13 @@
           </a:solidFill>
           <a:ln/>
         </p:spPr>
+        <p:txBody>
+          <a:bodyPr/>
+          <a:lstStyle/>
+          <a:p>
+            <a:endParaRPr lang="en-GB"/>
+          </a:p>
+        </p:txBody>
       </p:sp>
       <p:sp>
         <p:nvSpPr>
@@ -3379,7 +3270,7 @@
           <a:bodyPr wrap="square" lIns="0" tIns="0" rIns="0" bIns="0" rtlCol="0" anchor="ctr"/>
           <a:lstStyle/>
           <a:p>
-            <a:pPr algn="ctr" indent="0" marL="0">
+            <a:pPr marL="0" indent="0" algn="ctr">
               <a:buNone/>
             </a:pPr>
             <a:r>
@@ -3418,7 +3309,7 @@
           <a:bodyPr wrap="square" lIns="0" tIns="0" rIns="0" bIns="0" rtlCol="0" anchor="ctr"/>
           <a:lstStyle/>
           <a:p>
-            <a:pPr indent="0" marL="0">
+            <a:pPr marL="0" indent="0">
               <a:buNone/>
             </a:pPr>
             <a:r>
@@ -3430,7 +3321,7 @@
                 <a:ea typeface="Cambria" pitchFamily="34" charset="-122"/>
                 <a:cs typeface="Cambria" pitchFamily="34" charset="-120"/>
               </a:rPr>
-              <a:t>Price</a:t>
+              <a:t>Costs going up</a:t>
             </a:r>
             <a:endParaRPr lang="en-US" sz="1900" dirty="0"/>
           </a:p>
@@ -3457,7 +3348,7 @@
           <a:bodyPr wrap="square" lIns="0" tIns="0" rIns="0" bIns="0" rtlCol="0" anchor="t"/>
           <a:lstStyle/>
           <a:p>
-            <a:pPr indent="0" marL="0">
+            <a:pPr marL="0" indent="0">
               <a:lnSpc>
                 <a:spcPts val="1700"/>
               </a:lnSpc>
@@ -3472,7 +3363,7 @@
                 <a:ea typeface="Calibri" pitchFamily="34" charset="-122"/>
                 <a:cs typeface="Calibri" pitchFamily="34" charset="-120"/>
               </a:rPr>
-              <a:t>Sector surveys put expected responsive repairs cost increases at c.23% this year, against c.10% in the regulator's global accounts.</a:t>
+              <a:t>Repairs costs across the sector are expected to rise by about 23% this year. The regulator's published figures suggested nearer 10%.</a:t>
             </a:r>
             <a:endParaRPr lang="en-US" sz="1200" dirty="0"/>
           </a:p>
@@ -3499,11 +3390,11 @@
           <a:bodyPr wrap="square" lIns="0" tIns="0" rIns="0" bIns="0" rtlCol="0" anchor="ctr"/>
           <a:lstStyle/>
           <a:p>
-            <a:pPr indent="0" marL="0">
-              <a:buNone/>
-            </a:pPr>
-            <a:r>
-              <a:rPr lang="en-US" sz="900" b="1" spc="180" kern="0" dirty="0">
+            <a:pPr marL="0" indent="0">
+              <a:buNone/>
+            </a:pPr>
+            <a:r>
+              <a:rPr lang="en-US" sz="900" b="1" kern="0" spc="180" dirty="0">
                 <a:solidFill>
                   <a:srgbClr val="C8892F"/>
                 </a:solidFill>
@@ -3511,7 +3402,7 @@
                 <a:ea typeface="Calibri" pitchFamily="34" charset="-122"/>
                 <a:cs typeface="Calibri" pitchFamily="34" charset="-120"/>
               </a:rPr>
-              <a:t>THE TEST</a:t>
+              <a:t>WHAT I'D CHECK</a:t>
             </a:r>
             <a:endParaRPr lang="en-US" sz="900" dirty="0"/>
           </a:p>
@@ -3538,7 +3429,7 @@
           <a:bodyPr wrap="square" lIns="0" tIns="0" rIns="0" bIns="0" rtlCol="0" anchor="t"/>
           <a:lstStyle/>
           <a:p>
-            <a:pPr indent="0" marL="0">
+            <a:pPr marL="0" indent="0">
               <a:lnSpc>
                 <a:spcPts val="1600"/>
               </a:lnSpc>
@@ -3553,7 +3444,7 @@
                 <a:ea typeface="Calibri" pitchFamily="34" charset="-122"/>
                 <a:cs typeface="Calibri" pitchFamily="34" charset="-120"/>
               </a:rPr>
-              <a:t>On like-for-like jobs, how much of our movement is rate and materials rather than volume?</a:t>
+              <a:t>For the same type of job, how much of our increase is price rather than more jobs?</a:t>
             </a:r>
             <a:endParaRPr lang="en-US" sz="1150" dirty="0"/>
           </a:p>
@@ -3580,7 +3471,7 @@
           <a:bodyPr wrap="square" lIns="0" tIns="0" rIns="0" bIns="0" rtlCol="0" anchor="ctr"/>
           <a:lstStyle/>
           <a:p>
-            <a:pPr indent="0" marL="0">
+            <a:pPr marL="0" indent="0">
               <a:buNone/>
             </a:pPr>
             <a:r>
@@ -3592,7 +3483,7 @@
                 <a:ea typeface="Calibri" pitchFamily="34" charset="-122"/>
                 <a:cs typeface="Calibri" pitchFamily="34" charset="-120"/>
               </a:rPr>
-              <a:t>Sources: Codi/Pobl published announcements and tender notices; Welsh Government WHQS hazard-response statement; UK sector cost surveys.</a:t>
+              <a:t>Sources: Pobl announcements and tender notices; Welsh Government WHQS statement; UK-wide sector cost surveys.</a:t>
             </a:r>
             <a:endParaRPr lang="en-US" sz="950" dirty="0"/>
           </a:p>
@@ -3619,7 +3510,7 @@
           <a:bodyPr wrap="square" lIns="0" tIns="0" rIns="0" bIns="0" rtlCol="0" anchor="ctr"/>
           <a:lstStyle/>
           <a:p>
-            <a:pPr algn="l" indent="0" marL="0">
+            <a:pPr marL="0" indent="0" algn="l">
               <a:buNone/>
             </a:pPr>
             <a:r>
@@ -3658,7 +3549,7 @@
           <a:bodyPr wrap="square" lIns="0" tIns="0" rIns="0" bIns="0" rtlCol="0" anchor="ctr"/>
           <a:lstStyle/>
           <a:p>
-            <a:pPr algn="r" indent="0" marL="0">
+            <a:pPr marL="0" indent="0" algn="r">
               <a:buNone/>
             </a:pPr>
             <a:r>
@@ -3692,6 +3583,7 @@
         <a:solidFill>
           <a:srgbClr val="FFFFFF"/>
         </a:solidFill>
+        <a:effectLst/>
       </p:bgPr>
     </p:bg>
     <p:spTree>
@@ -3729,11 +3621,11 @@
           <a:bodyPr wrap="square" lIns="0" tIns="0" rIns="0" bIns="0" rtlCol="0" anchor="ctr"/>
           <a:lstStyle/>
           <a:p>
-            <a:pPr indent="0" marL="0">
-              <a:buNone/>
-            </a:pPr>
-            <a:r>
-              <a:rPr lang="en-US" sz="1000" b="1" spc="220" kern="0" dirty="0">
+            <a:pPr marL="0" indent="0">
+              <a:buNone/>
+            </a:pPr>
+            <a:r>
+              <a:rPr lang="en-US" sz="1000" b="1" kern="0" spc="220" dirty="0">
                 <a:solidFill>
                   <a:srgbClr val="C8892F"/>
                 </a:solidFill>
@@ -3768,7 +3660,7 @@
           <a:bodyPr wrap="square" lIns="0" tIns="0" rIns="0" bIns="0" rtlCol="0" anchor="ctr"/>
           <a:lstStyle/>
           <a:p>
-            <a:pPr indent="0" marL="0">
+            <a:pPr marL="0" indent="0">
               <a:buNone/>
             </a:pPr>
             <a:r>
@@ -3812,6 +3704,13 @@
             <a:prstDash val="solid"/>
           </a:ln>
         </p:spPr>
+        <p:txBody>
+          <a:bodyPr/>
+          <a:lstStyle/>
+          <a:p>
+            <a:endParaRPr lang="en-GB"/>
+          </a:p>
+        </p:txBody>
       </p:sp>
       <p:sp>
         <p:nvSpPr>
@@ -3834,7 +3733,7 @@
           <a:bodyPr wrap="square" lIns="0" tIns="0" rIns="0" bIns="0" rtlCol="0" anchor="ctr"/>
           <a:lstStyle/>
           <a:p>
-            <a:pPr algn="ctr" indent="0" marL="0">
+            <a:pPr marL="0" indent="0" algn="ctr">
               <a:buNone/>
             </a:pPr>
             <a:r>
@@ -3846,7 +3745,7 @@
                 <a:ea typeface="Calibri" pitchFamily="34" charset="-122"/>
                 <a:cs typeface="Calibri" pitchFamily="34" charset="-120"/>
               </a:rPr>
-              <a:t>Actuals  +  committed cost  +  ( remaining demand  ×  evidenced unit cost )  =  year-end position</a:t>
+              <a:t>Actuals  +  committed cost  +  ( remaining demand  ×  evidenced unit cost )  =  FYF</a:t>
             </a:r>
             <a:endParaRPr lang="en-US" sz="1600" dirty="0"/>
           </a:p>
@@ -3871,6 +3770,13 @@
           </a:solidFill>
           <a:ln/>
         </p:spPr>
+        <p:txBody>
+          <a:bodyPr/>
+          <a:lstStyle/>
+          <a:p>
+            <a:endParaRPr lang="en-GB"/>
+          </a:p>
+        </p:txBody>
       </p:sp>
       <p:sp>
         <p:nvSpPr>
@@ -3893,7 +3799,7 @@
           <a:bodyPr wrap="square" lIns="0" tIns="0" rIns="0" bIns="0" rtlCol="0" anchor="ctr"/>
           <a:lstStyle/>
           <a:p>
-            <a:pPr algn="ctr" indent="0" marL="0">
+            <a:pPr marL="0" indent="0" algn="ctr">
               <a:buNone/>
             </a:pPr>
             <a:r>
@@ -3932,7 +3838,7 @@
           <a:bodyPr wrap="square" lIns="0" tIns="0" rIns="0" bIns="0" rtlCol="0" anchor="ctr"/>
           <a:lstStyle/>
           <a:p>
-            <a:pPr indent="0" marL="0">
+            <a:pPr marL="0" indent="0">
               <a:buNone/>
             </a:pPr>
             <a:r>
@@ -4087,6 +3993,13 @@
           </a:solidFill>
           <a:ln/>
         </p:spPr>
+        <p:txBody>
+          <a:bodyPr/>
+          <a:lstStyle/>
+          <a:p>
+            <a:endParaRPr lang="en-GB"/>
+          </a:p>
+        </p:txBody>
       </p:sp>
       <p:sp>
         <p:nvSpPr>
@@ -4109,7 +4022,7 @@
           <a:bodyPr wrap="square" lIns="0" tIns="0" rIns="0" bIns="0" rtlCol="0" anchor="ctr"/>
           <a:lstStyle/>
           <a:p>
-            <a:pPr algn="ctr" indent="0" marL="0">
+            <a:pPr marL="0" indent="0" algn="ctr">
               <a:buNone/>
             </a:pPr>
             <a:r>
@@ -4148,7 +4061,7 @@
           <a:bodyPr wrap="square" lIns="0" tIns="0" rIns="0" bIns="0" rtlCol="0" anchor="ctr"/>
           <a:lstStyle/>
           <a:p>
-            <a:pPr indent="0" marL="0">
+            <a:pPr marL="0" indent="0">
               <a:buNone/>
             </a:pPr>
             <a:r>
@@ -4303,6 +4216,13 @@
           </a:solidFill>
           <a:ln/>
         </p:spPr>
+        <p:txBody>
+          <a:bodyPr/>
+          <a:lstStyle/>
+          <a:p>
+            <a:endParaRPr lang="en-GB"/>
+          </a:p>
+        </p:txBody>
       </p:sp>
       <p:sp>
         <p:nvSpPr>
@@ -4325,7 +4245,7 @@
           <a:bodyPr wrap="square" lIns="0" tIns="0" rIns="0" bIns="0" rtlCol="0" anchor="ctr"/>
           <a:lstStyle/>
           <a:p>
-            <a:pPr algn="ctr" indent="0" marL="0">
+            <a:pPr marL="0" indent="0" algn="ctr">
               <a:buNone/>
             </a:pPr>
             <a:r>
@@ -4364,7 +4284,7 @@
           <a:bodyPr wrap="square" lIns="0" tIns="0" rIns="0" bIns="0" rtlCol="0" anchor="ctr"/>
           <a:lstStyle/>
           <a:p>
-            <a:pPr indent="0" marL="0">
+            <a:pPr marL="0" indent="0">
               <a:buNone/>
             </a:pPr>
             <a:r>
@@ -4526,6 +4446,13 @@
             <a:prstDash val="solid"/>
           </a:ln>
         </p:spPr>
+        <p:txBody>
+          <a:bodyPr/>
+          <a:lstStyle/>
+          <a:p>
+            <a:endParaRPr lang="en-GB"/>
+          </a:p>
+        </p:txBody>
       </p:sp>
       <p:sp>
         <p:nvSpPr>
@@ -4548,7 +4475,7 @@
           <a:bodyPr wrap="square" lIns="0" tIns="0" rIns="0" bIns="0" rtlCol="0" anchor="ctr"/>
           <a:lstStyle/>
           <a:p>
-            <a:pPr indent="0" marL="0">
+            <a:pPr marL="0" indent="0">
               <a:lnSpc>
                 <a:spcPts val="1900"/>
               </a:lnSpc>
@@ -4565,12 +4492,6 @@
               </a:rPr>
               <a:t>Show the delivery forecast before mitigation. </a:t>
             </a:r>
-            <a:pPr indent="0" marL="0">
-              <a:lnSpc>
-                <a:spcPts val="1900"/>
-              </a:lnSpc>
-              <a:buNone/>
-            </a:pPr>
             <a:r>
               <a:rPr lang="en-US" sz="1350" dirty="0">
                 <a:solidFill>
@@ -4607,7 +4528,7 @@
           <a:bodyPr wrap="square" lIns="0" tIns="0" rIns="0" bIns="0" rtlCol="0" anchor="ctr"/>
           <a:lstStyle/>
           <a:p>
-            <a:pPr algn="l" indent="0" marL="0">
+            <a:pPr marL="0" indent="0" algn="l">
               <a:buNone/>
             </a:pPr>
             <a:r>
@@ -4646,7 +4567,7 @@
           <a:bodyPr wrap="square" lIns="0" tIns="0" rIns="0" bIns="0" rtlCol="0" anchor="ctr"/>
           <a:lstStyle/>
           <a:p>
-            <a:pPr algn="r" indent="0" marL="0">
+            <a:pPr marL="0" indent="0" algn="r">
               <a:buNone/>
             </a:pPr>
             <a:r>
@@ -4680,6 +4601,7 @@
         <a:solidFill>
           <a:srgbClr val="FFFFFF"/>
         </a:solidFill>
+        <a:effectLst/>
       </p:bgPr>
     </p:bg>
     <p:spTree>
@@ -4717,11 +4639,11 @@
           <a:bodyPr wrap="square" lIns="0" tIns="0" rIns="0" bIns="0" rtlCol="0" anchor="ctr"/>
           <a:lstStyle/>
           <a:p>
-            <a:pPr indent="0" marL="0">
-              <a:buNone/>
-            </a:pPr>
-            <a:r>
-              <a:rPr lang="en-US" sz="1000" b="1" spc="220" kern="0" dirty="0">
+            <a:pPr marL="0" indent="0">
+              <a:buNone/>
+            </a:pPr>
+            <a:r>
+              <a:rPr lang="en-US" sz="1000" b="1" kern="0" spc="220" dirty="0">
                 <a:solidFill>
                   <a:srgbClr val="C8892F"/>
                 </a:solidFill>
@@ -4756,7 +4678,7 @@
           <a:bodyPr wrap="square" lIns="0" tIns="0" rIns="0" bIns="0" rtlCol="0" anchor="ctr"/>
           <a:lstStyle/>
           <a:p>
-            <a:pPr indent="0" marL="0">
+            <a:pPr marL="0" indent="0">
               <a:buNone/>
             </a:pPr>
             <a:r>
@@ -4793,6 +4715,13 @@
           </a:solidFill>
           <a:ln/>
         </p:spPr>
+        <p:txBody>
+          <a:bodyPr/>
+          <a:lstStyle/>
+          <a:p>
+            <a:endParaRPr lang="en-GB"/>
+          </a:p>
+        </p:txBody>
       </p:sp>
       <p:sp>
         <p:nvSpPr>
@@ -4815,7 +4744,7 @@
           <a:bodyPr wrap="square" lIns="0" tIns="0" rIns="0" bIns="0" rtlCol="0" anchor="ctr"/>
           <a:lstStyle/>
           <a:p>
-            <a:pPr algn="ctr" indent="0" marL="0">
+            <a:pPr marL="0" indent="0" algn="ctr">
               <a:buNone/>
             </a:pPr>
             <a:r>
@@ -4854,7 +4783,7 @@
           <a:bodyPr wrap="square" lIns="0" tIns="0" rIns="0" bIns="0" rtlCol="0" anchor="ctr"/>
           <a:lstStyle/>
           <a:p>
-            <a:pPr indent="0" marL="0">
+            <a:pPr marL="0" indent="0">
               <a:buNone/>
             </a:pPr>
             <a:r>
@@ -4893,7 +4822,7 @@
           <a:bodyPr wrap="square" lIns="0" tIns="0" rIns="0" bIns="0" rtlCol="0" anchor="ctr"/>
           <a:lstStyle/>
           <a:p>
-            <a:pPr indent="0" marL="0">
+            <a:pPr marL="0" indent="0">
               <a:buNone/>
             </a:pPr>
             <a:r>
@@ -4932,7 +4861,7 @@
           <a:bodyPr wrap="square" lIns="0" tIns="0" rIns="0" bIns="0" rtlCol="0" anchor="ctr"/>
           <a:lstStyle/>
           <a:p>
-            <a:pPr indent="0" marL="0">
+            <a:pPr marL="0" indent="0">
               <a:buNone/>
             </a:pPr>
             <a:r>
@@ -4969,6 +4898,13 @@
           </a:solidFill>
           <a:ln/>
         </p:spPr>
+        <p:txBody>
+          <a:bodyPr/>
+          <a:lstStyle/>
+          <a:p>
+            <a:endParaRPr lang="en-GB"/>
+          </a:p>
+        </p:txBody>
       </p:sp>
       <p:sp>
         <p:nvSpPr>
@@ -4991,7 +4927,7 @@
           <a:bodyPr wrap="square" lIns="0" tIns="0" rIns="0" bIns="0" rtlCol="0" anchor="ctr"/>
           <a:lstStyle/>
           <a:p>
-            <a:pPr algn="ctr" indent="0" marL="0">
+            <a:pPr marL="0" indent="0" algn="ctr">
               <a:buNone/>
             </a:pPr>
             <a:r>
@@ -5030,7 +4966,7 @@
           <a:bodyPr wrap="square" lIns="0" tIns="0" rIns="0" bIns="0" rtlCol="0" anchor="ctr"/>
           <a:lstStyle/>
           <a:p>
-            <a:pPr indent="0" marL="0">
+            <a:pPr marL="0" indent="0">
               <a:buNone/>
             </a:pPr>
             <a:r>
@@ -5069,7 +5005,7 @@
           <a:bodyPr wrap="square" lIns="0" tIns="0" rIns="0" bIns="0" rtlCol="0" anchor="ctr"/>
           <a:lstStyle/>
           <a:p>
-            <a:pPr indent="0" marL="0">
+            <a:pPr marL="0" indent="0">
               <a:buNone/>
             </a:pPr>
             <a:r>
@@ -5108,7 +5044,7 @@
           <a:bodyPr wrap="square" lIns="0" tIns="0" rIns="0" bIns="0" rtlCol="0" anchor="ctr"/>
           <a:lstStyle/>
           <a:p>
-            <a:pPr indent="0" marL="0">
+            <a:pPr marL="0" indent="0">
               <a:buNone/>
             </a:pPr>
             <a:r>
@@ -5145,6 +5081,13 @@
           </a:solidFill>
           <a:ln/>
         </p:spPr>
+        <p:txBody>
+          <a:bodyPr/>
+          <a:lstStyle/>
+          <a:p>
+            <a:endParaRPr lang="en-GB"/>
+          </a:p>
+        </p:txBody>
       </p:sp>
       <p:sp>
         <p:nvSpPr>
@@ -5167,7 +5110,7 @@
           <a:bodyPr wrap="square" lIns="0" tIns="0" rIns="0" bIns="0" rtlCol="0" anchor="ctr"/>
           <a:lstStyle/>
           <a:p>
-            <a:pPr algn="ctr" indent="0" marL="0">
+            <a:pPr marL="0" indent="0" algn="ctr">
               <a:buNone/>
             </a:pPr>
             <a:r>
@@ -5206,7 +5149,7 @@
           <a:bodyPr wrap="square" lIns="0" tIns="0" rIns="0" bIns="0" rtlCol="0" anchor="ctr"/>
           <a:lstStyle/>
           <a:p>
-            <a:pPr indent="0" marL="0">
+            <a:pPr marL="0" indent="0">
               <a:buNone/>
             </a:pPr>
             <a:r>
@@ -5245,7 +5188,7 @@
           <a:bodyPr wrap="square" lIns="0" tIns="0" rIns="0" bIns="0" rtlCol="0" anchor="ctr"/>
           <a:lstStyle/>
           <a:p>
-            <a:pPr indent="0" marL="0">
+            <a:pPr marL="0" indent="0">
               <a:buNone/>
             </a:pPr>
             <a:r>
@@ -5284,7 +5227,7 @@
           <a:bodyPr wrap="square" lIns="0" tIns="0" rIns="0" bIns="0" rtlCol="0" anchor="ctr"/>
           <a:lstStyle/>
           <a:p>
-            <a:pPr indent="0" marL="0">
+            <a:pPr marL="0" indent="0">
               <a:buNone/>
             </a:pPr>
             <a:r>
@@ -5321,6 +5264,13 @@
           </a:solidFill>
           <a:ln/>
         </p:spPr>
+        <p:txBody>
+          <a:bodyPr/>
+          <a:lstStyle/>
+          <a:p>
+            <a:endParaRPr lang="en-GB"/>
+          </a:p>
+        </p:txBody>
       </p:sp>
       <p:sp>
         <p:nvSpPr>
@@ -5343,7 +5293,7 @@
           <a:bodyPr wrap="square" lIns="0" tIns="0" rIns="0" bIns="0" rtlCol="0" anchor="ctr"/>
           <a:lstStyle/>
           <a:p>
-            <a:pPr algn="ctr" indent="0" marL="0">
+            <a:pPr marL="0" indent="0" algn="ctr">
               <a:buNone/>
             </a:pPr>
             <a:r>
@@ -5382,7 +5332,7 @@
           <a:bodyPr wrap="square" lIns="0" tIns="0" rIns="0" bIns="0" rtlCol="0" anchor="ctr"/>
           <a:lstStyle/>
           <a:p>
-            <a:pPr indent="0" marL="0">
+            <a:pPr marL="0" indent="0">
               <a:buNone/>
             </a:pPr>
             <a:r>
@@ -5421,7 +5371,7 @@
           <a:bodyPr wrap="square" lIns="0" tIns="0" rIns="0" bIns="0" rtlCol="0" anchor="ctr"/>
           <a:lstStyle/>
           <a:p>
-            <a:pPr indent="0" marL="0">
+            <a:pPr marL="0" indent="0">
               <a:buNone/>
             </a:pPr>
             <a:r>
@@ -5460,7 +5410,7 @@
           <a:bodyPr wrap="square" lIns="0" tIns="0" rIns="0" bIns="0" rtlCol="0" anchor="ctr"/>
           <a:lstStyle/>
           <a:p>
-            <a:pPr indent="0" marL="0">
+            <a:pPr marL="0" indent="0">
               <a:buNone/>
             </a:pPr>
             <a:r>
@@ -5504,6 +5454,13 @@
             <a:prstDash val="solid"/>
           </a:ln>
         </p:spPr>
+        <p:txBody>
+          <a:bodyPr/>
+          <a:lstStyle/>
+          <a:p>
+            <a:endParaRPr lang="en-GB"/>
+          </a:p>
+        </p:txBody>
       </p:sp>
       <p:sp>
         <p:nvSpPr>
@@ -5526,7 +5483,7 @@
           <a:bodyPr wrap="square" lIns="0" tIns="0" rIns="0" bIns="0" rtlCol="0" anchor="ctr"/>
           <a:lstStyle/>
           <a:p>
-            <a:pPr indent="0" marL="0">
+            <a:pPr marL="0" indent="0">
               <a:lnSpc>
                 <a:spcPts val="1800"/>
               </a:lnSpc>
@@ -5543,12 +5500,6 @@
               </a:rPr>
               <a:t>Watch the second-order effect.  </a:t>
             </a:r>
-            <a:pPr indent="0" marL="0">
-              <a:lnSpc>
-                <a:spcPts val="1800"/>
-              </a:lnSpc>
-              <a:buNone/>
-            </a:pPr>
             <a:r>
               <a:rPr lang="en-US" sz="1300" dirty="0">
                 <a:solidFill>
@@ -5585,7 +5536,7 @@
           <a:bodyPr wrap="square" lIns="0" tIns="0" rIns="0" bIns="0" rtlCol="0" anchor="ctr"/>
           <a:lstStyle/>
           <a:p>
-            <a:pPr algn="l" indent="0" marL="0">
+            <a:pPr marL="0" indent="0" algn="l">
               <a:buNone/>
             </a:pPr>
             <a:r>
@@ -5624,7 +5575,7 @@
           <a:bodyPr wrap="square" lIns="0" tIns="0" rIns="0" bIns="0" rtlCol="0" anchor="ctr"/>
           <a:lstStyle/>
           <a:p>
-            <a:pPr algn="r" indent="0" marL="0">
+            <a:pPr marL="0" indent="0" algn="r">
               <a:buNone/>
             </a:pPr>
             <a:r>
@@ -5658,6 +5609,7 @@
         <a:solidFill>
           <a:srgbClr val="FFFFFF"/>
         </a:solidFill>
+        <a:effectLst/>
       </p:bgPr>
     </p:bg>
     <p:spTree>
@@ -5695,11 +5647,11 @@
           <a:bodyPr wrap="square" lIns="0" tIns="0" rIns="0" bIns="0" rtlCol="0" anchor="ctr"/>
           <a:lstStyle/>
           <a:p>
-            <a:pPr indent="0" marL="0">
-              <a:buNone/>
-            </a:pPr>
-            <a:r>
-              <a:rPr lang="en-US" sz="1000" b="1" spc="220" kern="0" dirty="0">
+            <a:pPr marL="0" indent="0">
+              <a:buNone/>
+            </a:pPr>
+            <a:r>
+              <a:rPr lang="en-US" sz="1000" b="1" kern="0" spc="220" dirty="0">
                 <a:solidFill>
                   <a:srgbClr val="C8892F"/>
                 </a:solidFill>
@@ -5734,7 +5686,7 @@
           <a:bodyPr wrap="square" lIns="0" tIns="0" rIns="0" bIns="0" rtlCol="0" anchor="ctr"/>
           <a:lstStyle/>
           <a:p>
-            <a:pPr indent="0" marL="0">
+            <a:pPr marL="0" indent="0">
               <a:buNone/>
             </a:pPr>
             <a:r>
@@ -5778,6 +5730,13 @@
             <a:prstDash val="solid"/>
           </a:ln>
         </p:spPr>
+        <p:txBody>
+          <a:bodyPr/>
+          <a:lstStyle/>
+          <a:p>
+            <a:endParaRPr lang="en-GB"/>
+          </a:p>
+        </p:txBody>
       </p:sp>
       <p:sp>
         <p:nvSpPr>
@@ -5800,7 +5759,7 @@
           <a:bodyPr wrap="square" lIns="0" tIns="0" rIns="0" bIns="0" rtlCol="0" anchor="ctr"/>
           <a:lstStyle/>
           <a:p>
-            <a:pPr algn="ctr" indent="0" marL="0">
+            <a:pPr marL="0" indent="0" algn="ctr">
               <a:lnSpc>
                 <a:spcPts val="1700"/>
               </a:lnSpc>
@@ -5820,7 +5779,7 @@
             <a:endParaRPr lang="en-US" sz="1350" dirty="0"/>
           </a:p>
           <a:p>
-            <a:pPr algn="ctr" indent="0" marL="0">
+            <a:pPr marL="0" indent="0" algn="ctr">
               <a:lnSpc>
                 <a:spcPts val="1700"/>
               </a:lnSpc>
@@ -5862,7 +5821,7 @@
           <a:bodyPr wrap="square" lIns="0" tIns="0" rIns="0" bIns="0" rtlCol="0" anchor="ctr"/>
           <a:lstStyle/>
           <a:p>
-            <a:pPr algn="ctr" indent="0" marL="0">
+            <a:pPr marL="0" indent="0" algn="ctr">
               <a:buNone/>
             </a:pPr>
             <a:r>
@@ -5906,6 +5865,13 @@
             <a:prstDash val="solid"/>
           </a:ln>
         </p:spPr>
+        <p:txBody>
+          <a:bodyPr/>
+          <a:lstStyle/>
+          <a:p>
+            <a:endParaRPr lang="en-GB"/>
+          </a:p>
+        </p:txBody>
       </p:sp>
       <p:sp>
         <p:nvSpPr>
@@ -5928,7 +5894,7 @@
           <a:bodyPr wrap="square" lIns="0" tIns="0" rIns="0" bIns="0" rtlCol="0" anchor="ctr"/>
           <a:lstStyle/>
           <a:p>
-            <a:pPr algn="ctr" indent="0" marL="0">
+            <a:pPr marL="0" indent="0" algn="ctr">
               <a:lnSpc>
                 <a:spcPts val="1700"/>
               </a:lnSpc>
@@ -5948,7 +5914,7 @@
             <a:endParaRPr lang="en-US" sz="1350" dirty="0"/>
           </a:p>
           <a:p>
-            <a:pPr algn="ctr" indent="0" marL="0">
+            <a:pPr marL="0" indent="0" algn="ctr">
               <a:lnSpc>
                 <a:spcPts val="1700"/>
               </a:lnSpc>
@@ -5990,7 +5956,7 @@
           <a:bodyPr wrap="square" lIns="0" tIns="0" rIns="0" bIns="0" rtlCol="0" anchor="ctr"/>
           <a:lstStyle/>
           <a:p>
-            <a:pPr algn="ctr" indent="0" marL="0">
+            <a:pPr marL="0" indent="0" algn="ctr">
               <a:buNone/>
             </a:pPr>
             <a:r>
@@ -6034,6 +6000,13 @@
             <a:prstDash val="solid"/>
           </a:ln>
         </p:spPr>
+        <p:txBody>
+          <a:bodyPr/>
+          <a:lstStyle/>
+          <a:p>
+            <a:endParaRPr lang="en-GB"/>
+          </a:p>
+        </p:txBody>
       </p:sp>
       <p:sp>
         <p:nvSpPr>
@@ -6056,7 +6029,7 @@
           <a:bodyPr wrap="square" lIns="0" tIns="0" rIns="0" bIns="0" rtlCol="0" anchor="ctr"/>
           <a:lstStyle/>
           <a:p>
-            <a:pPr algn="ctr" indent="0" marL="0">
+            <a:pPr marL="0" indent="0" algn="ctr">
               <a:lnSpc>
                 <a:spcPts val="1700"/>
               </a:lnSpc>
@@ -6076,7 +6049,7 @@
             <a:endParaRPr lang="en-US" sz="1350" dirty="0"/>
           </a:p>
           <a:p>
-            <a:pPr algn="ctr" indent="0" marL="0">
+            <a:pPr marL="0" indent="0" algn="ctr">
               <a:lnSpc>
                 <a:spcPts val="1700"/>
               </a:lnSpc>
@@ -6118,7 +6091,7 @@
           <a:bodyPr wrap="square" lIns="0" tIns="0" rIns="0" bIns="0" rtlCol="0" anchor="ctr"/>
           <a:lstStyle/>
           <a:p>
-            <a:pPr algn="ctr" indent="0" marL="0">
+            <a:pPr marL="0" indent="0" algn="ctr">
               <a:buNone/>
             </a:pPr>
             <a:r>
@@ -6162,6 +6135,13 @@
             <a:prstDash val="solid"/>
           </a:ln>
         </p:spPr>
+        <p:txBody>
+          <a:bodyPr/>
+          <a:lstStyle/>
+          <a:p>
+            <a:endParaRPr lang="en-GB"/>
+          </a:p>
+        </p:txBody>
       </p:sp>
       <p:sp>
         <p:nvSpPr>
@@ -6184,7 +6164,7 @@
           <a:bodyPr wrap="square" lIns="0" tIns="0" rIns="0" bIns="0" rtlCol="0" anchor="ctr"/>
           <a:lstStyle/>
           <a:p>
-            <a:pPr algn="ctr" indent="0" marL="0">
+            <a:pPr marL="0" indent="0" algn="ctr">
               <a:lnSpc>
                 <a:spcPts val="1700"/>
               </a:lnSpc>
@@ -6204,7 +6184,7 @@
             <a:endParaRPr lang="en-US" sz="1350" dirty="0"/>
           </a:p>
           <a:p>
-            <a:pPr algn="ctr" indent="0" marL="0">
+            <a:pPr marL="0" indent="0" algn="ctr">
               <a:lnSpc>
                 <a:spcPts val="1700"/>
               </a:lnSpc>
@@ -6246,7 +6226,7 @@
           <a:bodyPr wrap="square" lIns="0" tIns="0" rIns="0" bIns="0" rtlCol="0" anchor="ctr"/>
           <a:lstStyle/>
           <a:p>
-            <a:pPr indent="0" marL="0">
+            <a:pPr marL="0" indent="0">
               <a:buNone/>
             </a:pPr>
             <a:r>
@@ -6290,6 +6270,13 @@
             <a:prstDash val="solid"/>
           </a:ln>
         </p:spPr>
+        <p:txBody>
+          <a:bodyPr/>
+          <a:lstStyle/>
+          <a:p>
+            <a:endParaRPr lang="en-GB"/>
+          </a:p>
+        </p:txBody>
       </p:sp>
       <p:sp>
         <p:nvSpPr>
@@ -6312,7 +6299,7 @@
           <a:bodyPr wrap="square" lIns="0" tIns="0" rIns="0" bIns="0" rtlCol="0" anchor="ctr"/>
           <a:lstStyle/>
           <a:p>
-            <a:pPr indent="0" marL="0">
+            <a:pPr marL="0" indent="0">
               <a:buNone/>
             </a:pPr>
             <a:r>
@@ -6351,7 +6338,7 @@
           <a:bodyPr wrap="square" lIns="0" tIns="0" rIns="0" bIns="0" rtlCol="0" anchor="ctr"/>
           <a:lstStyle/>
           <a:p>
-            <a:pPr indent="0" marL="0">
+            <a:pPr marL="0" indent="0">
               <a:buNone/>
             </a:pPr>
             <a:r>
@@ -6395,6 +6382,13 @@
             <a:prstDash val="solid"/>
           </a:ln>
         </p:spPr>
+        <p:txBody>
+          <a:bodyPr/>
+          <a:lstStyle/>
+          <a:p>
+            <a:endParaRPr lang="en-GB"/>
+          </a:p>
+        </p:txBody>
       </p:sp>
       <p:sp>
         <p:nvSpPr>
@@ -6417,7 +6411,7 @@
           <a:bodyPr wrap="square" lIns="0" tIns="0" rIns="0" bIns="0" rtlCol="0" anchor="ctr"/>
           <a:lstStyle/>
           <a:p>
-            <a:pPr indent="0" marL="0">
+            <a:pPr marL="0" indent="0">
               <a:buNone/>
             </a:pPr>
             <a:r>
@@ -6456,7 +6450,7 @@
           <a:bodyPr wrap="square" lIns="0" tIns="0" rIns="0" bIns="0" rtlCol="0" anchor="ctr"/>
           <a:lstStyle/>
           <a:p>
-            <a:pPr indent="0" marL="0">
+            <a:pPr marL="0" indent="0">
               <a:buNone/>
             </a:pPr>
             <a:r>
@@ -6495,7 +6489,7 @@
           <a:bodyPr wrap="square" lIns="0" tIns="0" rIns="0" bIns="0" rtlCol="0" anchor="ctr"/>
           <a:lstStyle/>
           <a:p>
-            <a:pPr indent="0" marL="0">
+            <a:pPr marL="0" indent="0">
               <a:buNone/>
             </a:pPr>
             <a:r>
@@ -6509,9 +6503,6 @@
               </a:rPr>
               <a:t>So the escalation says: </a:t>
             </a:r>
-            <a:pPr indent="0" marL="0">
-              <a:buNone/>
-            </a:pPr>
             <a:r>
               <a:rPr lang="en-US" sz="1350" b="1" dirty="0">
                 <a:solidFill>
@@ -6548,7 +6539,7 @@
           <a:bodyPr wrap="square" lIns="0" tIns="0" rIns="0" bIns="0" rtlCol="0" anchor="ctr"/>
           <a:lstStyle/>
           <a:p>
-            <a:pPr algn="l" indent="0" marL="0">
+            <a:pPr marL="0" indent="0" algn="l">
               <a:buNone/>
             </a:pPr>
             <a:r>
@@ -6587,7 +6578,7 @@
           <a:bodyPr wrap="square" lIns="0" tIns="0" rIns="0" bIns="0" rtlCol="0" anchor="ctr"/>
           <a:lstStyle/>
           <a:p>
-            <a:pPr algn="r" indent="0" marL="0">
+            <a:pPr marL="0" indent="0" algn="r">
               <a:buNone/>
             </a:pPr>
             <a:r>
@@ -6621,6 +6612,7 @@
         <a:solidFill>
           <a:srgbClr val="13453B"/>
         </a:solidFill>
+        <a:effectLst/>
       </p:bgPr>
     </p:bg>
     <p:spTree>
@@ -6658,11 +6650,11 @@
           <a:bodyPr wrap="square" lIns="0" tIns="0" rIns="0" bIns="0" rtlCol="0" anchor="ctr"/>
           <a:lstStyle/>
           <a:p>
-            <a:pPr indent="0" marL="0">
-              <a:buNone/>
-            </a:pPr>
-            <a:r>
-              <a:rPr lang="en-US" sz="1000" b="1" spc="220" kern="0" dirty="0">
+            <a:pPr marL="0" indent="0">
+              <a:buNone/>
+            </a:pPr>
+            <a:r>
+              <a:rPr lang="en-US" sz="1000" b="1" kern="0" spc="220" dirty="0">
                 <a:solidFill>
                   <a:srgbClr val="C8892F"/>
                 </a:solidFill>
@@ -6697,7 +6689,7 @@
           <a:bodyPr wrap="square" lIns="0" tIns="0" rIns="0" bIns="0" rtlCol="0" anchor="ctr"/>
           <a:lstStyle/>
           <a:p>
-            <a:pPr indent="0" marL="0">
+            <a:pPr marL="0" indent="0">
               <a:buNone/>
             </a:pPr>
             <a:r>
@@ -6736,7 +6728,7 @@
           <a:bodyPr wrap="square" lIns="0" tIns="0" rIns="0" bIns="0" rtlCol="0" anchor="ctr"/>
           <a:lstStyle/>
           <a:p>
-            <a:pPr indent="0" marL="0">
+            <a:pPr marL="0" indent="0">
               <a:buNone/>
             </a:pPr>
             <a:r>
@@ -6775,11 +6767,11 @@
           <a:bodyPr wrap="square" lIns="0" tIns="0" rIns="0" bIns="0" rtlCol="0" anchor="ctr"/>
           <a:lstStyle/>
           <a:p>
-            <a:pPr indent="0" marL="0">
-              <a:buNone/>
-            </a:pPr>
-            <a:r>
-              <a:rPr lang="en-US" sz="1100" b="1" spc="180" kern="0" dirty="0">
+            <a:pPr marL="0" indent="0">
+              <a:buNone/>
+            </a:pPr>
+            <a:r>
+              <a:rPr lang="en-US" sz="1100" b="1" kern="0" spc="180" dirty="0">
                 <a:solidFill>
                   <a:srgbClr val="C8892F"/>
                 </a:solidFill>
@@ -6932,11 +6924,11 @@
           <a:bodyPr wrap="square" lIns="0" tIns="0" rIns="0" bIns="0" rtlCol="0" anchor="ctr"/>
           <a:lstStyle/>
           <a:p>
-            <a:pPr indent="0" marL="0">
-              <a:buNone/>
-            </a:pPr>
-            <a:r>
-              <a:rPr lang="en-US" sz="1100" b="1" spc="180" kern="0" dirty="0">
+            <a:pPr marL="0" indent="0">
+              <a:buNone/>
+            </a:pPr>
+            <a:r>
+              <a:rPr lang="en-US" sz="1100" b="1" kern="0" spc="180" dirty="0">
                 <a:solidFill>
                   <a:srgbClr val="C8892F"/>
                 </a:solidFill>
@@ -7114,6 +7106,13 @@
             <a:prstDash val="solid"/>
           </a:ln>
         </p:spPr>
+        <p:txBody>
+          <a:bodyPr/>
+          <a:lstStyle/>
+          <a:p>
+            <a:endParaRPr lang="en-GB"/>
+          </a:p>
+        </p:txBody>
       </p:sp>
       <p:sp>
         <p:nvSpPr>
@@ -7136,7 +7135,7 @@
           <a:bodyPr wrap="square" lIns="0" tIns="0" rIns="0" bIns="0" rtlCol="0" anchor="ctr"/>
           <a:lstStyle/>
           <a:p>
-            <a:pPr indent="0" marL="0">
+            <a:pPr marL="0" indent="0">
               <a:buNone/>
             </a:pPr>
             <a:r>
@@ -7175,7 +7174,7 @@
           <a:bodyPr wrap="square" lIns="0" tIns="0" rIns="0" bIns="0" rtlCol="0" anchor="t"/>
           <a:lstStyle/>
           <a:p>
-            <a:pPr indent="0" marL="0">
+            <a:pPr marL="0" indent="0">
               <a:lnSpc>
                 <a:spcPts val="3000"/>
               </a:lnSpc>
@@ -7217,7 +7216,7 @@
           <a:bodyPr wrap="square" lIns="0" tIns="0" rIns="0" bIns="0" rtlCol="0" anchor="ctr"/>
           <a:lstStyle/>
           <a:p>
-            <a:pPr algn="l" indent="0" marL="0">
+            <a:pPr marL="0" indent="0" algn="l">
               <a:buNone/>
             </a:pPr>
             <a:r>
@@ -7256,7 +7255,7 @@
           <a:bodyPr wrap="square" lIns="0" tIns="0" rIns="0" bIns="0" rtlCol="0" anchor="ctr"/>
           <a:lstStyle/>
           <a:p>
-            <a:pPr algn="r" indent="0" marL="0">
+            <a:pPr marL="0" indent="0" algn="r">
               <a:buNone/>
             </a:pPr>
             <a:r>
@@ -7575,4 +7574,325 @@
     </a:ext>
   </a:extLst>
 </a:theme>
+</file>
+
+<file path=ppt/theme/theme2.xml><?xml version="1.0" encoding="utf-8"?>
+<a:theme xmlns:a="http://schemas.openxmlformats.org/drawingml/2006/main" name="Office Theme">
+  <a:themeElements>
+    <a:clrScheme name="Office">
+      <a:dk1>
+        <a:sysClr val="windowText" lastClr="000000"/>
+      </a:dk1>
+      <a:lt1>
+        <a:sysClr val="window" lastClr="FFFFFF"/>
+      </a:lt1>
+      <a:dk2>
+        <a:srgbClr val="0E2841"/>
+      </a:dk2>
+      <a:lt2>
+        <a:srgbClr val="E8E8E8"/>
+      </a:lt2>
+      <a:accent1>
+        <a:srgbClr val="156082"/>
+      </a:accent1>
+      <a:accent2>
+        <a:srgbClr val="E97132"/>
+      </a:accent2>
+      <a:accent3>
+        <a:srgbClr val="196B24"/>
+      </a:accent3>
+      <a:accent4>
+        <a:srgbClr val="0F9ED5"/>
+      </a:accent4>
+      <a:accent5>
+        <a:srgbClr val="A02B93"/>
+      </a:accent5>
+      <a:accent6>
+        <a:srgbClr val="4EA72E"/>
+      </a:accent6>
+      <a:hlink>
+        <a:srgbClr val="467886"/>
+      </a:hlink>
+      <a:folHlink>
+        <a:srgbClr val="96607D"/>
+      </a:folHlink>
+    </a:clrScheme>
+    <a:fontScheme name="Office">
+      <a:majorFont>
+        <a:latin typeface="Aptos Display" panose="02110004020202020204"/>
+        <a:ea typeface=""/>
+        <a:cs typeface=""/>
+        <a:font script="Jpan" typeface="游ゴシック Light"/>
+        <a:font script="Hang" typeface="맑은 고딕"/>
+        <a:font script="Hans" typeface="等线 Light"/>
+        <a:font script="Hant" typeface="新細明體"/>
+        <a:font script="Arab" typeface="Times New Roman"/>
+        <a:font script="Hebr" typeface="Times New Roman"/>
+        <a:font script="Thai" typeface="Angsana New"/>
+        <a:font script="Ethi" typeface="Nyala"/>
+        <a:font script="Beng" typeface="Vrinda"/>
+        <a:font script="Gujr" typeface="Shruti"/>
+        <a:font script="Khmr" typeface="MoolBoran"/>
+        <a:font script="Knda" typeface="Tunga"/>
+        <a:font script="Guru" typeface="Raavi"/>
+        <a:font script="Cans" typeface="Euphemia"/>
+        <a:font script="Cher" typeface="Plantagenet Cherokee"/>
+        <a:font script="Yiii" typeface="Microsoft Yi Baiti"/>
+        <a:font script="Tibt" typeface="Microsoft Himalaya"/>
+        <a:font script="Thaa" typeface="MV Boli"/>
+        <a:font script="Deva" typeface="Mangal"/>
+        <a:font script="Telu" typeface="Gautami"/>
+        <a:font script="Taml" typeface="Latha"/>
+        <a:font script="Syrc" typeface="Estrangelo Edessa"/>
+        <a:font script="Orya" typeface="Kalinga"/>
+        <a:font script="Mlym" typeface="Kartika"/>
+        <a:font script="Laoo" typeface="DokChampa"/>
+        <a:font script="Sinh" typeface="Iskoola Pota"/>
+        <a:font script="Mong" typeface="Mongolian Baiti"/>
+        <a:font script="Viet" typeface="Times New Roman"/>
+        <a:font script="Uigh" typeface="Microsoft Uighur"/>
+        <a:font script="Geor" typeface="Sylfaen"/>
+        <a:font script="Armn" typeface="Arial"/>
+        <a:font script="Bugi" typeface="Leelawadee UI"/>
+        <a:font script="Bopo" typeface="Microsoft JhengHei"/>
+        <a:font script="Java" typeface="Javanese Text"/>
+        <a:font script="Lisu" typeface="Segoe UI"/>
+        <a:font script="Mymr" typeface="Myanmar Text"/>
+        <a:font script="Nkoo" typeface="Ebrima"/>
+        <a:font script="Olck" typeface="Nirmala UI"/>
+        <a:font script="Osma" typeface="Ebrima"/>
+        <a:font script="Phag" typeface="Phagspa"/>
+        <a:font script="Syrn" typeface="Estrangelo Edessa"/>
+        <a:font script="Syrj" typeface="Estrangelo Edessa"/>
+        <a:font script="Syre" typeface="Estrangelo Edessa"/>
+        <a:font script="Sora" typeface="Nirmala UI"/>
+        <a:font script="Tale" typeface="Microsoft Tai Le"/>
+        <a:font script="Talu" typeface="Microsoft New Tai Lue"/>
+        <a:font script="Tfng" typeface="Ebrima"/>
+      </a:majorFont>
+      <a:minorFont>
+        <a:latin typeface="Aptos" panose="02110004020202020204"/>
+        <a:ea typeface=""/>
+        <a:cs typeface=""/>
+        <a:font script="Jpan" typeface="游ゴシック"/>
+        <a:font script="Hang" typeface="맑은 고딕"/>
+        <a:font script="Hans" typeface="等线"/>
+        <a:font script="Hant" typeface="新細明體"/>
+        <a:font script="Arab" typeface="Arial"/>
+        <a:font script="Hebr" typeface="Arial"/>
+        <a:font script="Thai" typeface="Cordia New"/>
+        <a:font script="Ethi" typeface="Nyala"/>
+        <a:font script="Beng" typeface="Vrinda"/>
+        <a:font script="Gujr" typeface="Shruti"/>
+        <a:font script="Khmr" typeface="DaunPenh"/>
+        <a:font script="Knda" typeface="Tunga"/>
+        <a:font script="Guru" typeface="Raavi"/>
+        <a:font script="Cans" typeface="Euphemia"/>
+        <a:font script="Cher" typeface="Plantagenet Cherokee"/>
+        <a:font script="Yiii" typeface="Microsoft Yi Baiti"/>
+        <a:font script="Tibt" typeface="Microsoft Himalaya"/>
+        <a:font script="Thaa" typeface="MV Boli"/>
+        <a:font script="Deva" typeface="Mangal"/>
+        <a:font script="Telu" typeface="Gautami"/>
+        <a:font script="Taml" typeface="Latha"/>
+        <a:font script="Syrc" typeface="Estrangelo Edessa"/>
+        <a:font script="Orya" typeface="Kalinga"/>
+        <a:font script="Mlym" typeface="Kartika"/>
+        <a:font script="Laoo" typeface="DokChampa"/>
+        <a:font script="Sinh" typeface="Iskoola Pota"/>
+        <a:font script="Mong" typeface="Mongolian Baiti"/>
+        <a:font script="Viet" typeface="Arial"/>
+        <a:font script="Uigh" typeface="Microsoft Uighur"/>
+        <a:font script="Geor" typeface="Sylfaen"/>
+        <a:font script="Armn" typeface="Arial"/>
+        <a:font script="Bugi" typeface="Leelawadee UI"/>
+        <a:font script="Bopo" typeface="Microsoft JhengHei"/>
+        <a:font script="Java" typeface="Javanese Text"/>
+        <a:font script="Lisu" typeface="Segoe UI"/>
+        <a:font script="Mymr" typeface="Myanmar Text"/>
+        <a:font script="Nkoo" typeface="Ebrima"/>
+        <a:font script="Olck" typeface="Nirmala UI"/>
+        <a:font script="Osma" typeface="Ebrima"/>
+        <a:font script="Phag" typeface="Phagspa"/>
+        <a:font script="Syrn" typeface="Estrangelo Edessa"/>
+        <a:font script="Syrj" typeface="Estrangelo Edessa"/>
+        <a:font script="Syre" typeface="Estrangelo Edessa"/>
+        <a:font script="Sora" typeface="Nirmala UI"/>
+        <a:font script="Tale" typeface="Microsoft Tai Le"/>
+        <a:font script="Talu" typeface="Microsoft New Tai Lue"/>
+        <a:font script="Tfng" typeface="Ebrima"/>
+      </a:minorFont>
+    </a:fontScheme>
+    <a:fmtScheme name="Office">
+      <a:fillStyleLst>
+        <a:solidFill>
+          <a:schemeClr val="phClr"/>
+        </a:solidFill>
+        <a:gradFill rotWithShape="1">
+          <a:gsLst>
+            <a:gs pos="0">
+              <a:schemeClr val="phClr">
+                <a:lumMod val="110000"/>
+                <a:satMod val="105000"/>
+                <a:tint val="67000"/>
+              </a:schemeClr>
+            </a:gs>
+            <a:gs pos="50000">
+              <a:schemeClr val="phClr">
+                <a:lumMod val="105000"/>
+                <a:satMod val="103000"/>
+                <a:tint val="73000"/>
+              </a:schemeClr>
+            </a:gs>
+            <a:gs pos="100000">
+              <a:schemeClr val="phClr">
+                <a:lumMod val="105000"/>
+                <a:satMod val="109000"/>
+                <a:tint val="81000"/>
+              </a:schemeClr>
+            </a:gs>
+          </a:gsLst>
+          <a:lin ang="5400000" scaled="0"/>
+        </a:gradFill>
+        <a:gradFill rotWithShape="1">
+          <a:gsLst>
+            <a:gs pos="0">
+              <a:schemeClr val="phClr">
+                <a:satMod val="103000"/>
+                <a:lumMod val="102000"/>
+                <a:tint val="94000"/>
+              </a:schemeClr>
+            </a:gs>
+            <a:gs pos="50000">
+              <a:schemeClr val="phClr">
+                <a:satMod val="110000"/>
+                <a:lumMod val="100000"/>
+                <a:shade val="100000"/>
+              </a:schemeClr>
+            </a:gs>
+            <a:gs pos="100000">
+              <a:schemeClr val="phClr">
+                <a:lumMod val="99000"/>
+                <a:satMod val="120000"/>
+                <a:shade val="78000"/>
+              </a:schemeClr>
+            </a:gs>
+          </a:gsLst>
+          <a:lin ang="5400000" scaled="0"/>
+        </a:gradFill>
+      </a:fillStyleLst>
+      <a:lnStyleLst>
+        <a:ln w="12700" cap="flat" cmpd="sng" algn="ctr">
+          <a:solidFill>
+            <a:schemeClr val="phClr"/>
+          </a:solidFill>
+          <a:prstDash val="solid"/>
+          <a:miter lim="800000"/>
+        </a:ln>
+        <a:ln w="19050" cap="flat" cmpd="sng" algn="ctr">
+          <a:solidFill>
+            <a:schemeClr val="phClr"/>
+          </a:solidFill>
+          <a:prstDash val="solid"/>
+          <a:miter lim="800000"/>
+        </a:ln>
+        <a:ln w="25400" cap="flat" cmpd="sng" algn="ctr">
+          <a:solidFill>
+            <a:schemeClr val="phClr"/>
+          </a:solidFill>
+          <a:prstDash val="solid"/>
+          <a:miter lim="800000"/>
+        </a:ln>
+      </a:lnStyleLst>
+      <a:effectStyleLst>
+        <a:effectStyle>
+          <a:effectLst/>
+        </a:effectStyle>
+        <a:effectStyle>
+          <a:effectLst/>
+        </a:effectStyle>
+        <a:effectStyle>
+          <a:effectLst>
+            <a:outerShdw blurRad="57150" dist="19050" dir="5400000" algn="ctr" rotWithShape="0">
+              <a:srgbClr val="000000">
+                <a:alpha val="63000"/>
+              </a:srgbClr>
+            </a:outerShdw>
+          </a:effectLst>
+        </a:effectStyle>
+      </a:effectStyleLst>
+      <a:bgFillStyleLst>
+        <a:solidFill>
+          <a:schemeClr val="phClr"/>
+        </a:solidFill>
+        <a:solidFill>
+          <a:schemeClr val="phClr">
+            <a:tint val="95000"/>
+            <a:satMod val="170000"/>
+          </a:schemeClr>
+        </a:solidFill>
+        <a:gradFill rotWithShape="1">
+          <a:gsLst>
+            <a:gs pos="0">
+              <a:schemeClr val="phClr">
+                <a:tint val="93000"/>
+                <a:satMod val="150000"/>
+                <a:shade val="98000"/>
+                <a:lumMod val="102000"/>
+              </a:schemeClr>
+            </a:gs>
+            <a:gs pos="50000">
+              <a:schemeClr val="phClr">
+                <a:tint val="98000"/>
+                <a:satMod val="130000"/>
+                <a:shade val="90000"/>
+                <a:lumMod val="103000"/>
+              </a:schemeClr>
+            </a:gs>
+            <a:gs pos="100000">
+              <a:schemeClr val="phClr">
+                <a:shade val="63000"/>
+                <a:satMod val="120000"/>
+              </a:schemeClr>
+            </a:gs>
+          </a:gsLst>
+          <a:lin ang="5400000" scaled="0"/>
+        </a:gradFill>
+      </a:bgFillStyleLst>
+    </a:fmtScheme>
+  </a:themeElements>
+  <a:objectDefaults>
+    <a:lnDef>
+      <a:spPr/>
+      <a:bodyPr/>
+      <a:lstStyle/>
+      <a:style>
+        <a:lnRef idx="2">
+          <a:schemeClr val="accent1"/>
+        </a:lnRef>
+        <a:fillRef idx="0">
+          <a:schemeClr val="accent1"/>
+        </a:fillRef>
+        <a:effectRef idx="1">
+          <a:schemeClr val="accent1"/>
+        </a:effectRef>
+        <a:fontRef idx="minor">
+          <a:schemeClr val="tx1"/>
+        </a:fontRef>
+      </a:style>
+    </a:lnDef>
+  </a:objectDefaults>
+  <a:extraClrSchemeLst/>
+  <a:extLst>
+    <a:ext uri="{05A4C25C-085E-4340-85A3-A5531E510DB2}">
+      <thm15:themeFamily xmlns:thm15="http://schemas.microsoft.com/office/thememl/2012/main" name="Office Theme" id="{2E142A2C-CD16-42D6-873A-C26D2A0506FA}" vid="{1BDDFF52-6CD6-40A5-AB3C-68EB2F1E4D0A}"/>
+    </a:ext>
+  </a:extLst>
+</a:theme>
+</file>
+
+<file path=docMetadata/LabelInfo.xml><?xml version="1.0" encoding="utf-8"?>
+<clbl:labelList xmlns:clbl="http://schemas.microsoft.com/office/2020/mipLabelMetadata">
+  <clbl:label id="{2e8712ce-4b1c-42f0-8103-696d10633cf9}" enabled="1" method="Privileged" siteId="{ddd66cce-ffe1-4029-967c-5e15ef73127f}" contentBits="3" removed="0"/>
+</clbl:labelList>
 </file>
--- a/briefings/Codi_Presentation_Sandra_Vermaak.pptx
+++ b/briefings/Codi_Presentation_Sandra_Vermaak.pptx
@@ -4,9 +4,6 @@
   <p:sldMasterIdLst>
     <p:sldMasterId id="2147483648" r:id="rId1"/>
   </p:sldMasterIdLst>
-  <p:notesMasterIdLst>
-    <p:notesMasterId r:id="rId9"/>
-  </p:notesMasterIdLst>
   <p:sldIdLst>
     <p:sldId id="256" r:id="rId2"/>
     <p:sldId id="257" r:id="rId3"/>
@@ -16,6 +13,9 @@
     <p:sldId id="261" r:id="rId7"/>
     <p:sldId id="262" r:id="rId8"/>
   </p:sldIdLst>
+  <p:notesMasterIdLst>
+    <p:notesMasterId r:id="rId9"/>
+  </p:notesMasterIdLst>
   <p:sldSz cx="12192000" cy="6858000"/>
   <p:notesSz cx="6858000" cy="12192000"/>
   <p:defaultTextStyle>
@@ -110,11 +110,6 @@
       </a:defRPr>
     </a:lvl9pPr>
   </p:defaultTextStyle>
-  <p:extLst>
-    <p:ext uri="{EFAFB233-063F-42B5-8137-9DF3F51BA10A}">
-      <p15:sldGuideLst xmlns:p15="http://schemas.microsoft.com/office/powerpoint/2012/main"/>
-    </p:ext>
-  </p:extLst>
 </p:presentation>
 </file>
 
@@ -140,10 +135,234 @@
           <a:chExt cx="0" cy="0"/>
         </a:xfrm>
       </p:grpSpPr>
+      <p:sp>
+        <p:nvSpPr>
+          <p:cNvPr id="2" name="Header Placeholder 1"/>
+          <p:cNvSpPr>
+            <a:spLocks noGrp="1"/>
+          </p:cNvSpPr>
+          <p:nvPr>
+            <p:ph type="hdr" sz="quarter"/>
+          </p:nvPr>
+        </p:nvSpPr>
+        <p:spPr>
+          <a:xfrm>
+            <a:off x="0" y="0"/>
+            <a:ext cx="2971800" cy="458788"/>
+          </a:xfrm>
+          <a:prstGeom prst="rect">
+            <a:avLst/>
+          </a:prstGeom>
+        </p:spPr>
+        <p:txBody>
+          <a:bodyPr vert="horz" lIns="91440" tIns="45720" rIns="91440" bIns="45720" rtlCol="0"/>
+          <a:lstStyle>
+            <a:lvl1pPr algn="l">
+              <a:defRPr sz="1200"/>
+            </a:lvl1pPr>
+          </a:lstStyle>
+          <a:p>
+            <a:endParaRPr lang="en-US"/>
+          </a:p>
+        </p:txBody>
+      </p:sp>
+      <p:sp>
+        <p:nvSpPr>
+          <p:cNvPr id="3" name="Date Placeholder 2"/>
+          <p:cNvSpPr>
+            <a:spLocks noGrp="1"/>
+          </p:cNvSpPr>
+          <p:nvPr>
+            <p:ph type="dt" idx="1"/>
+          </p:nvPr>
+        </p:nvSpPr>
+        <p:spPr>
+          <a:xfrm>
+            <a:off x="3884613" y="0"/>
+            <a:ext cx="2971800" cy="458788"/>
+          </a:xfrm>
+          <a:prstGeom prst="rect">
+            <a:avLst/>
+          </a:prstGeom>
+        </p:spPr>
+        <p:txBody>
+          <a:bodyPr vert="horz" lIns="91440" tIns="45720" rIns="91440" bIns="45720" rtlCol="0"/>
+          <a:lstStyle>
+            <a:lvl1pPr algn="r">
+              <a:defRPr sz="1200"/>
+            </a:lvl1pPr>
+          </a:lstStyle>
+          <a:p>
+            <a:fld id="{5282F153-3F37-0F45-9E97-73ACFA13230C}" type="datetimeFigureOut">
+              <a:rPr lang="en-US"/>
+              <a:t>7/23/19</a:t>
+            </a:fld>
+            <a:endParaRPr lang="en-US"/>
+          </a:p>
+        </p:txBody>
+      </p:sp>
+      <p:sp>
+        <p:nvSpPr>
+          <p:cNvPr id="4" name="Slide Image Placeholder 3"/>
+          <p:cNvSpPr>
+            <a:spLocks noGrp="1" noRot="1" noChangeAspect="1"/>
+          </p:cNvSpPr>
+          <p:nvPr>
+            <p:ph type="sldImg" idx="2"/>
+          </p:nvPr>
+        </p:nvSpPr>
+        <p:spPr>
+          <a:xfrm>
+            <a:off x="685800" y="1143000"/>
+            <a:ext cx="5486400" cy="3086100"/>
+          </a:xfrm>
+          <a:prstGeom prst="rect">
+            <a:avLst/>
+          </a:prstGeom>
+          <a:noFill/>
+          <a:ln w="12700">
+            <a:solidFill>
+              <a:prstClr val="black"/>
+            </a:solidFill>
+          </a:ln>
+        </p:spPr>
+        <p:txBody>
+          <a:bodyPr vert="horz" lIns="91440" tIns="45720" rIns="91440" bIns="45720" rtlCol="0" anchor="ctr"/>
+          <a:lstStyle/>
+          <a:p>
+            <a:endParaRPr lang="en-US"/>
+          </a:p>
+        </p:txBody>
+      </p:sp>
+      <p:sp>
+        <p:nvSpPr>
+          <p:cNvPr id="5" name="Notes Placeholder 4"/>
+          <p:cNvSpPr>
+            <a:spLocks noGrp="1"/>
+          </p:cNvSpPr>
+          <p:nvPr>
+            <p:ph type="body" sz="quarter" idx="3"/>
+          </p:nvPr>
+        </p:nvSpPr>
+        <p:spPr>
+          <a:xfrm>
+            <a:off x="685800" y="4400550"/>
+            <a:ext cx="5486400" cy="3600450"/>
+          </a:xfrm>
+          <a:prstGeom prst="rect">
+            <a:avLst/>
+          </a:prstGeom>
+        </p:spPr>
+        <p:txBody>
+          <a:bodyPr vert="horz" lIns="91440" tIns="45720" rIns="91440" bIns="45720" rtlCol="0"/>
+          <a:lstStyle/>
+          <a:p>
+            <a:pPr lvl="0"/>
+            <a:r>
+              <a:rPr lang="en-US"/>
+              <a:t>Click to edit Master text styles</a:t>
+            </a:r>
+          </a:p>
+          <a:p>
+            <a:pPr lvl="1"/>
+            <a:r>
+              <a:rPr lang="en-US"/>
+              <a:t>Second level</a:t>
+            </a:r>
+          </a:p>
+          <a:p>
+            <a:pPr lvl="2"/>
+            <a:r>
+              <a:rPr lang="en-US"/>
+              <a:t>Third level</a:t>
+            </a:r>
+          </a:p>
+          <a:p>
+            <a:pPr lvl="3"/>
+            <a:r>
+              <a:rPr lang="en-US"/>
+              <a:t>Fourth level</a:t>
+            </a:r>
+          </a:p>
+          <a:p>
+            <a:pPr lvl="4"/>
+            <a:r>
+              <a:rPr lang="en-US"/>
+              <a:t>Fifth level</a:t>
+            </a:r>
+          </a:p>
+        </p:txBody>
+      </p:sp>
+      <p:sp>
+        <p:nvSpPr>
+          <p:cNvPr id="6" name="Footer Placeholder 5"/>
+          <p:cNvSpPr>
+            <a:spLocks noGrp="1"/>
+          </p:cNvSpPr>
+          <p:nvPr>
+            <p:ph type="ftr" sz="quarter" idx="4"/>
+          </p:nvPr>
+        </p:nvSpPr>
+        <p:spPr>
+          <a:xfrm>
+            <a:off x="0" y="8685213"/>
+            <a:ext cx="2971800" cy="458787"/>
+          </a:xfrm>
+          <a:prstGeom prst="rect">
+            <a:avLst/>
+          </a:prstGeom>
+        </p:spPr>
+        <p:txBody>
+          <a:bodyPr vert="horz" lIns="91440" tIns="45720" rIns="91440" bIns="45720" rtlCol="0" anchor="b"/>
+          <a:lstStyle>
+            <a:lvl1pPr algn="l">
+              <a:defRPr sz="1200"/>
+            </a:lvl1pPr>
+          </a:lstStyle>
+          <a:p>
+            <a:endParaRPr lang="en-US"/>
+          </a:p>
+        </p:txBody>
+      </p:sp>
+      <p:sp>
+        <p:nvSpPr>
+          <p:cNvPr id="7" name="Slide Number Placeholder 6"/>
+          <p:cNvSpPr>
+            <a:spLocks noGrp="1"/>
+          </p:cNvSpPr>
+          <p:nvPr>
+            <p:ph type="sldNum" sz="quarter" idx="5"/>
+          </p:nvPr>
+        </p:nvSpPr>
+        <p:spPr>
+          <a:xfrm>
+            <a:off x="3884613" y="8685213"/>
+            <a:ext cx="2971800" cy="458787"/>
+          </a:xfrm>
+          <a:prstGeom prst="rect">
+            <a:avLst/>
+          </a:prstGeom>
+        </p:spPr>
+        <p:txBody>
+          <a:bodyPr vert="horz" lIns="91440" tIns="45720" rIns="91440" bIns="45720" rtlCol="0" anchor="b"/>
+          <a:lstStyle>
+            <a:lvl1pPr algn="r">
+              <a:defRPr sz="1200"/>
+            </a:lvl1pPr>
+          </a:lstStyle>
+          <a:p>
+            <a:fld id="{CE5E9CC1-C706-0F49-92D6-E571CC5EEA8F}" type="slidenum">
+              <a:rPr lang="en-US"/>
+              <a:t>‹#›</a:t>
+            </a:fld>
+            <a:endParaRPr lang="en-US"/>
+          </a:p>
+        </p:txBody>
+      </p:sp>
     </p:spTree>
     <p:extLst>
       <p:ext uri="{BB962C8B-B14F-4D97-AF65-F5344CB8AC3E}">
-        <p14:creationId xmlns:p14="http://schemas.microsoft.com/office/powerpoint/2010/main" val="2950222104"/>
+        <p14:creationId xmlns:p14="http://schemas.microsoft.com/office/powerpoint/2010/main" val="1024086991"/>
       </p:ext>
     </p:extLst>
   </p:cSld>
@@ -290,10 +509,10 @@
             <a:r>
               <a:rPr lang="en-US" dirty="0"/>
               <a:t>PACE 0:45  ·  Seven slides, ten minutes.
-Thank you. Ten minutes, five questions, one thread: a hundred-million-pound budget under pressure is a decision problem, not a reporting problem. My job is to get people arguing about the decision, not about whose number is right.
-I'll cover scoping the number, the three hypotheses I'd arrive with, rebuilding the forecast with budget holders, what I'd do about it, how I'd escalate, and what I'd measure.
-One caveat. This is my recommended approach, not a claim about how Codi works today. Figures are either published or clearly illustrative, and I'll say which.</a:t>
-            </a:r>
+Thank you for seeing me. I've got ten minutes, so I'll take your five questions in order: how I'd work out what's driving the overspend, how I'd rebuild the forecast with the budget holders, what I'd actually do about it, how I'd tell senior leaders, and what I'd track afterwards.
+One thing up front. I don't know your systems or your numbers yet, so this is how I'd approach it rather than a view on how things work here. Where I've used a figure it's illustrative, and I'll say so.</a:t>
+            </a:r>
+            <a:endParaRPr lang="en-US" dirty="0"/>
           </a:p>
         </p:txBody>
       </p:sp>
@@ -380,11 +599,12 @@
             <a:r>
               <a:rPr lang="en-US" dirty="0"/>
               <a:t>PACE 1:20  ·  Running total 2:05.
-Before explaining a variance I'd want to know what sits inside the number. A hundred million across roughly twenty-five thousand homes is about four thousand pounds per home, which is well above a pure responsive repairs budget. So it must span responsive and voids, cyclical and compliance, and planned or major works including WHQS and retrofit.
-That matters twice. First, these behave differently: responsive is demand-led and volatile, compliance is effectively fixed, planned work is programme-driven. Averaging them hides the story. Second, they sit on different sides of the revenue and capital boundary, and only the revenue side hits operating surplus.
-So my first question would be where that line is drawn and how consistently it is applied, particularly post-merger where two legacy capitalisation policies may still be in use. Reclassifying spend is not a saving, and I'd want to be sure no part of the position depends on it.
-[Source] Homes figure from public reporting on the merger. The £100m is the interview scenario. Category split is illustrative.</a:t>
-            </a:r>
+Before I can explain a variance I need to know what is actually in the budget. A hundred million across about twenty-five thousand homes is roughly four thousand pounds a home. That is more than responsive repairs alone would cost, so the budget must also be carrying cyclical work, compliance and planned or major works.
+That matters for two reasons. These things behave differently. Responsive is demand-led and hard to predict, compliance is effectively fixed, planned work is programme-driven. An average across all of them hides what is going on. And they sit on different sides of the revenue and capital line, and only the revenue side hits the surplus.
+So the first thing I would do is agree with the team exactly what sits in the number, and where that line is drawn. Reclassifying spend is not a saving, and I would want to be sure that none of the reported position depends on it.
+[Note] The £100m is the scenario you gave me; the per-home figure is my own arithmetic. The categories are illustrative.</a:t>
+            </a:r>
+            <a:endParaRPr lang="en-US" dirty="0"/>
           </a:p>
         </p:txBody>
       </p:sp>
@@ -469,44 +689,15 @@
           <a:lstStyle/>
           <a:p>
             <a:r>
-              <a:t>PACE 2:05  ·  Running total 4:10.</a:t>
-            </a:r>
-          </a:p>
-          <a:p/>
-          <a:p>
-            <a:r>
-              <a:t>I wouldn't turn up with no idea what was going on. I'd come with three things I want to check, and the data I'd need to prove or rule out each one.</a:t>
-            </a:r>
-          </a:p>
-          <a:p/>
-          <a:p>
-            <a:r>
-              <a:t>First, who does the work. Pobl grew its in-house trades team by about half in 2024, thirty-four roles, and there's also a contractor framework across eleven lots covering repairs, voids and out-of-hours. That's a sensible set-up, but it's exactly where you can end up paying twice. So I'd check whether contractor spend has come down in line with the work we brought in-house, comparing it month by month against the jobs our own teams complete.</a:t>
-            </a:r>
-          </a:p>
-          <a:p/>
-          <a:p>
-            <a:r>
-              <a:t>Second, the new repair rules. Since the first of April this year, WHQS sets response times. If a hazard is urgent, it's twenty-four hours to investigate and another twenty-four to put it right. Otherwise it's ten working days, then five. Tighter deadlines mean more out-of-hours and more emergency call-outs, and they make it harder to group jobs together sensibly, so the cost per job goes up even when the number of jobs doesn't. And because response times have to be published, this isn't somewhere to look for savings.</a:t>
-            </a:r>
-          </a:p>
-          <a:p/>
-          <a:p>
-            <a:r>
-              <a:t>Third, costs going up. Across the sector, repairs costs are expected to rise by about twenty-three per cent this year, against nearer ten in the regulator's published figures. That's UK-wide rather than Welsh, so I'd use it as a reason to separate price from volume, not as a number to lean on.</a:t>
-            </a:r>
-          </a:p>
-          <a:p/>
-          <a:p>
-            <a:r>
-              <a:t>If none of the three is right, I've still narrowed it down quickly. I'd rather be put right in week one than be confident and wrong in month six.</a:t>
-            </a:r>
-          </a:p>
-          <a:p/>
-          <a:p>
-            <a:r>
-              <a:t>[Source] Pobl in-house trades announcement (2024); Pobl responsive repairs and voids framework notice, 11 lots (Dec 2023); Welsh Government WHQS responding-to-hazards statement (Dec 2025), in force 1 April 2026; UK repairs cost survey commentary. Context, not claims about Codi's position.</a:t>
-            </a:r>
+              <a:rPr lang="en-US" dirty="0"/>
+              <a:t>PACE 2:05  ·  Running total 4:10.
+Before deciding anything I would want to know what is actually driving it, and I would work through it in a set order.
+First, is it real? A lot of apparent overspends turn out to be timing. Work done but not yet invoiced, accruals in the wrong period, jobs coded to the wrong budget, or a programme simply running ahead of its phasing. I would rule that out before raising an alarm, because getting that wrong once costs you credibility for the rest of the year.
+Once I am satisfied it is real, I would split it three ways. Volume: are we doing more jobs than we planned for? Price: is each job costing more than we assumed, and is that labour, materials, or more work going to contractors? Mix: is the work different — more emergencies, more complex jobs, or particular property types and areas driving it?
+That split matters because each one leads somewhere different. A volume problem is a demand and capacity conversation. A price problem is a procurement and rates conversation. A mix problem usually means the assumptions in the budget were wrong, and that affects next year as well as this one.
+And I would not do this from a spreadsheet on its own. I would go through real jobs with the supervisors and planners, so that whatever I end up telling the board matches what is actually happening on the ground.</a:t>
+            </a:r>
+            <a:endParaRPr lang="en-US" dirty="0"/>
           </a:p>
         </p:txBody>
       </p:sp>
@@ -593,11 +784,12 @@
             <a:r>
               <a:rPr lang="en-US" dirty="0"/>
               <a:t>PACE 1:35  ·  Running total 5:45.
-The forecast has to be built with budget holders, not sent to them. My role is structure and challenge; theirs is demand, capacity and programme. If they haven't shaped it they won't defend it, and a forecast nobody defends gets ignored.
-Mechanically it is actuals, plus committed cost, plus remaining demand times an evidenced unit cost. For responsive work that means remaining jobs by type against a cost per job reflecting the current mix, allowing for seasonality and backlog. For planned work, remaining quantities at contract rates against realistic dates. I'd reconcile open commitments carefully so nothing is counted twice, which is the most common error I see.
-I'd record the owner and confidence level of every material assumption, and run a base case and a downside, such as sustained contractor reliance or a harder winter. The point is to show the range and identify which two or three assumptions actually move the answer.
-One discipline I'd hold firmly. The delivery forecast stays visible before mitigation. Only owned, time-phased, achievable actions come off it; anything less certain is shown separately as an opportunity. A savings target is not a forecast, and the moment those blend the number stops being useful.</a:t>
-            </a:r>
+The forecast has to be built with the budget holders, not sent to them. I bring the structure and the challenge; they own the assumptions about demand, capacity and what they can realistically deliver. If they have not helped shape it they will not stand behind it, and a forecast nobody stands behind gets ignored.
+The mechanics are actuals, plus what we are already committed to, plus the remaining work at a realistic cost per job. For responsive that is expected job numbers by type against an evidenced unit cost, allowing for seasonality and backlog. For planned work it is what is left at contract rates, against dates the team actually believes. I would be careful with open commitments so nothing is counted twice — that is the easiest mistake to make.
+I would write down who owns each significant assumption and how confident they are, and run a downside as well as a base case, so we can see the range and which two or three things really move the answer.
+One thing I would hold firmly. Show the forecast before mitigation. Only actions that are owned, dated and realistic come off it, and everything else is listed separately as an opportunity. A savings target is not a forecast.</a:t>
+            </a:r>
+            <a:endParaRPr lang="en-US" dirty="0"/>
           </a:p>
         </p:txBody>
       </p:sp>
@@ -684,13 +876,14 @@
             <a:r>
               <a:rPr lang="en-US" dirty="0"/>
               <a:t>PACE 1:35  ·  Running total 7:20.
-I'd work the actions in a deliberate order, because the order is the argument.
-First, protect. Urgent, safety-critical and compliance work is ring-fenced, and I'd put WHQS hazard response in that category. Those response times are published and reported, so slowing them is not a saving; it is a regulatory and human risk that comes back as disrepair cost.
-Second, convert capacity we have already bought. If the in-house team has grown, the cheapest saving is making it productive: better diagnosis, right trade first time, materials on the van, appointments that hold. But I'd only call it a cash saving if it reduces paid hours or displaces contractor spend. Otherwise it is released capacity or avoided future cost, and I'd report it as exactly that.
-Third, challenge external spend with procurement: call-off discipline, validating variations, testing rates on genuinely comparable work.
-Fourth, and only then, rephasing discretionary planned work with asset and service leads.
-And I'd be explicit about the second-order effect. Deferring planned work tends to increase responsive demand later, and moves spend that would have been capitalised into revenue. That lands on operating surplus, not just between years. Every action needs an owner, a date, a cost and an evidenced benefit.</a:t>
-            </a:r>
+I would work through the options in a deliberate order.
+First, protect. Safety, compliance and statutory response times are ring-fenced. Slowing those down is not a saving. It comes back as disrepair cost, and it is the wrong thing to do to somebody living in the home.
+Second, get more out of the capacity we already have. Where there are in-house teams, the cheapest saving available is making them more productive: the right diagnosis, the right trade first time, materials on the van, appointments that stick. But I would only call that a cash saving if it actually reduces paid hours or takes work off a contractor. If it does not, it is spare capacity or cost avoided later, and I would report it that way.
+Third, external spend. Working with procurement on call-off discipline, checking variations are valid, and testing rates on genuinely comparable work.
+Fourth, and only then, rephasing discretionary planned work with the asset and service leads.
+And I would be clear about the knock-on effect, because this is where in-year savings destroy value. Deferring planned work usually increases responsive demand later, and it moves spend that would have been capitalised into revenue, which hits the surplus rather than just moving between years. Every action needs an owner, a date, a cost to deliver it and a benefit we can evidence.</a:t>
+            </a:r>
+            <a:endParaRPr lang="en-US" dirty="0"/>
           </a:p>
         </p:txBody>
       </p:sp>
@@ -777,12 +970,11 @@
             <a:r>
               <a:rPr lang="en-US" dirty="0"/>
               <a:t>PACE 1:25  ·  Running total 8:45.
-I'd tell senior leaders as soon as there is a credible indication of material exposure, separating what is known from what is still being validated. I wouldn't wait for a clean month-end pack, because the value of the information falls faster than its accuracy improves.
-The report is a bridge: approved budget, to delivery forecast, to owned mitigations, to the residual gap with a downside and the movement since last time. One page, with the decision required, my recommendation, the alternative, and the consequence of doing nothing.
-What I wouldn't do is present it as purely a cost variance, because here it isn't. The July regulatory judgement rated financial viability Yellow while retaining the governance grade, and identified the effect of development and planned maintenance on financial metrics. Separately, the group has a hundred and thirty million pound sustainability-linked facility where the margin is tied to environmental and social targets, so retrofit and planned works delivery carries a cost-of-debt consequence too.
-Put those together and a repairs overspend touches operating surplus, interest cover and potentially the cost of borrowing. That is the frame I'd use, and why I'd want treasury in the conversation early.
-[Source] Codi Group regulatory judgement, published July 2026; reporting on Codi's £130m sustainability-linked facility.</a:t>
-            </a:r>
+I would tell senior leaders as soon as there is a credible sign of a material problem, and be clear about what I know as against what I am still checking. I would not wait for a tidy month-end pack, because the information loses value faster than it gains accuracy.
+The report itself is a bridge. Approved budget, to the latest forecast, to the mitigations we have actually agreed, to the gap that is left, with a downside case and the movement since last time. One page. The decision I need, what I recommend, the alternative, and what happens if we do nothing.
+What I would avoid is presenting it as just a budget variance. Repairs is mostly revenue spend, so an overspend comes straight off the operating surplus, and that feeds interest cover and covenant headroom. And in practical terms, money spent unplanned on reactive work is money that is not available for planned works or for new homes. That is the trade-off leadership is really being asked to make, so that is how I would frame it — and it is why I would want treasury and corporate finance in the conversation early rather than at the end.</a:t>
+            </a:r>
+            <a:endParaRPr lang="en-US" dirty="0"/>
           </a:p>
         </p:txBody>
       </p:sp>
@@ -868,12 +1060,13 @@
           <a:p>
             <a:r>
               <a:rPr lang="en-US" dirty="0"/>
-              <a:t>PACE 1:05  ·  Running total 9:50.
-Finally, measurement. A short set agreed with the teams, each with a definition, a baseline, an owner and an escalation trigger. The test of a dashboard is whether it changes what someone does on Monday.
-Financially: the forecast gap and its movement, net benefit delivered against profile, the capitalised versus revenue split, and cost per job adjusted for mix. That adjustment matters, because an average cost can fall simply because the team completed easier jobs, and I wouldn't let that be reported as efficiency.
-On service: WHQS hazard response compliance, first-time fix, jobs per operative to show whether insourced capacity is landing, backlog age and overdue safety work, and satisfaction or repeat contact. Those are the early warning that a saving is coming out of the resident rather than out of the cost.
-A number the operation recognises, a forecast that stops moving, and a resident who does not have to ring twice. Thank you, and I'm happy to take questions.</a:t>
-            </a:r>
+              <a:t>PACE 1:15  ·  Running total 10:00.
+Last, measurement. I would agree a short set with the teams, each with a definition, a baseline, an owner and a point where we escalate. The test of a dashboard is whether it changes what somebody does on Monday morning.
+On the money: the gap and how it has moved, whether the savings we agreed have actually landed, the capital and revenue split, and cost per job adjusted for the mix of work. That adjustment matters, because an average cost can fall simply because the team did easier jobs that month, and I would not let that be reported as efficiency.
+On the service: outstanding safety and compliance work, first-time fix, jobs per operative, how old the backlog is, and repeat contact. Those tell you early if a saving is coming out of the resident rather than out of the cost.
+What I would want a year in is a number the operation recognises as theirs, a forecast that stops moving, and a resident who does not have to ring twice. Thank you — happy to take questions.</a:t>
+            </a:r>
+            <a:endParaRPr lang="en-US" dirty="0"/>
           </a:p>
         </p:txBody>
       </p:sp>
@@ -946,11 +1139,6 @@
 <file path=ppt/slideMasters/slideMaster1.xml><?xml version="1.0" encoding="utf-8"?>
 <p:sldMaster xmlns:a="http://schemas.openxmlformats.org/drawingml/2006/main" xmlns:r="http://schemas.openxmlformats.org/officeDocument/2006/relationships" xmlns:p="http://schemas.openxmlformats.org/presentationml/2006/main">
   <p:cSld>
-    <p:bg>
-      <p:bgRef idx="1001">
-        <a:schemeClr val="bg1"/>
-      </p:bgRef>
-    </p:bg>
     <p:spTree>
       <p:nvGrpSpPr>
         <p:cNvPr id="1" name=""/>
@@ -965,54 +1153,6 @@
           <a:chExt cx="0" cy="0"/>
         </a:xfrm>
       </p:grpSpPr>
-      <p:sp>
-        <p:nvSpPr>
-          <p:cNvPr id="3" name="TextBox 2">
-            <a:extLst>
-              <a:ext uri="{FF2B5EF4-FFF2-40B4-BE49-F238E27FC236}">
-                <a16:creationId xmlns:a16="http://schemas.microsoft.com/office/drawing/2014/main" id="{4322D005-52EF-5A44-6380-0A6FDC5E0C3B}"/>
-              </a:ext>
-            </a:extLst>
-          </p:cNvPr>
-          <p:cNvSpPr txBox="1"/>
-          <p:nvPr userDrawn="1">
-            <p:extLst>
-              <p:ext uri="{1162E1C5-73C7-4A58-AE30-91384D911F3F}">
-                <p184:classification xmlns:p184="http://schemas.microsoft.com/office/powerpoint/2018/4/main" val="ftr"/>
-              </p:ext>
-            </p:extLst>
-          </p:nvPr>
-        </p:nvSpPr>
-        <p:spPr>
-          <a:xfrm>
-            <a:off x="5778500" y="6642100"/>
-            <a:ext cx="669925" cy="152400"/>
-          </a:xfrm>
-          <a:prstGeom prst="rect">
-            <a:avLst/>
-          </a:prstGeom>
-        </p:spPr>
-        <p:txBody>
-          <a:bodyPr horzOverflow="overflow" lIns="0" tIns="0" rIns="0" bIns="0">
-            <a:spAutoFit/>
-          </a:bodyPr>
-          <a:lstStyle/>
-          <a:p>
-            <a:pPr algn="l"/>
-            <a:r>
-              <a:rPr lang="en-GB" sz="1000">
-                <a:solidFill>
-                  <a:srgbClr val="000000">
-                    <a:alpha val="50000"/>
-                  </a:srgbClr>
-                </a:solidFill>
-                <a:latin typeface="Mylius Modern" panose="020B0504020202020204" pitchFamily="34" charset="0"/>
-              </a:rPr>
-              <a:t>INTERNAL</a:t>
-            </a:r>
-          </a:p>
-        </p:txBody>
-      </p:sp>
     </p:spTree>
   </p:cSld>
   <p:clrMap bg1="lt1" tx1="dk1" bg2="lt2" tx2="dk2" accent1="accent1" accent2="accent2" accent3="accent3" accent4="accent4" accent5="accent5" accent6="accent6" hlink="hlink" folHlink="folHlink"/>
@@ -1281,7 +1421,6 @@
         <a:solidFill>
           <a:srgbClr val="13453B"/>
         </a:solidFill>
-        <a:effectLst/>
       </p:bgPr>
     </p:bg>
     <p:spTree>
@@ -1319,11 +1458,11 @@
           <a:bodyPr wrap="square" lIns="0" tIns="0" rIns="0" bIns="0" rtlCol="0" anchor="ctr"/>
           <a:lstStyle/>
           <a:p>
-            <a:pPr marL="0" indent="0">
-              <a:buNone/>
-            </a:pPr>
-            <a:r>
-              <a:rPr lang="en-US" sz="1100" b="1" kern="0" spc="240" dirty="0">
+            <a:pPr indent="0" marL="0">
+              <a:buNone/>
+            </a:pPr>
+            <a:r>
+              <a:rPr lang="en-US" sz="1100" b="1" spc="240" kern="0" dirty="0">
                 <a:solidFill>
                   <a:srgbClr val="8FBFAE"/>
                 </a:solidFill>
@@ -1345,7 +1484,7 @@
         </p:nvSpPr>
         <p:spPr>
           <a:xfrm>
-            <a:off x="548640" y="1828800"/>
+            <a:off x="548640" y="2194560"/>
             <a:ext cx="10607040" cy="1737360"/>
           </a:xfrm>
           <a:prstGeom prst="rect">
@@ -1358,7 +1497,7 @@
           <a:bodyPr wrap="square" lIns="0" tIns="0" rIns="0" bIns="0" rtlCol="0" anchor="ctr"/>
           <a:lstStyle/>
           <a:p>
-            <a:pPr marL="0" indent="0">
+            <a:pPr indent="0" marL="0">
               <a:lnSpc>
                 <a:spcPts val="4600"/>
               </a:lnSpc>
@@ -1378,7 +1517,7 @@
             <a:endParaRPr lang="en-US" sz="4000" dirty="0"/>
           </a:p>
           <a:p>
-            <a:pPr marL="0" indent="0">
+            <a:pPr indent="0" marL="0">
               <a:lnSpc>
                 <a:spcPts val="4600"/>
               </a:lnSpc>
@@ -1401,7 +1540,7 @@
       </p:sp>
       <p:sp>
         <p:nvSpPr>
-          <p:cNvPr id="5" name="Shape 3"/>
+          <p:cNvPr id="4" name="Shape 2"/>
           <p:cNvSpPr/>
           <p:nvPr/>
         </p:nvSpPr>
@@ -1421,17 +1560,10 @@
             <a:prstDash val="solid"/>
           </a:ln>
         </p:spPr>
-        <p:txBody>
-          <a:bodyPr/>
-          <a:lstStyle/>
-          <a:p>
-            <a:endParaRPr lang="en-GB"/>
-          </a:p>
-        </p:txBody>
-      </p:sp>
-      <p:sp>
-        <p:nvSpPr>
-          <p:cNvPr id="6" name="Text 4"/>
+      </p:sp>
+      <p:sp>
+        <p:nvSpPr>
+          <p:cNvPr id="5" name="Text 3"/>
           <p:cNvSpPr txBox="1"/>
           <p:nvPr/>
         </p:nvSpPr>
@@ -1450,7 +1582,7 @@
           <a:bodyPr wrap="square" lIns="0" tIns="0" rIns="0" bIns="0" rtlCol="0" anchor="ctr"/>
           <a:lstStyle/>
           <a:p>
-            <a:pPr marL="0" indent="0">
+            <a:pPr indent="0" marL="0">
               <a:buNone/>
             </a:pPr>
             <a:r>
@@ -1470,7 +1602,7 @@
       </p:sp>
       <p:sp>
         <p:nvSpPr>
-          <p:cNvPr id="7" name="Text 5"/>
+          <p:cNvPr id="6" name="Text 4"/>
           <p:cNvSpPr txBox="1"/>
           <p:nvPr/>
         </p:nvSpPr>
@@ -1489,7 +1621,7 @@
           <a:bodyPr wrap="square" lIns="0" tIns="0" rIns="0" bIns="0" rtlCol="0" anchor="ctr"/>
           <a:lstStyle/>
           <a:p>
-            <a:pPr marL="0" indent="0">
+            <a:pPr indent="0" marL="0">
               <a:buNone/>
             </a:pPr>
             <a:r>
@@ -1504,6 +1636,84 @@
               <a:t>Candidate  ·  Finance Business Partner, Repairs &amp; Maintenance  ·  September 2026</a:t>
             </a:r>
             <a:endParaRPr lang="en-US" sz="1150" dirty="0"/>
+          </a:p>
+        </p:txBody>
+      </p:sp>
+      <p:sp>
+        <p:nvSpPr>
+          <p:cNvPr id="8" name="Text 5"/>
+          <p:cNvSpPr txBox="1"/>
+          <p:nvPr/>
+        </p:nvSpPr>
+        <p:spPr>
+          <a:xfrm>
+            <a:off x="548640" y="6355080"/>
+            <a:ext cx="8229600" cy="274320"/>
+          </a:xfrm>
+          <a:prstGeom prst="rect">
+            <a:avLst/>
+          </a:prstGeom>
+          <a:noFill/>
+          <a:ln/>
+        </p:spPr>
+        <p:txBody>
+          <a:bodyPr wrap="square" lIns="0" tIns="0" rIns="0" bIns="0" rtlCol="0" anchor="ctr"/>
+          <a:lstStyle/>
+          <a:p>
+            <a:pPr algn="l" indent="0" marL="0">
+              <a:buNone/>
+            </a:pPr>
+            <a:r>
+              <a:rPr lang="en-US" sz="900" dirty="0">
+                <a:solidFill>
+                  <a:srgbClr val="6E7D78"/>
+                </a:solidFill>
+                <a:latin typeface="Calibri" pitchFamily="34" charset="0"/>
+                <a:ea typeface="Calibri" pitchFamily="34" charset="-122"/>
+                <a:cs typeface="Calibri" pitchFamily="34" charset="-120"/>
+              </a:rPr>
+              <a:t>Sandra Vermaak  ·  Codi Group  ·  Finance Business Partner interview</a:t>
+            </a:r>
+            <a:endParaRPr lang="en-US" sz="900" dirty="0"/>
+          </a:p>
+        </p:txBody>
+      </p:sp>
+      <p:sp>
+        <p:nvSpPr>
+          <p:cNvPr id="9" name="Text 6"/>
+          <p:cNvSpPr txBox="1"/>
+          <p:nvPr/>
+        </p:nvSpPr>
+        <p:spPr>
+          <a:xfrm>
+            <a:off x="11201400" y="6355080"/>
+            <a:ext cx="457200" cy="274320"/>
+          </a:xfrm>
+          <a:prstGeom prst="rect">
+            <a:avLst/>
+          </a:prstGeom>
+          <a:noFill/>
+          <a:ln/>
+        </p:spPr>
+        <p:txBody>
+          <a:bodyPr wrap="square" lIns="0" tIns="0" rIns="0" bIns="0" rtlCol="0" anchor="ctr"/>
+          <a:lstStyle/>
+          <a:p>
+            <a:pPr algn="r" indent="0" marL="0">
+              <a:buNone/>
+            </a:pPr>
+            <a:r>
+              <a:rPr lang="en-US" sz="900" dirty="0">
+                <a:solidFill>
+                  <a:srgbClr val="6E7D78"/>
+                </a:solidFill>
+                <a:latin typeface="Calibri" pitchFamily="34" charset="0"/>
+                <a:ea typeface="Calibri" pitchFamily="34" charset="-122"/>
+                <a:cs typeface="Calibri" pitchFamily="34" charset="-120"/>
+              </a:rPr>
+              <a:t>1</a:t>
+            </a:r>
+            <a:endParaRPr lang="en-US" sz="900" dirty="0"/>
           </a:p>
         </p:txBody>
       </p:sp>
@@ -1523,7 +1733,6 @@
         <a:solidFill>
           <a:srgbClr val="FFFFFF"/>
         </a:solidFill>
-        <a:effectLst/>
       </p:bgPr>
     </p:bg>
     <p:spTree>
@@ -1561,11 +1770,11 @@
           <a:bodyPr wrap="square" lIns="0" tIns="0" rIns="0" bIns="0" rtlCol="0" anchor="ctr"/>
           <a:lstStyle/>
           <a:p>
-            <a:pPr marL="0" indent="0">
-              <a:buNone/>
-            </a:pPr>
-            <a:r>
-              <a:rPr lang="en-US" sz="1000" b="1" kern="0" spc="220" dirty="0">
+            <a:pPr indent="0" marL="0">
+              <a:buNone/>
+            </a:pPr>
+            <a:r>
+              <a:rPr lang="en-US" sz="1000" b="1" spc="220" kern="0" dirty="0">
                 <a:solidFill>
                   <a:srgbClr val="C8892F"/>
                 </a:solidFill>
@@ -1587,7 +1796,7 @@
         </p:nvSpPr>
         <p:spPr>
           <a:xfrm>
-            <a:off x="548640" y="612648"/>
+            <a:off x="548640" y="658368"/>
             <a:ext cx="11094415" cy="566928"/>
           </a:xfrm>
           <a:prstGeom prst="rect">
@@ -1600,7 +1809,7 @@
           <a:bodyPr wrap="square" lIns="0" tIns="0" rIns="0" bIns="0" rtlCol="0" anchor="ctr"/>
           <a:lstStyle/>
           <a:p>
-            <a:pPr marL="0" indent="0">
+            <a:pPr indent="0" marL="0">
               <a:buNone/>
             </a:pPr>
             <a:r>
@@ -1644,13 +1853,6 @@
             <a:prstDash val="solid"/>
           </a:ln>
         </p:spPr>
-        <p:txBody>
-          <a:bodyPr/>
-          <a:lstStyle/>
-          <a:p>
-            <a:endParaRPr lang="en-GB"/>
-          </a:p>
-        </p:txBody>
       </p:sp>
       <p:sp>
         <p:nvSpPr>
@@ -1673,7 +1875,7 @@
           <a:bodyPr wrap="square" lIns="0" tIns="0" rIns="0" bIns="0" rtlCol="0" anchor="ctr"/>
           <a:lstStyle/>
           <a:p>
-            <a:pPr marL="0" indent="0">
+            <a:pPr indent="0" marL="0">
               <a:buNone/>
             </a:pPr>
             <a:r>
@@ -1712,7 +1914,7 @@
           <a:bodyPr wrap="square" lIns="0" tIns="0" rIns="0" bIns="0" rtlCol="0" anchor="ctr"/>
           <a:lstStyle/>
           <a:p>
-            <a:pPr marL="0" indent="0">
+            <a:pPr indent="0" marL="0">
               <a:buNone/>
             </a:pPr>
             <a:r>
@@ -1751,7 +1953,7 @@
           <a:bodyPr wrap="square" lIns="0" tIns="0" rIns="0" bIns="0" rtlCol="0" anchor="ctr"/>
           <a:lstStyle/>
           <a:p>
-            <a:pPr marL="0" indent="0">
+            <a:pPr indent="0" marL="0">
               <a:buNone/>
             </a:pPr>
             <a:r>
@@ -1778,7 +1980,7 @@
         <p:spPr>
           <a:xfrm>
             <a:off x="548640" y="3931920"/>
-            <a:ext cx="4114800" cy="1033272"/>
+            <a:ext cx="4114800" cy="1188720"/>
           </a:xfrm>
           <a:prstGeom prst="rect">
             <a:avLst/>
@@ -1790,7 +1992,7 @@
           <a:bodyPr wrap="square" lIns="0" tIns="0" rIns="0" bIns="0" rtlCol="0" anchor="t"/>
           <a:lstStyle/>
           <a:p>
-            <a:pPr marL="0" indent="0">
+            <a:pPr indent="0" marL="0">
               <a:lnSpc>
                 <a:spcPts val="1900"/>
               </a:lnSpc>
@@ -1813,7 +2015,7 @@
       </p:sp>
       <p:sp>
         <p:nvSpPr>
-          <p:cNvPr id="11" name="Shape 9"/>
+          <p:cNvPr id="9" name="Shape 7"/>
           <p:cNvSpPr/>
           <p:nvPr/>
         </p:nvSpPr>
@@ -1837,17 +2039,10 @@
             <a:prstDash val="solid"/>
           </a:ln>
         </p:spPr>
-        <p:txBody>
-          <a:bodyPr/>
-          <a:lstStyle/>
-          <a:p>
-            <a:endParaRPr lang="en-GB"/>
-          </a:p>
-        </p:txBody>
-      </p:sp>
-      <p:sp>
-        <p:nvSpPr>
-          <p:cNvPr id="12" name="Text 10"/>
+      </p:sp>
+      <p:sp>
+        <p:nvSpPr>
+          <p:cNvPr id="10" name="Text 8"/>
           <p:cNvSpPr txBox="1"/>
           <p:nvPr/>
         </p:nvSpPr>
@@ -1866,7 +2061,7 @@
           <a:bodyPr wrap="square" lIns="0" tIns="0" rIns="0" bIns="0" rtlCol="0" anchor="ctr"/>
           <a:lstStyle/>
           <a:p>
-            <a:pPr marL="0" indent="0">
+            <a:pPr indent="0" marL="0">
               <a:buNone/>
             </a:pPr>
             <a:r>
@@ -1886,7 +2081,7 @@
       </p:sp>
       <p:sp>
         <p:nvSpPr>
-          <p:cNvPr id="13" name="Text 11"/>
+          <p:cNvPr id="11" name="Text 9"/>
           <p:cNvSpPr txBox="1"/>
           <p:nvPr/>
         </p:nvSpPr>
@@ -1905,7 +2100,7 @@
           <a:bodyPr wrap="square" lIns="0" tIns="0" rIns="0" bIns="0" rtlCol="0" anchor="ctr"/>
           <a:lstStyle/>
           <a:p>
-            <a:pPr marL="0" indent="0">
+            <a:pPr indent="0" marL="0">
               <a:buNone/>
             </a:pPr>
             <a:r>
@@ -1925,7 +2120,7 @@
       </p:sp>
       <p:sp>
         <p:nvSpPr>
-          <p:cNvPr id="14" name="Text 12"/>
+          <p:cNvPr id="12" name="Text 10"/>
           <p:cNvSpPr txBox="1"/>
           <p:nvPr/>
         </p:nvSpPr>
@@ -1944,7 +2139,7 @@
           <a:bodyPr wrap="square" lIns="0" tIns="0" rIns="0" bIns="0" rtlCol="0" anchor="ctr"/>
           <a:lstStyle/>
           <a:p>
-            <a:pPr marL="0" indent="0" algn="r">
+            <a:pPr algn="r" indent="0" marL="0">
               <a:buNone/>
             </a:pPr>
             <a:r>
@@ -1964,13 +2159,13 @@
       </p:sp>
       <p:sp>
         <p:nvSpPr>
-          <p:cNvPr id="15" name="Shape 13"/>
+          <p:cNvPr id="13" name="Shape 11"/>
           <p:cNvSpPr/>
           <p:nvPr/>
         </p:nvSpPr>
         <p:spPr>
           <a:xfrm>
-            <a:off x="5029200" y="2762374"/>
+            <a:off x="5029200" y="2770632"/>
             <a:ext cx="6611112" cy="1024128"/>
           </a:xfrm>
           <a:prstGeom prst="roundRect">
@@ -1988,17 +2183,10 @@
             <a:prstDash val="solid"/>
           </a:ln>
         </p:spPr>
-        <p:txBody>
-          <a:bodyPr/>
-          <a:lstStyle/>
-          <a:p>
-            <a:endParaRPr lang="en-GB"/>
-          </a:p>
-        </p:txBody>
-      </p:sp>
-      <p:sp>
-        <p:nvSpPr>
-          <p:cNvPr id="16" name="Text 14"/>
+      </p:sp>
+      <p:sp>
+        <p:nvSpPr>
+          <p:cNvPr id="14" name="Text 12"/>
           <p:cNvSpPr txBox="1"/>
           <p:nvPr/>
         </p:nvSpPr>
@@ -2017,7 +2205,7 @@
           <a:bodyPr wrap="square" lIns="0" tIns="0" rIns="0" bIns="0" rtlCol="0" anchor="ctr"/>
           <a:lstStyle/>
           <a:p>
-            <a:pPr marL="0" indent="0">
+            <a:pPr indent="0" marL="0">
               <a:buNone/>
             </a:pPr>
             <a:r>
@@ -2037,7 +2225,7 @@
       </p:sp>
       <p:sp>
         <p:nvSpPr>
-          <p:cNvPr id="17" name="Text 15"/>
+          <p:cNvPr id="15" name="Text 13"/>
           <p:cNvSpPr txBox="1"/>
           <p:nvPr/>
         </p:nvSpPr>
@@ -2056,7 +2244,7 @@
           <a:bodyPr wrap="square" lIns="0" tIns="0" rIns="0" bIns="0" rtlCol="0" anchor="ctr"/>
           <a:lstStyle/>
           <a:p>
-            <a:pPr marL="0" indent="0">
+            <a:pPr indent="0" marL="0">
               <a:buNone/>
             </a:pPr>
             <a:r>
@@ -2076,13 +2264,13 @@
       </p:sp>
       <p:sp>
         <p:nvSpPr>
-          <p:cNvPr id="18" name="Text 16"/>
-          <p:cNvSpPr txBox="1"/>
-          <p:nvPr/>
-        </p:nvSpPr>
-        <p:spPr>
-          <a:xfrm>
-            <a:off x="10009918" y="2909293"/>
+          <p:cNvPr id="16" name="Text 14"/>
+          <p:cNvSpPr txBox="1"/>
+          <p:nvPr/>
+        </p:nvSpPr>
+        <p:spPr>
+          <a:xfrm>
+            <a:off x="9966960" y="2916936"/>
             <a:ext cx="1463040" cy="274320"/>
           </a:xfrm>
           <a:prstGeom prst="rect">
@@ -2095,7 +2283,7 @@
           <a:bodyPr wrap="square" lIns="0" tIns="0" rIns="0" bIns="0" rtlCol="0" anchor="ctr"/>
           <a:lstStyle/>
           <a:p>
-            <a:pPr marL="0" indent="0" algn="r">
+            <a:pPr algn="r" indent="0" marL="0">
               <a:buNone/>
             </a:pPr>
             <a:r>
@@ -2115,13 +2303,13 @@
       </p:sp>
       <p:sp>
         <p:nvSpPr>
-          <p:cNvPr id="19" name="Shape 17"/>
+          <p:cNvPr id="17" name="Shape 15"/>
           <p:cNvSpPr/>
           <p:nvPr/>
         </p:nvSpPr>
         <p:spPr>
           <a:xfrm>
-            <a:off x="5029200" y="5404104"/>
+            <a:off x="5029200" y="3941064"/>
             <a:ext cx="6611112" cy="1024128"/>
           </a:xfrm>
           <a:prstGeom prst="roundRect">
@@ -2139,11 +2327,82 @@
             <a:prstDash val="solid"/>
           </a:ln>
         </p:spPr>
-        <p:txBody>
-          <a:bodyPr/>
-          <a:lstStyle/>
-          <a:p>
-            <a:endParaRPr lang="en-GB"/>
+      </p:sp>
+      <p:sp>
+        <p:nvSpPr>
+          <p:cNvPr id="18" name="Text 16"/>
+          <p:cNvSpPr txBox="1"/>
+          <p:nvPr/>
+        </p:nvSpPr>
+        <p:spPr>
+          <a:xfrm>
+            <a:off x="5303520" y="4087368"/>
+            <a:ext cx="4206240" cy="292608"/>
+          </a:xfrm>
+          <a:prstGeom prst="rect">
+            <a:avLst/>
+          </a:prstGeom>
+          <a:noFill/>
+          <a:ln/>
+        </p:spPr>
+        <p:txBody>
+          <a:bodyPr wrap="square" lIns="0" tIns="0" rIns="0" bIns="0" rtlCol="0" anchor="ctr"/>
+          <a:lstStyle/>
+          <a:p>
+            <a:pPr indent="0" marL="0">
+              <a:buNone/>
+            </a:pPr>
+            <a:r>
+              <a:rPr lang="en-US" sz="1400" b="1" dirty="0">
+                <a:solidFill>
+                  <a:srgbClr val="16211E"/>
+                </a:solidFill>
+                <a:latin typeface="Calibri" pitchFamily="34" charset="0"/>
+                <a:ea typeface="Calibri" pitchFamily="34" charset="-122"/>
+                <a:cs typeface="Calibri" pitchFamily="34" charset="-120"/>
+              </a:rPr>
+              <a:t>Compliance</a:t>
+            </a:r>
+            <a:endParaRPr lang="en-US" sz="1400" dirty="0"/>
+          </a:p>
+        </p:txBody>
+      </p:sp>
+      <p:sp>
+        <p:nvSpPr>
+          <p:cNvPr id="19" name="Text 17"/>
+          <p:cNvSpPr txBox="1"/>
+          <p:nvPr/>
+        </p:nvSpPr>
+        <p:spPr>
+          <a:xfrm>
+            <a:off x="5303520" y="4416552"/>
+            <a:ext cx="4754880" cy="365760"/>
+          </a:xfrm>
+          <a:prstGeom prst="rect">
+            <a:avLst/>
+          </a:prstGeom>
+          <a:noFill/>
+          <a:ln/>
+        </p:spPr>
+        <p:txBody>
+          <a:bodyPr wrap="square" lIns="0" tIns="0" rIns="0" bIns="0" rtlCol="0" anchor="ctr"/>
+          <a:lstStyle/>
+          <a:p>
+            <a:pPr indent="0" marL="0">
+              <a:buNone/>
+            </a:pPr>
+            <a:r>
+              <a:rPr lang="en-US" sz="1150" dirty="0">
+                <a:solidFill>
+                  <a:srgbClr val="6E7D78"/>
+                </a:solidFill>
+                <a:latin typeface="Calibri" pitchFamily="34" charset="0"/>
+                <a:ea typeface="Calibri" pitchFamily="34" charset="-122"/>
+                <a:cs typeface="Calibri" pitchFamily="34" charset="-120"/>
+              </a:rPr>
+              <a:t>Non-negotiable spend</a:t>
+            </a:r>
+            <a:endParaRPr lang="en-US" sz="1150" dirty="0"/>
           </a:p>
         </p:txBody>
       </p:sp>
@@ -2155,7 +2414,73 @@
         </p:nvSpPr>
         <p:spPr>
           <a:xfrm>
-            <a:off x="5303520" y="5545372"/>
+            <a:off x="9966960" y="4087368"/>
+            <a:ext cx="1463040" cy="274320"/>
+          </a:xfrm>
+          <a:prstGeom prst="rect">
+            <a:avLst/>
+          </a:prstGeom>
+          <a:noFill/>
+          <a:ln/>
+        </p:spPr>
+        <p:txBody>
+          <a:bodyPr wrap="square" lIns="0" tIns="0" rIns="0" bIns="0" rtlCol="0" anchor="ctr"/>
+          <a:lstStyle/>
+          <a:p>
+            <a:pPr algn="r" indent="0" marL="0">
+              <a:buNone/>
+            </a:pPr>
+            <a:r>
+              <a:rPr lang="en-US" sz="1050" b="1" dirty="0">
+                <a:solidFill>
+                  <a:srgbClr val="2E7D68"/>
+                </a:solidFill>
+                <a:latin typeface="Calibri" pitchFamily="34" charset="0"/>
+                <a:ea typeface="Calibri" pitchFamily="34" charset="-122"/>
+                <a:cs typeface="Calibri" pitchFamily="34" charset="-120"/>
+              </a:rPr>
+              <a:t>Revenue</a:t>
+            </a:r>
+            <a:endParaRPr lang="en-US" sz="1050" dirty="0"/>
+          </a:p>
+        </p:txBody>
+      </p:sp>
+      <p:sp>
+        <p:nvSpPr>
+          <p:cNvPr id="21" name="Shape 19"/>
+          <p:cNvSpPr/>
+          <p:nvPr/>
+        </p:nvSpPr>
+        <p:spPr>
+          <a:xfrm>
+            <a:off x="5029200" y="5111496"/>
+            <a:ext cx="6611112" cy="1024128"/>
+          </a:xfrm>
+          <a:prstGeom prst="roundRect">
+            <a:avLst>
+              <a:gd name="adj" fmla="val 5357"/>
+            </a:avLst>
+          </a:prstGeom>
+          <a:solidFill>
+            <a:srgbClr val="F1F5F3"/>
+          </a:solidFill>
+          <a:ln w="12700">
+            <a:solidFill>
+              <a:srgbClr val="F1F5F3"/>
+            </a:solidFill>
+            <a:prstDash val="solid"/>
+          </a:ln>
+        </p:spPr>
+      </p:sp>
+      <p:sp>
+        <p:nvSpPr>
+          <p:cNvPr id="22" name="Text 20"/>
+          <p:cNvSpPr txBox="1"/>
+          <p:nvPr/>
+        </p:nvSpPr>
+        <p:spPr>
+          <a:xfrm>
+            <a:off x="5303520" y="5257800"/>
             <a:ext cx="4206240" cy="292608"/>
           </a:xfrm>
           <a:prstGeom prst="rect">
@@ -2168,7 +2493,7 @@
           <a:bodyPr wrap="square" lIns="0" tIns="0" rIns="0" bIns="0" rtlCol="0" anchor="ctr"/>
           <a:lstStyle/>
           <a:p>
-            <a:pPr marL="0" indent="0">
+            <a:pPr indent="0" marL="0">
               <a:buNone/>
             </a:pPr>
             <a:r>
@@ -2188,13 +2513,13 @@
       </p:sp>
       <p:sp>
         <p:nvSpPr>
-          <p:cNvPr id="21" name="Text 19"/>
-          <p:cNvSpPr txBox="1"/>
-          <p:nvPr/>
-        </p:nvSpPr>
-        <p:spPr>
-          <a:xfrm>
-            <a:off x="5303520" y="5954397"/>
+          <p:cNvPr id="23" name="Text 21"/>
+          <p:cNvSpPr txBox="1"/>
+          <p:nvPr/>
+        </p:nvSpPr>
+        <p:spPr>
+          <a:xfrm>
+            <a:off x="5303520" y="5586984"/>
             <a:ext cx="4754880" cy="365760"/>
           </a:xfrm>
           <a:prstGeom prst="rect">
@@ -2207,7 +2532,7 @@
           <a:bodyPr wrap="square" lIns="0" tIns="0" rIns="0" bIns="0" rtlCol="0" anchor="ctr"/>
           <a:lstStyle/>
           <a:p>
-            <a:pPr marL="0" indent="0">
+            <a:pPr indent="0" marL="0">
               <a:buNone/>
             </a:pPr>
             <a:r>
@@ -2227,13 +2552,13 @@
       </p:sp>
       <p:sp>
         <p:nvSpPr>
-          <p:cNvPr id="22" name="Text 20"/>
-          <p:cNvSpPr txBox="1"/>
-          <p:nvPr/>
-        </p:nvSpPr>
-        <p:spPr>
-          <a:xfrm>
-            <a:off x="10058400" y="5467867"/>
+          <p:cNvPr id="24" name="Text 22"/>
+          <p:cNvSpPr txBox="1"/>
+          <p:nvPr/>
+        </p:nvSpPr>
+        <p:spPr>
+          <a:xfrm>
+            <a:off x="9966960" y="5257800"/>
             <a:ext cx="1463040" cy="274320"/>
           </a:xfrm>
           <a:prstGeom prst="rect">
@@ -2246,7 +2571,7 @@
           <a:bodyPr wrap="square" lIns="0" tIns="0" rIns="0" bIns="0" rtlCol="0" anchor="ctr"/>
           <a:lstStyle/>
           <a:p>
-            <a:pPr marL="0" indent="0" algn="r">
+            <a:pPr algn="r" indent="0" marL="0">
               <a:buNone/>
             </a:pPr>
             <a:r>
@@ -2285,7 +2610,7 @@
           <a:bodyPr wrap="square" lIns="0" tIns="0" rIns="0" bIns="0" rtlCol="0" anchor="ctr"/>
           <a:lstStyle/>
           <a:p>
-            <a:pPr marL="0" indent="0" algn="l">
+            <a:pPr algn="l" indent="0" marL="0">
               <a:buNone/>
             </a:pPr>
             <a:r>
@@ -2324,7 +2649,7 @@
           <a:bodyPr wrap="square" lIns="0" tIns="0" rIns="0" bIns="0" rtlCol="0" anchor="ctr"/>
           <a:lstStyle/>
           <a:p>
-            <a:pPr marL="0" indent="0" algn="r">
+            <a:pPr algn="r" indent="0" marL="0">
               <a:buNone/>
             </a:pPr>
             <a:r>
@@ -2339,178 +2664,6 @@
               <a:t>2</a:t>
             </a:r>
             <a:endParaRPr lang="en-US" sz="900" dirty="0"/>
-          </a:p>
-        </p:txBody>
-      </p:sp>
-      <p:pic>
-        <p:nvPicPr>
-          <p:cNvPr id="28" name="Picture 27">
-            <a:extLst>
-              <a:ext uri="{FF2B5EF4-FFF2-40B4-BE49-F238E27FC236}">
-                <a16:creationId xmlns:a16="http://schemas.microsoft.com/office/drawing/2014/main" id="{91873581-5BEA-A6D0-06D1-E24C0FDDC8D0}"/>
-              </a:ext>
-            </a:extLst>
-          </p:cNvPr>
-          <p:cNvPicPr>
-            <a:picLocks noChangeAspect="1"/>
-          </p:cNvPicPr>
-          <p:nvPr/>
-        </p:nvPicPr>
-        <p:blipFill>
-          <a:blip r:embed="rId3"/>
-          <a:stretch>
-            <a:fillRect/>
-          </a:stretch>
-        </p:blipFill>
-        <p:spPr>
-          <a:xfrm>
-            <a:off x="5031674" y="4001474"/>
-            <a:ext cx="6626926" cy="1036410"/>
-          </a:xfrm>
-          <a:prstGeom prst="rect">
-            <a:avLst/>
-          </a:prstGeom>
-        </p:spPr>
-      </p:pic>
-      <p:sp>
-        <p:nvSpPr>
-          <p:cNvPr id="30" name="TextBox 29">
-            <a:extLst>
-              <a:ext uri="{FF2B5EF4-FFF2-40B4-BE49-F238E27FC236}">
-                <a16:creationId xmlns:a16="http://schemas.microsoft.com/office/drawing/2014/main" id="{DC4C8514-6341-1D8D-594B-9017E794FA69}"/>
-              </a:ext>
-            </a:extLst>
-          </p:cNvPr>
-          <p:cNvSpPr txBox="1"/>
-          <p:nvPr/>
-        </p:nvSpPr>
-        <p:spPr>
-          <a:xfrm>
-            <a:off x="5178020" y="4111824"/>
-            <a:ext cx="6097022" cy="307777"/>
-          </a:xfrm>
-          <a:prstGeom prst="rect">
-            <a:avLst/>
-          </a:prstGeom>
-          <a:noFill/>
-        </p:spPr>
-        <p:txBody>
-          <a:bodyPr wrap="square">
-            <a:spAutoFit/>
-          </a:bodyPr>
-          <a:lstStyle/>
-          <a:p>
-            <a:r>
-              <a:rPr lang="en-US" sz="1400" b="1" dirty="0">
-                <a:solidFill>
-                  <a:srgbClr val="16211E"/>
-                </a:solidFill>
-                <a:latin typeface="Calibri" pitchFamily="34" charset="0"/>
-                <a:ea typeface="Calibri" pitchFamily="34" charset="-122"/>
-                <a:cs typeface="Calibri" pitchFamily="34" charset="-120"/>
-              </a:rPr>
-              <a:t>C</a:t>
-            </a:r>
-            <a:r>
-              <a:rPr kumimoji="0" lang="en-US" sz="1400" b="1" i="0" u="none" strike="noStrike" kern="1200" cap="none" spc="0" normalizeH="0" baseline="0" noProof="0" dirty="0" err="1">
-                <a:ln>
-                  <a:noFill/>
-                </a:ln>
-                <a:solidFill>
-                  <a:srgbClr val="16211E"/>
-                </a:solidFill>
-                <a:effectLst/>
-                <a:uLnTx/>
-                <a:uFillTx/>
-                <a:latin typeface="Calibri" pitchFamily="34" charset="0"/>
-                <a:ea typeface="Calibri" pitchFamily="34" charset="-122"/>
-                <a:cs typeface="Calibri" pitchFamily="34" charset="-120"/>
-              </a:rPr>
-              <a:t>ompliance</a:t>
-            </a:r>
-            <a:endParaRPr lang="en-GB" dirty="0"/>
-          </a:p>
-        </p:txBody>
-      </p:sp>
-      <p:sp>
-        <p:nvSpPr>
-          <p:cNvPr id="34" name="Text 15">
-            <a:extLst>
-              <a:ext uri="{FF2B5EF4-FFF2-40B4-BE49-F238E27FC236}">
-                <a16:creationId xmlns:a16="http://schemas.microsoft.com/office/drawing/2014/main" id="{FBC68662-6999-3504-A7BC-7667B3F8FFF3}"/>
-              </a:ext>
-            </a:extLst>
-          </p:cNvPr>
-          <p:cNvSpPr txBox="1"/>
-          <p:nvPr/>
-        </p:nvSpPr>
-        <p:spPr>
-          <a:xfrm>
-            <a:off x="5303520" y="4435455"/>
-            <a:ext cx="4754880" cy="365760"/>
-          </a:xfrm>
-          <a:prstGeom prst="rect">
-            <a:avLst/>
-          </a:prstGeom>
-          <a:noFill/>
-          <a:ln/>
-        </p:spPr>
-        <p:txBody>
-          <a:bodyPr wrap="square" lIns="0" tIns="0" rIns="0" bIns="0" rtlCol="0" anchor="ctr"/>
-          <a:lstStyle/>
-          <a:p>
-            <a:pPr marL="0" indent="0">
-              <a:buNone/>
-            </a:pPr>
-            <a:r>
-              <a:rPr lang="en-US" sz="1150" dirty="0"/>
-              <a:t>Non-negotiable spend</a:t>
-            </a:r>
-          </a:p>
-        </p:txBody>
-      </p:sp>
-      <p:sp>
-        <p:nvSpPr>
-          <p:cNvPr id="36" name="Text 16">
-            <a:extLst>
-              <a:ext uri="{FF2B5EF4-FFF2-40B4-BE49-F238E27FC236}">
-                <a16:creationId xmlns:a16="http://schemas.microsoft.com/office/drawing/2014/main" id="{A0315F99-5FF9-C772-D5E8-EAB1771A3726}"/>
-              </a:ext>
-            </a:extLst>
-          </p:cNvPr>
-          <p:cNvSpPr txBox="1"/>
-          <p:nvPr/>
-        </p:nvSpPr>
-        <p:spPr>
-          <a:xfrm>
-            <a:off x="10058400" y="4020576"/>
-            <a:ext cx="1463040" cy="274320"/>
-          </a:xfrm>
-          <a:prstGeom prst="rect">
-            <a:avLst/>
-          </a:prstGeom>
-          <a:noFill/>
-          <a:ln/>
-        </p:spPr>
-        <p:txBody>
-          <a:bodyPr wrap="square" lIns="0" tIns="0" rIns="0" bIns="0" rtlCol="0" anchor="ctr"/>
-          <a:lstStyle/>
-          <a:p>
-            <a:pPr marL="0" indent="0" algn="r">
-              <a:buNone/>
-            </a:pPr>
-            <a:r>
-              <a:rPr lang="en-US" sz="1050" b="1" dirty="0">
-                <a:solidFill>
-                  <a:srgbClr val="2E7D68"/>
-                </a:solidFill>
-                <a:latin typeface="Calibri" pitchFamily="34" charset="0"/>
-                <a:ea typeface="Calibri" pitchFamily="34" charset="-122"/>
-                <a:cs typeface="Calibri" pitchFamily="34" charset="-120"/>
-              </a:rPr>
-              <a:t>Revenue</a:t>
-            </a:r>
-            <a:endParaRPr lang="en-US" sz="1050" dirty="0"/>
           </a:p>
         </p:txBody>
       </p:sp>
@@ -2530,7 +2683,6 @@
         <a:solidFill>
           <a:srgbClr val="FFFFFF"/>
         </a:solidFill>
-        <a:effectLst/>
       </p:bgPr>
     </p:bg>
     <p:spTree>
@@ -2568,11 +2720,11 @@
           <a:bodyPr wrap="square" lIns="0" tIns="0" rIns="0" bIns="0" rtlCol="0" anchor="ctr"/>
           <a:lstStyle/>
           <a:p>
-            <a:pPr marL="0" indent="0">
-              <a:buNone/>
-            </a:pPr>
-            <a:r>
-              <a:rPr lang="en-US" sz="1000" b="1" kern="0" spc="220" dirty="0">
+            <a:pPr indent="0" marL="0">
+              <a:buNone/>
+            </a:pPr>
+            <a:r>
+              <a:rPr lang="en-US" sz="1000" b="1" spc="220" kern="0" dirty="0">
                 <a:solidFill>
                   <a:srgbClr val="C8892F"/>
                 </a:solidFill>
@@ -2607,7 +2759,7 @@
           <a:bodyPr wrap="square" lIns="0" tIns="0" rIns="0" bIns="0" rtlCol="0" anchor="ctr"/>
           <a:lstStyle/>
           <a:p>
-            <a:pPr marL="0" indent="0">
+            <a:pPr indent="0" marL="0">
               <a:buNone/>
             </a:pPr>
             <a:r>
@@ -2619,7 +2771,7 @@
                 <a:ea typeface="Cambria" pitchFamily="34" charset="-122"/>
                 <a:cs typeface="Cambria" pitchFamily="34" charset="-120"/>
               </a:rPr>
-              <a:t>Three things I'd check first</a:t>
+              <a:t>Where an overspend usually comes from</a:t>
             </a:r>
             <a:endParaRPr lang="en-US" sz="3000" dirty="0"/>
           </a:p>
@@ -2646,7 +2798,7 @@
           <a:bodyPr wrap="square" lIns="0" tIns="0" rIns="0" bIns="0" rtlCol="0" anchor="ctr"/>
           <a:lstStyle/>
           <a:p>
-            <a:pPr marL="0" indent="0">
+            <a:pPr indent="0" marL="0">
               <a:buNone/>
             </a:pPr>
             <a:r>
@@ -2658,7 +2810,7 @@
                 <a:ea typeface="Calibri" pitchFamily="34" charset="-122"/>
                 <a:cs typeface="Calibri" pitchFamily="34" charset="-120"/>
               </a:rPr>
-              <a:t>These are questions, not answers. Each one has something I can go and check.</a:t>
+              <a:t>First check it is real — phasing, accruals and coding. Then split the variance three ways.</a:t>
             </a:r>
             <a:endParaRPr lang="en-US" sz="1350" dirty="0"/>
           </a:p>
@@ -2673,7 +2825,7 @@
         <p:spPr>
           <a:xfrm>
             <a:off x="548640" y="1828800"/>
-            <a:ext cx="3484778" cy="3794760"/>
+            <a:ext cx="3484778" cy="3611880"/>
           </a:xfrm>
           <a:prstGeom prst="roundRect">
             <a:avLst>
@@ -2690,13 +2842,6 @@
             <a:prstDash val="solid"/>
           </a:ln>
         </p:spPr>
-        <p:txBody>
-          <a:bodyPr/>
-          <a:lstStyle/>
-          <a:p>
-            <a:endParaRPr lang="en-GB"/>
-          </a:p>
-        </p:txBody>
       </p:sp>
       <p:sp>
         <p:nvSpPr>
@@ -2717,13 +2862,6 @@
           </a:solidFill>
           <a:ln/>
         </p:spPr>
-        <p:txBody>
-          <a:bodyPr/>
-          <a:lstStyle/>
-          <a:p>
-            <a:endParaRPr lang="en-GB"/>
-          </a:p>
-        </p:txBody>
       </p:sp>
       <p:sp>
         <p:nvSpPr>
@@ -2746,7 +2884,7 @@
           <a:bodyPr wrap="square" lIns="0" tIns="0" rIns="0" bIns="0" rtlCol="0" anchor="ctr"/>
           <a:lstStyle/>
           <a:p>
-            <a:pPr marL="0" indent="0" algn="ctr">
+            <a:pPr algn="ctr" indent="0" marL="0">
               <a:buNone/>
             </a:pPr>
             <a:r>
@@ -2785,7 +2923,7 @@
           <a:bodyPr wrap="square" lIns="0" tIns="0" rIns="0" bIns="0" rtlCol="0" anchor="ctr"/>
           <a:lstStyle/>
           <a:p>
-            <a:pPr marL="0" indent="0">
+            <a:pPr indent="0" marL="0">
               <a:buNone/>
             </a:pPr>
             <a:r>
@@ -2797,7 +2935,7 @@
                 <a:ea typeface="Cambria" pitchFamily="34" charset="-122"/>
                 <a:cs typeface="Cambria" pitchFamily="34" charset="-120"/>
               </a:rPr>
-              <a:t>Who does the work</a:t>
+              <a:t>Volume</a:t>
             </a:r>
             <a:endParaRPr lang="en-US" sz="1900" dirty="0"/>
           </a:p>
@@ -2812,7 +2950,7 @@
         <p:spPr>
           <a:xfrm>
             <a:off x="822960" y="3035808"/>
-            <a:ext cx="2936138" cy="1417320"/>
+            <a:ext cx="2936138" cy="1005840"/>
           </a:xfrm>
           <a:prstGeom prst="rect">
             <a:avLst/>
@@ -2824,14 +2962,14 @@
           <a:bodyPr wrap="square" lIns="0" tIns="0" rIns="0" bIns="0" rtlCol="0" anchor="t"/>
           <a:lstStyle/>
           <a:p>
-            <a:pPr marL="0" indent="0">
+            <a:pPr indent="0" marL="0">
               <a:lnSpc>
-                <a:spcPts val="1700"/>
+                <a:spcPts val="1800"/>
               </a:lnSpc>
               <a:buNone/>
             </a:pPr>
             <a:r>
-              <a:rPr lang="en-US" sz="1200" dirty="0">
+              <a:rPr lang="en-US" sz="1250" dirty="0">
                 <a:solidFill>
                   <a:srgbClr val="33423D"/>
                 </a:solidFill>
@@ -2839,9 +2977,9 @@
                 <a:ea typeface="Calibri" pitchFamily="34" charset="-122"/>
                 <a:cs typeface="Calibri" pitchFamily="34" charset="-120"/>
               </a:rPr>
-              <a:t>Pobl grew its in-house trades team by about half (34 roles) in 2024. There is also a contractor framework of 11 lots covering repairs, voids and out-of-hours.</a:t>
-            </a:r>
-            <a:endParaRPr lang="en-US" sz="1200" dirty="0"/>
+              <a:t>We are doing more jobs than the budget assumed.</a:t>
+            </a:r>
+            <a:endParaRPr lang="en-US" sz="1250" dirty="0"/>
           </a:p>
         </p:txBody>
       </p:sp>
@@ -2853,7 +2991,7 @@
         </p:nvSpPr>
         <p:spPr>
           <a:xfrm>
-            <a:off x="822960" y="4498848"/>
+            <a:off x="822960" y="3858768"/>
             <a:ext cx="2936138" cy="219456"/>
           </a:xfrm>
           <a:prstGeom prst="rect">
@@ -2866,11 +3004,11 @@
           <a:bodyPr wrap="square" lIns="0" tIns="0" rIns="0" bIns="0" rtlCol="0" anchor="ctr"/>
           <a:lstStyle/>
           <a:p>
-            <a:pPr marL="0" indent="0">
-              <a:buNone/>
-            </a:pPr>
-            <a:r>
-              <a:rPr lang="en-US" sz="900" b="1" kern="0" spc="180" dirty="0">
+            <a:pPr indent="0" marL="0">
+              <a:buNone/>
+            </a:pPr>
+            <a:r>
+              <a:rPr lang="en-US" sz="900" b="1" spc="180" kern="0" dirty="0">
                 <a:solidFill>
                   <a:srgbClr val="C8892F"/>
                 </a:solidFill>
@@ -2878,7 +3016,7 @@
                 <a:ea typeface="Calibri" pitchFamily="34" charset="-122"/>
                 <a:cs typeface="Calibri" pitchFamily="34" charset="-120"/>
               </a:rPr>
-              <a:t>WHAT I'D CHECK</a:t>
+              <a:t>WHAT I'D LOOK AT</a:t>
             </a:r>
             <a:endParaRPr lang="en-US" sz="900" dirty="0"/>
           </a:p>
@@ -2892,8 +3030,8 @@
         </p:nvSpPr>
         <p:spPr>
           <a:xfrm>
-            <a:off x="822960" y="4736592"/>
-            <a:ext cx="2936138" cy="777240"/>
+            <a:off x="822960" y="4114800"/>
+            <a:ext cx="2936138" cy="1005840"/>
           </a:xfrm>
           <a:prstGeom prst="rect">
             <a:avLst/>
@@ -2905,14 +3043,14 @@
           <a:bodyPr wrap="square" lIns="0" tIns="0" rIns="0" bIns="0" rtlCol="0" anchor="t"/>
           <a:lstStyle/>
           <a:p>
-            <a:pPr marL="0" indent="0">
+            <a:pPr indent="0" marL="0">
               <a:lnSpc>
                 <a:spcPts val="1600"/>
               </a:lnSpc>
               <a:buNone/>
             </a:pPr>
             <a:r>
-              <a:rPr lang="en-US" sz="1150" i="1" dirty="0">
+              <a:rPr lang="en-US" sz="1150" dirty="0">
                 <a:solidFill>
                   <a:srgbClr val="16211E"/>
                 </a:solidFill>
@@ -2920,7 +3058,7 @@
                 <a:ea typeface="Calibri" pitchFamily="34" charset="-122"/>
                 <a:cs typeface="Calibri" pitchFamily="34" charset="-120"/>
               </a:rPr>
-              <a:t>Has contractor spend come down now we do more in-house, or are we paying for both?</a:t>
+              <a:t>Job numbers by type against budget and last year. Backlog, seasonality, and any change in demand.</a:t>
             </a:r>
             <a:endParaRPr lang="en-US" sz="1150" dirty="0"/>
           </a:p>
@@ -2935,7 +3073,7 @@
         <p:spPr>
           <a:xfrm>
             <a:off x="4353458" y="1828800"/>
-            <a:ext cx="3484778" cy="3794760"/>
+            <a:ext cx="3484778" cy="3611880"/>
           </a:xfrm>
           <a:prstGeom prst="roundRect">
             <a:avLst>
@@ -2952,13 +3090,6 @@
             <a:prstDash val="solid"/>
           </a:ln>
         </p:spPr>
-        <p:txBody>
-          <a:bodyPr/>
-          <a:lstStyle/>
-          <a:p>
-            <a:endParaRPr lang="en-GB"/>
-          </a:p>
-        </p:txBody>
       </p:sp>
       <p:sp>
         <p:nvSpPr>
@@ -2979,13 +3110,6 @@
           </a:solidFill>
           <a:ln/>
         </p:spPr>
-        <p:txBody>
-          <a:bodyPr/>
-          <a:lstStyle/>
-          <a:p>
-            <a:endParaRPr lang="en-GB"/>
-          </a:p>
-        </p:txBody>
       </p:sp>
       <p:sp>
         <p:nvSpPr>
@@ -3008,7 +3132,7 @@
           <a:bodyPr wrap="square" lIns="0" tIns="0" rIns="0" bIns="0" rtlCol="0" anchor="ctr"/>
           <a:lstStyle/>
           <a:p>
-            <a:pPr marL="0" indent="0" algn="ctr">
+            <a:pPr algn="ctr" indent="0" marL="0">
               <a:buNone/>
             </a:pPr>
             <a:r>
@@ -3047,7 +3171,7 @@
           <a:bodyPr wrap="square" lIns="0" tIns="0" rIns="0" bIns="0" rtlCol="0" anchor="ctr"/>
           <a:lstStyle/>
           <a:p>
-            <a:pPr marL="0" indent="0">
+            <a:pPr indent="0" marL="0">
               <a:buNone/>
             </a:pPr>
             <a:r>
@@ -3059,7 +3183,7 @@
                 <a:ea typeface="Cambria" pitchFamily="34" charset="-122"/>
                 <a:cs typeface="Cambria" pitchFamily="34" charset="-120"/>
               </a:rPr>
-              <a:t>The new repair rules</a:t>
+              <a:t>Price</a:t>
             </a:r>
             <a:endParaRPr lang="en-US" sz="1900" dirty="0"/>
           </a:p>
@@ -3074,7 +3198,7 @@
         <p:spPr>
           <a:xfrm>
             <a:off x="4627778" y="3035808"/>
-            <a:ext cx="2936138" cy="1417320"/>
+            <a:ext cx="2936138" cy="1005840"/>
           </a:xfrm>
           <a:prstGeom prst="rect">
             <a:avLst/>
@@ -3086,14 +3210,14 @@
           <a:bodyPr wrap="square" lIns="0" tIns="0" rIns="0" bIns="0" rtlCol="0" anchor="t"/>
           <a:lstStyle/>
           <a:p>
-            <a:pPr marL="0" indent="0">
+            <a:pPr indent="0" marL="0">
               <a:lnSpc>
-                <a:spcPts val="1700"/>
+                <a:spcPts val="1800"/>
               </a:lnSpc>
               <a:buNone/>
             </a:pPr>
             <a:r>
-              <a:rPr lang="en-US" sz="1200" dirty="0">
+              <a:rPr lang="en-US" sz="1250" dirty="0">
                 <a:solidFill>
                   <a:srgbClr val="33423D"/>
                 </a:solidFill>
@@ -3101,9 +3225,9 @@
                 <a:ea typeface="Calibri" pitchFamily="34" charset="-122"/>
                 <a:cs typeface="Calibri" pitchFamily="34" charset="-120"/>
               </a:rPr>
-              <a:t>From 1 April 2026, WHQS sets response times. Urgent hazards: 24 hours to investigate, 24 to fix. Everything else: 10 working days, then 5.</a:t>
-            </a:r>
-            <a:endParaRPr lang="en-US" sz="1200" dirty="0"/>
+              <a:t>Each job is costing more than we assumed.</a:t>
+            </a:r>
+            <a:endParaRPr lang="en-US" sz="1250" dirty="0"/>
           </a:p>
         </p:txBody>
       </p:sp>
@@ -3115,7 +3239,7 @@
         </p:nvSpPr>
         <p:spPr>
           <a:xfrm>
-            <a:off x="4627778" y="4498848"/>
+            <a:off x="4627778" y="3858768"/>
             <a:ext cx="2936138" cy="219456"/>
           </a:xfrm>
           <a:prstGeom prst="rect">
@@ -3128,11 +3252,11 @@
           <a:bodyPr wrap="square" lIns="0" tIns="0" rIns="0" bIns="0" rtlCol="0" anchor="ctr"/>
           <a:lstStyle/>
           <a:p>
-            <a:pPr marL="0" indent="0">
-              <a:buNone/>
-            </a:pPr>
-            <a:r>
-              <a:rPr lang="en-US" sz="900" b="1" kern="0" spc="180" dirty="0">
+            <a:pPr indent="0" marL="0">
+              <a:buNone/>
+            </a:pPr>
+            <a:r>
+              <a:rPr lang="en-US" sz="900" b="1" spc="180" kern="0" dirty="0">
                 <a:solidFill>
                   <a:srgbClr val="C8892F"/>
                 </a:solidFill>
@@ -3140,7 +3264,7 @@
                 <a:ea typeface="Calibri" pitchFamily="34" charset="-122"/>
                 <a:cs typeface="Calibri" pitchFamily="34" charset="-120"/>
               </a:rPr>
-              <a:t>WHAT I'D CHECK</a:t>
+              <a:t>WHAT I'D LOOK AT</a:t>
             </a:r>
             <a:endParaRPr lang="en-US" sz="900" dirty="0"/>
           </a:p>
@@ -3154,8 +3278,8 @@
         </p:nvSpPr>
         <p:spPr>
           <a:xfrm>
-            <a:off x="4627778" y="4736592"/>
-            <a:ext cx="2936138" cy="777240"/>
+            <a:off x="4627778" y="4114800"/>
+            <a:ext cx="2936138" cy="1005840"/>
           </a:xfrm>
           <a:prstGeom prst="rect">
             <a:avLst/>
@@ -3167,14 +3291,14 @@
           <a:bodyPr wrap="square" lIns="0" tIns="0" rIns="0" bIns="0" rtlCol="0" anchor="t"/>
           <a:lstStyle/>
           <a:p>
-            <a:pPr marL="0" indent="0">
+            <a:pPr indent="0" marL="0">
               <a:lnSpc>
                 <a:spcPts val="1600"/>
               </a:lnSpc>
               <a:buNone/>
             </a:pPr>
             <a:r>
-              <a:rPr lang="en-US" sz="1150" i="1" dirty="0">
+              <a:rPr lang="en-US" sz="1150" dirty="0">
                 <a:solidFill>
                   <a:srgbClr val="16211E"/>
                 </a:solidFill>
@@ -3182,7 +3306,7 @@
                 <a:ea typeface="Calibri" pitchFamily="34" charset="-122"/>
                 <a:cs typeface="Calibri" pitchFamily="34" charset="-120"/>
               </a:rPr>
-              <a:t>How much extra out-of-hours and emergency work has this created, and is it harder to plan jobs?</a:t>
+              <a:t>Cost per job on like-for-like work. Labour and material rates, and the split between in-house and contractor.</a:t>
             </a:r>
             <a:endParaRPr lang="en-US" sz="1150" dirty="0"/>
           </a:p>
@@ -3197,7 +3321,7 @@
         <p:spPr>
           <a:xfrm>
             <a:off x="8158277" y="1828800"/>
-            <a:ext cx="3484778" cy="3794760"/>
+            <a:ext cx="3484778" cy="3611880"/>
           </a:xfrm>
           <a:prstGeom prst="roundRect">
             <a:avLst>
@@ -3214,13 +3338,6 @@
             <a:prstDash val="solid"/>
           </a:ln>
         </p:spPr>
-        <p:txBody>
-          <a:bodyPr/>
-          <a:lstStyle/>
-          <a:p>
-            <a:endParaRPr lang="en-GB"/>
-          </a:p>
-        </p:txBody>
       </p:sp>
       <p:sp>
         <p:nvSpPr>
@@ -3241,13 +3358,6 @@
           </a:solidFill>
           <a:ln/>
         </p:spPr>
-        <p:txBody>
-          <a:bodyPr/>
-          <a:lstStyle/>
-          <a:p>
-            <a:endParaRPr lang="en-GB"/>
-          </a:p>
-        </p:txBody>
       </p:sp>
       <p:sp>
         <p:nvSpPr>
@@ -3270,7 +3380,7 @@
           <a:bodyPr wrap="square" lIns="0" tIns="0" rIns="0" bIns="0" rtlCol="0" anchor="ctr"/>
           <a:lstStyle/>
           <a:p>
-            <a:pPr marL="0" indent="0" algn="ctr">
+            <a:pPr algn="ctr" indent="0" marL="0">
               <a:buNone/>
             </a:pPr>
             <a:r>
@@ -3309,7 +3419,7 @@
           <a:bodyPr wrap="square" lIns="0" tIns="0" rIns="0" bIns="0" rtlCol="0" anchor="ctr"/>
           <a:lstStyle/>
           <a:p>
-            <a:pPr marL="0" indent="0">
+            <a:pPr indent="0" marL="0">
               <a:buNone/>
             </a:pPr>
             <a:r>
@@ -3321,7 +3431,7 @@
                 <a:ea typeface="Cambria" pitchFamily="34" charset="-122"/>
                 <a:cs typeface="Cambria" pitchFamily="34" charset="-120"/>
               </a:rPr>
-              <a:t>Costs going up</a:t>
+              <a:t>Mix</a:t>
             </a:r>
             <a:endParaRPr lang="en-US" sz="1900" dirty="0"/>
           </a:p>
@@ -3336,7 +3446,7 @@
         <p:spPr>
           <a:xfrm>
             <a:off x="8432597" y="3035808"/>
-            <a:ext cx="2936138" cy="1417320"/>
+            <a:ext cx="2936138" cy="1005840"/>
           </a:xfrm>
           <a:prstGeom prst="rect">
             <a:avLst/>
@@ -3348,14 +3458,14 @@
           <a:bodyPr wrap="square" lIns="0" tIns="0" rIns="0" bIns="0" rtlCol="0" anchor="t"/>
           <a:lstStyle/>
           <a:p>
-            <a:pPr marL="0" indent="0">
+            <a:pPr indent="0" marL="0">
               <a:lnSpc>
-                <a:spcPts val="1700"/>
+                <a:spcPts val="1800"/>
               </a:lnSpc>
               <a:buNone/>
             </a:pPr>
             <a:r>
-              <a:rPr lang="en-US" sz="1200" dirty="0">
+              <a:rPr lang="en-US" sz="1250" dirty="0">
                 <a:solidFill>
                   <a:srgbClr val="33423D"/>
                 </a:solidFill>
@@ -3363,9 +3473,9 @@
                 <a:ea typeface="Calibri" pitchFamily="34" charset="-122"/>
                 <a:cs typeface="Calibri" pitchFamily="34" charset="-120"/>
               </a:rPr>
-              <a:t>Repairs costs across the sector are expected to rise by about 23% this year. The regulator's published figures suggested nearer 10%.</a:t>
-            </a:r>
-            <a:endParaRPr lang="en-US" sz="1200" dirty="0"/>
+              <a:t>The work is different, or harder, than planned.</a:t>
+            </a:r>
+            <a:endParaRPr lang="en-US" sz="1250" dirty="0"/>
           </a:p>
         </p:txBody>
       </p:sp>
@@ -3377,7 +3487,7 @@
         </p:nvSpPr>
         <p:spPr>
           <a:xfrm>
-            <a:off x="8432597" y="4498848"/>
+            <a:off x="8432597" y="3858768"/>
             <a:ext cx="2936138" cy="219456"/>
           </a:xfrm>
           <a:prstGeom prst="rect">
@@ -3390,11 +3500,11 @@
           <a:bodyPr wrap="square" lIns="0" tIns="0" rIns="0" bIns="0" rtlCol="0" anchor="ctr"/>
           <a:lstStyle/>
           <a:p>
-            <a:pPr marL="0" indent="0">
-              <a:buNone/>
-            </a:pPr>
-            <a:r>
-              <a:rPr lang="en-US" sz="900" b="1" kern="0" spc="180" dirty="0">
+            <a:pPr indent="0" marL="0">
+              <a:buNone/>
+            </a:pPr>
+            <a:r>
+              <a:rPr lang="en-US" sz="900" b="1" spc="180" kern="0" dirty="0">
                 <a:solidFill>
                   <a:srgbClr val="C8892F"/>
                 </a:solidFill>
@@ -3402,7 +3512,7 @@
                 <a:ea typeface="Calibri" pitchFamily="34" charset="-122"/>
                 <a:cs typeface="Calibri" pitchFamily="34" charset="-120"/>
               </a:rPr>
-              <a:t>WHAT I'D CHECK</a:t>
+              <a:t>WHAT I'D LOOK AT</a:t>
             </a:r>
             <a:endParaRPr lang="en-US" sz="900" dirty="0"/>
           </a:p>
@@ -3416,8 +3526,8 @@
         </p:nvSpPr>
         <p:spPr>
           <a:xfrm>
-            <a:off x="8432597" y="4736592"/>
-            <a:ext cx="2936138" cy="777240"/>
+            <a:off x="8432597" y="4114800"/>
+            <a:ext cx="2936138" cy="1005840"/>
           </a:xfrm>
           <a:prstGeom prst="rect">
             <a:avLst/>
@@ -3429,14 +3539,14 @@
           <a:bodyPr wrap="square" lIns="0" tIns="0" rIns="0" bIns="0" rtlCol="0" anchor="t"/>
           <a:lstStyle/>
           <a:p>
-            <a:pPr marL="0" indent="0">
+            <a:pPr indent="0" marL="0">
               <a:lnSpc>
                 <a:spcPts val="1600"/>
               </a:lnSpc>
               <a:buNone/>
             </a:pPr>
             <a:r>
-              <a:rPr lang="en-US" sz="1150" i="1" dirty="0">
+              <a:rPr lang="en-US" sz="1150" dirty="0">
                 <a:solidFill>
                   <a:srgbClr val="16211E"/>
                 </a:solidFill>
@@ -3444,7 +3554,7 @@
                 <a:ea typeface="Calibri" pitchFamily="34" charset="-122"/>
                 <a:cs typeface="Calibri" pitchFamily="34" charset="-120"/>
               </a:rPr>
-              <a:t>For the same type of job, how much of our increase is price rather than more jobs?</a:t>
+              <a:t>Job types and complexity. Emergency against planned. Which properties or areas are driving it.</a:t>
             </a:r>
             <a:endParaRPr lang="en-US" sz="1150" dirty="0"/>
           </a:p>
@@ -3458,7 +3568,7 @@
         </p:nvSpPr>
         <p:spPr>
           <a:xfrm>
-            <a:off x="548640" y="5779008"/>
+            <a:off x="548640" y="5623560"/>
             <a:ext cx="11094415" cy="274320"/>
           </a:xfrm>
           <a:prstGeom prst="rect">
@@ -3471,11 +3581,11 @@
           <a:bodyPr wrap="square" lIns="0" tIns="0" rIns="0" bIns="0" rtlCol="0" anchor="ctr"/>
           <a:lstStyle/>
           <a:p>
-            <a:pPr marL="0" indent="0">
-              <a:buNone/>
-            </a:pPr>
-            <a:r>
-              <a:rPr lang="en-US" sz="950" i="1" dirty="0">
+            <a:pPr indent="0" marL="0">
+              <a:buNone/>
+            </a:pPr>
+            <a:r>
+              <a:rPr lang="en-US" sz="1100" i="1" dirty="0">
                 <a:solidFill>
                   <a:srgbClr val="6E7D78"/>
                 </a:solidFill>
@@ -3483,9 +3593,9 @@
                 <a:ea typeface="Calibri" pitchFamily="34" charset="-122"/>
                 <a:cs typeface="Calibri" pitchFamily="34" charset="-120"/>
               </a:rPr>
-              <a:t>Sources: Pobl announcements and tender notices; Welsh Government WHQS statement; UK-wide sector cost surveys.</a:t>
-            </a:r>
-            <a:endParaRPr lang="en-US" sz="950" dirty="0"/>
+              <a:t>Then I'd walk through real jobs with supervisors and planners, so the financial explanation matches what is happening on the ground.</a:t>
+            </a:r>
+            <a:endParaRPr lang="en-US" sz="1100" dirty="0"/>
           </a:p>
         </p:txBody>
       </p:sp>
@@ -3510,7 +3620,7 @@
           <a:bodyPr wrap="square" lIns="0" tIns="0" rIns="0" bIns="0" rtlCol="0" anchor="ctr"/>
           <a:lstStyle/>
           <a:p>
-            <a:pPr marL="0" indent="0" algn="l">
+            <a:pPr algn="l" indent="0" marL="0">
               <a:buNone/>
             </a:pPr>
             <a:r>
@@ -3549,7 +3659,7 @@
           <a:bodyPr wrap="square" lIns="0" tIns="0" rIns="0" bIns="0" rtlCol="0" anchor="ctr"/>
           <a:lstStyle/>
           <a:p>
-            <a:pPr marL="0" indent="0" algn="r">
+            <a:pPr algn="r" indent="0" marL="0">
               <a:buNone/>
             </a:pPr>
             <a:r>
@@ -3583,7 +3693,6 @@
         <a:solidFill>
           <a:srgbClr val="FFFFFF"/>
         </a:solidFill>
-        <a:effectLst/>
       </p:bgPr>
     </p:bg>
     <p:spTree>
@@ -3621,11 +3730,11 @@
           <a:bodyPr wrap="square" lIns="0" tIns="0" rIns="0" bIns="0" rtlCol="0" anchor="ctr"/>
           <a:lstStyle/>
           <a:p>
-            <a:pPr marL="0" indent="0">
-              <a:buNone/>
-            </a:pPr>
-            <a:r>
-              <a:rPr lang="en-US" sz="1000" b="1" kern="0" spc="220" dirty="0">
+            <a:pPr indent="0" marL="0">
+              <a:buNone/>
+            </a:pPr>
+            <a:r>
+              <a:rPr lang="en-US" sz="1000" b="1" spc="220" kern="0" dirty="0">
                 <a:solidFill>
                   <a:srgbClr val="C8892F"/>
                 </a:solidFill>
@@ -3660,7 +3769,7 @@
           <a:bodyPr wrap="square" lIns="0" tIns="0" rIns="0" bIns="0" rtlCol="0" anchor="ctr"/>
           <a:lstStyle/>
           <a:p>
-            <a:pPr marL="0" indent="0">
+            <a:pPr indent="0" marL="0">
               <a:buNone/>
             </a:pPr>
             <a:r>
@@ -3704,13 +3813,6 @@
             <a:prstDash val="solid"/>
           </a:ln>
         </p:spPr>
-        <p:txBody>
-          <a:bodyPr/>
-          <a:lstStyle/>
-          <a:p>
-            <a:endParaRPr lang="en-GB"/>
-          </a:p>
-        </p:txBody>
       </p:sp>
       <p:sp>
         <p:nvSpPr>
@@ -3733,7 +3835,7 @@
           <a:bodyPr wrap="square" lIns="0" tIns="0" rIns="0" bIns="0" rtlCol="0" anchor="ctr"/>
           <a:lstStyle/>
           <a:p>
-            <a:pPr marL="0" indent="0" algn="ctr">
+            <a:pPr algn="ctr" indent="0" marL="0">
               <a:buNone/>
             </a:pPr>
             <a:r>
@@ -3770,13 +3872,6 @@
           </a:solidFill>
           <a:ln/>
         </p:spPr>
-        <p:txBody>
-          <a:bodyPr/>
-          <a:lstStyle/>
-          <a:p>
-            <a:endParaRPr lang="en-GB"/>
-          </a:p>
-        </p:txBody>
       </p:sp>
       <p:sp>
         <p:nvSpPr>
@@ -3799,7 +3894,7 @@
           <a:bodyPr wrap="square" lIns="0" tIns="0" rIns="0" bIns="0" rtlCol="0" anchor="ctr"/>
           <a:lstStyle/>
           <a:p>
-            <a:pPr marL="0" indent="0" algn="ctr">
+            <a:pPr algn="ctr" indent="0" marL="0">
               <a:buNone/>
             </a:pPr>
             <a:r>
@@ -3838,7 +3933,7 @@
           <a:bodyPr wrap="square" lIns="0" tIns="0" rIns="0" bIns="0" rtlCol="0" anchor="ctr"/>
           <a:lstStyle/>
           <a:p>
-            <a:pPr marL="0" indent="0">
+            <a:pPr indent="0" marL="0">
               <a:buNone/>
             </a:pPr>
             <a:r>
@@ -3993,13 +4088,6 @@
           </a:solidFill>
           <a:ln/>
         </p:spPr>
-        <p:txBody>
-          <a:bodyPr/>
-          <a:lstStyle/>
-          <a:p>
-            <a:endParaRPr lang="en-GB"/>
-          </a:p>
-        </p:txBody>
       </p:sp>
       <p:sp>
         <p:nvSpPr>
@@ -4022,7 +4110,7 @@
           <a:bodyPr wrap="square" lIns="0" tIns="0" rIns="0" bIns="0" rtlCol="0" anchor="ctr"/>
           <a:lstStyle/>
           <a:p>
-            <a:pPr marL="0" indent="0" algn="ctr">
+            <a:pPr algn="ctr" indent="0" marL="0">
               <a:buNone/>
             </a:pPr>
             <a:r>
@@ -4061,7 +4149,7 @@
           <a:bodyPr wrap="square" lIns="0" tIns="0" rIns="0" bIns="0" rtlCol="0" anchor="ctr"/>
           <a:lstStyle/>
           <a:p>
-            <a:pPr marL="0" indent="0">
+            <a:pPr indent="0" marL="0">
               <a:buNone/>
             </a:pPr>
             <a:r>
@@ -4216,13 +4304,6 @@
           </a:solidFill>
           <a:ln/>
         </p:spPr>
-        <p:txBody>
-          <a:bodyPr/>
-          <a:lstStyle/>
-          <a:p>
-            <a:endParaRPr lang="en-GB"/>
-          </a:p>
-        </p:txBody>
       </p:sp>
       <p:sp>
         <p:nvSpPr>
@@ -4245,7 +4326,7 @@
           <a:bodyPr wrap="square" lIns="0" tIns="0" rIns="0" bIns="0" rtlCol="0" anchor="ctr"/>
           <a:lstStyle/>
           <a:p>
-            <a:pPr marL="0" indent="0" algn="ctr">
+            <a:pPr algn="ctr" indent="0" marL="0">
               <a:buNone/>
             </a:pPr>
             <a:r>
@@ -4284,7 +4365,7 @@
           <a:bodyPr wrap="square" lIns="0" tIns="0" rIns="0" bIns="0" rtlCol="0" anchor="ctr"/>
           <a:lstStyle/>
           <a:p>
-            <a:pPr marL="0" indent="0">
+            <a:pPr indent="0" marL="0">
               <a:buNone/>
             </a:pPr>
             <a:r>
@@ -4446,13 +4527,6 @@
             <a:prstDash val="solid"/>
           </a:ln>
         </p:spPr>
-        <p:txBody>
-          <a:bodyPr/>
-          <a:lstStyle/>
-          <a:p>
-            <a:endParaRPr lang="en-GB"/>
-          </a:p>
-        </p:txBody>
       </p:sp>
       <p:sp>
         <p:nvSpPr>
@@ -4475,7 +4549,7 @@
           <a:bodyPr wrap="square" lIns="0" tIns="0" rIns="0" bIns="0" rtlCol="0" anchor="ctr"/>
           <a:lstStyle/>
           <a:p>
-            <a:pPr marL="0" indent="0">
+            <a:pPr indent="0" marL="0">
               <a:lnSpc>
                 <a:spcPts val="1900"/>
               </a:lnSpc>
@@ -4490,8 +4564,14 @@
                 <a:ea typeface="Calibri" pitchFamily="34" charset="-122"/>
                 <a:cs typeface="Calibri" pitchFamily="34" charset="-120"/>
               </a:rPr>
-              <a:t>Show the delivery forecast before mitigation. </a:t>
-            </a:r>
+              <a:t>Show the forecast before mitigation. </a:t>
+            </a:r>
+            <a:pPr indent="0" marL="0">
+              <a:lnSpc>
+                <a:spcPts val="1900"/>
+              </a:lnSpc>
+              <a:buNone/>
+            </a:pPr>
             <a:r>
               <a:rPr lang="en-US" sz="1350" dirty="0">
                 <a:solidFill>
@@ -4501,7 +4581,7 @@
                 <a:ea typeface="Calibri" pitchFamily="34" charset="-122"/>
                 <a:cs typeface="Calibri" pitchFamily="34" charset="-120"/>
               </a:rPr>
-              <a:t>Only owned, time-phased, achievable actions come off it — everything else is listed as an opportunity. A savings target is not a forecast.</a:t>
+              <a:t>Only owned, dated, achievable actions come off it — everything else is listed as an opportunity. A savings target is not a forecast.</a:t>
             </a:r>
             <a:endParaRPr lang="en-US" sz="1350" dirty="0"/>
           </a:p>
@@ -4528,7 +4608,7 @@
           <a:bodyPr wrap="square" lIns="0" tIns="0" rIns="0" bIns="0" rtlCol="0" anchor="ctr"/>
           <a:lstStyle/>
           <a:p>
-            <a:pPr marL="0" indent="0" algn="l">
+            <a:pPr algn="l" indent="0" marL="0">
               <a:buNone/>
             </a:pPr>
             <a:r>
@@ -4567,7 +4647,7 @@
           <a:bodyPr wrap="square" lIns="0" tIns="0" rIns="0" bIns="0" rtlCol="0" anchor="ctr"/>
           <a:lstStyle/>
           <a:p>
-            <a:pPr marL="0" indent="0" algn="r">
+            <a:pPr algn="r" indent="0" marL="0">
               <a:buNone/>
             </a:pPr>
             <a:r>
@@ -4601,7 +4681,6 @@
         <a:solidFill>
           <a:srgbClr val="FFFFFF"/>
         </a:solidFill>
-        <a:effectLst/>
       </p:bgPr>
     </p:bg>
     <p:spTree>
@@ -4639,11 +4718,11 @@
           <a:bodyPr wrap="square" lIns="0" tIns="0" rIns="0" bIns="0" rtlCol="0" anchor="ctr"/>
           <a:lstStyle/>
           <a:p>
-            <a:pPr marL="0" indent="0">
-              <a:buNone/>
-            </a:pPr>
-            <a:r>
-              <a:rPr lang="en-US" sz="1000" b="1" kern="0" spc="220" dirty="0">
+            <a:pPr indent="0" marL="0">
+              <a:buNone/>
+            </a:pPr>
+            <a:r>
+              <a:rPr lang="en-US" sz="1000" b="1" spc="220" kern="0" dirty="0">
                 <a:solidFill>
                   <a:srgbClr val="C8892F"/>
                 </a:solidFill>
@@ -4678,7 +4757,7 @@
           <a:bodyPr wrap="square" lIns="0" tIns="0" rIns="0" bIns="0" rtlCol="0" anchor="ctr"/>
           <a:lstStyle/>
           <a:p>
-            <a:pPr marL="0" indent="0">
+            <a:pPr indent="0" marL="0">
               <a:buNone/>
             </a:pPr>
             <a:r>
@@ -4715,13 +4794,6 @@
           </a:solidFill>
           <a:ln/>
         </p:spPr>
-        <p:txBody>
-          <a:bodyPr/>
-          <a:lstStyle/>
-          <a:p>
-            <a:endParaRPr lang="en-GB"/>
-          </a:p>
-        </p:txBody>
       </p:sp>
       <p:sp>
         <p:nvSpPr>
@@ -4744,7 +4816,7 @@
           <a:bodyPr wrap="square" lIns="0" tIns="0" rIns="0" bIns="0" rtlCol="0" anchor="ctr"/>
           <a:lstStyle/>
           <a:p>
-            <a:pPr marL="0" indent="0" algn="ctr">
+            <a:pPr algn="ctr" indent="0" marL="0">
               <a:buNone/>
             </a:pPr>
             <a:r>
@@ -4771,19 +4843,19 @@
         <p:spPr>
           <a:xfrm>
             <a:off x="1115568" y="1645920"/>
-            <a:ext cx="3200400" cy="310896"/>
-          </a:xfrm>
-          <a:prstGeom prst="rect">
-            <a:avLst/>
-          </a:prstGeom>
-          <a:noFill/>
-          <a:ln/>
-        </p:spPr>
-        <p:txBody>
-          <a:bodyPr wrap="square" lIns="0" tIns="0" rIns="0" bIns="0" rtlCol="0" anchor="ctr"/>
-          <a:lstStyle/>
-          <a:p>
-            <a:pPr marL="0" indent="0">
+            <a:ext cx="3291840" cy="310896"/>
+          </a:xfrm>
+          <a:prstGeom prst="rect">
+            <a:avLst/>
+          </a:prstGeom>
+          <a:noFill/>
+          <a:ln/>
+        </p:spPr>
+        <p:txBody>
+          <a:bodyPr wrap="square" lIns="0" tIns="0" rIns="0" bIns="0" rtlCol="0" anchor="ctr"/>
+          <a:lstStyle/>
+          <a:p>
+            <a:pPr indent="0" marL="0">
               <a:buNone/>
             </a:pPr>
             <a:r>
@@ -4810,19 +4882,19 @@
         <p:spPr>
           <a:xfrm>
             <a:off x="1115568" y="1993392"/>
-            <a:ext cx="5029200" cy="384048"/>
-          </a:xfrm>
-          <a:prstGeom prst="rect">
-            <a:avLst/>
-          </a:prstGeom>
-          <a:noFill/>
-          <a:ln/>
-        </p:spPr>
-        <p:txBody>
-          <a:bodyPr wrap="square" lIns="0" tIns="0" rIns="0" bIns="0" rtlCol="0" anchor="ctr"/>
-          <a:lstStyle/>
-          <a:p>
-            <a:pPr marL="0" indent="0">
+            <a:ext cx="5120640" cy="384048"/>
+          </a:xfrm>
+          <a:prstGeom prst="rect">
+            <a:avLst/>
+          </a:prstGeom>
+          <a:noFill/>
+          <a:ln/>
+        </p:spPr>
+        <p:txBody>
+          <a:bodyPr wrap="square" lIns="0" tIns="0" rIns="0" bIns="0" rtlCol="0" anchor="t"/>
+          <a:lstStyle/>
+          <a:p>
+            <a:pPr indent="0" marL="0">
               <a:buNone/>
             </a:pPr>
             <a:r>
@@ -4834,7 +4906,7 @@
                 <a:ea typeface="Calibri" pitchFamily="34" charset="-122"/>
                 <a:cs typeface="Calibri" pitchFamily="34" charset="-120"/>
               </a:rPr>
-              <a:t>Safety, compliance and WHQS hazard response times.</a:t>
+              <a:t>Safety, compliance and statutory response times.</a:t>
             </a:r>
             <a:endParaRPr lang="en-US" sz="1200" dirty="0"/>
           </a:p>
@@ -4858,10 +4930,10 @@
           <a:ln/>
         </p:spPr>
         <p:txBody>
-          <a:bodyPr wrap="square" lIns="0" tIns="0" rIns="0" bIns="0" rtlCol="0" anchor="ctr"/>
-          <a:lstStyle/>
-          <a:p>
-            <a:pPr marL="0" indent="0">
+          <a:bodyPr wrap="square" lIns="0" tIns="0" rIns="0" bIns="0" rtlCol="0" anchor="t"/>
+          <a:lstStyle/>
+          <a:p>
+            <a:pPr indent="0" marL="0">
               <a:buNone/>
             </a:pPr>
             <a:r>
@@ -4873,7 +4945,7 @@
                 <a:ea typeface="Calibri" pitchFamily="34" charset="-122"/>
                 <a:cs typeface="Calibri" pitchFamily="34" charset="-120"/>
               </a:rPr>
-              <a:t>Now published and reported. Not a place to save.</a:t>
+              <a:t>Not a place to look for savings.</a:t>
             </a:r>
             <a:endParaRPr lang="en-US" sz="1200" dirty="0"/>
           </a:p>
@@ -4898,13 +4970,6 @@
           </a:solidFill>
           <a:ln/>
         </p:spPr>
-        <p:txBody>
-          <a:bodyPr/>
-          <a:lstStyle/>
-          <a:p>
-            <a:endParaRPr lang="en-GB"/>
-          </a:p>
-        </p:txBody>
       </p:sp>
       <p:sp>
         <p:nvSpPr>
@@ -4927,7 +4992,7 @@
           <a:bodyPr wrap="square" lIns="0" tIns="0" rIns="0" bIns="0" rtlCol="0" anchor="ctr"/>
           <a:lstStyle/>
           <a:p>
-            <a:pPr marL="0" indent="0" algn="ctr">
+            <a:pPr algn="ctr" indent="0" marL="0">
               <a:buNone/>
             </a:pPr>
             <a:r>
@@ -4954,19 +5019,19 @@
         <p:spPr>
           <a:xfrm>
             <a:off x="1115568" y="2578608"/>
-            <a:ext cx="3200400" cy="310896"/>
-          </a:xfrm>
-          <a:prstGeom prst="rect">
-            <a:avLst/>
-          </a:prstGeom>
-          <a:noFill/>
-          <a:ln/>
-        </p:spPr>
-        <p:txBody>
-          <a:bodyPr wrap="square" lIns="0" tIns="0" rIns="0" bIns="0" rtlCol="0" anchor="ctr"/>
-          <a:lstStyle/>
-          <a:p>
-            <a:pPr marL="0" indent="0">
+            <a:ext cx="3291840" cy="310896"/>
+          </a:xfrm>
+          <a:prstGeom prst="rect">
+            <a:avLst/>
+          </a:prstGeom>
+          <a:noFill/>
+          <a:ln/>
+        </p:spPr>
+        <p:txBody>
+          <a:bodyPr wrap="square" lIns="0" tIns="0" rIns="0" bIns="0" rtlCol="0" anchor="ctr"/>
+          <a:lstStyle/>
+          <a:p>
+            <a:pPr indent="0" marL="0">
               <a:buNone/>
             </a:pPr>
             <a:r>
@@ -4978,7 +5043,7 @@
                 <a:ea typeface="Cambria" pitchFamily="34" charset="-122"/>
                 <a:cs typeface="Cambria" pitchFamily="34" charset="-120"/>
               </a:rPr>
-              <a:t>Convert existing capacity</a:t>
+              <a:t>Use the capacity we have</a:t>
             </a:r>
             <a:endParaRPr lang="en-US" sz="1700" dirty="0"/>
           </a:p>
@@ -4993,19 +5058,19 @@
         <p:spPr>
           <a:xfrm>
             <a:off x="1115568" y="2926080"/>
-            <a:ext cx="5029200" cy="384048"/>
-          </a:xfrm>
-          <a:prstGeom prst="rect">
-            <a:avLst/>
-          </a:prstGeom>
-          <a:noFill/>
-          <a:ln/>
-        </p:spPr>
-        <p:txBody>
-          <a:bodyPr wrap="square" lIns="0" tIns="0" rIns="0" bIns="0" rtlCol="0" anchor="ctr"/>
-          <a:lstStyle/>
-          <a:p>
-            <a:pPr marL="0" indent="0">
+            <a:ext cx="5120640" cy="384048"/>
+          </a:xfrm>
+          <a:prstGeom prst="rect">
+            <a:avLst/>
+          </a:prstGeom>
+          <a:noFill/>
+          <a:ln/>
+        </p:spPr>
+        <p:txBody>
+          <a:bodyPr wrap="square" lIns="0" tIns="0" rIns="0" bIns="0" rtlCol="0" anchor="t"/>
+          <a:lstStyle/>
+          <a:p>
+            <a:pPr indent="0" marL="0">
               <a:buNone/>
             </a:pPr>
             <a:r>
@@ -5017,7 +5082,7 @@
                 <a:ea typeface="Calibri" pitchFamily="34" charset="-122"/>
                 <a:cs typeface="Calibri" pitchFamily="34" charset="-120"/>
               </a:rPr>
-              <a:t>Productivity, first-time fix and scheduling density across the in-house team.</a:t>
+              <a:t>Productivity, first-time fix and scheduling across the in-house team.</a:t>
             </a:r>
             <a:endParaRPr lang="en-US" sz="1200" dirty="0"/>
           </a:p>
@@ -5041,10 +5106,10 @@
           <a:ln/>
         </p:spPr>
         <p:txBody>
-          <a:bodyPr wrap="square" lIns="0" tIns="0" rIns="0" bIns="0" rtlCol="0" anchor="ctr"/>
-          <a:lstStyle/>
-          <a:p>
-            <a:pPr marL="0" indent="0">
+          <a:bodyPr wrap="square" lIns="0" tIns="0" rIns="0" bIns="0" rtlCol="0" anchor="t"/>
+          <a:lstStyle/>
+          <a:p>
+            <a:pPr indent="0" marL="0">
               <a:buNone/>
             </a:pPr>
             <a:r>
@@ -5056,7 +5121,7 @@
                 <a:ea typeface="Calibri" pitchFamily="34" charset="-122"/>
                 <a:cs typeface="Calibri" pitchFamily="34" charset="-120"/>
               </a:rPr>
-              <a:t>The cheapest saving is the one you have already paid for.</a:t>
+              <a:t>The cheapest saving is one you have already paid for.</a:t>
             </a:r>
             <a:endParaRPr lang="en-US" sz="1200" dirty="0"/>
           </a:p>
@@ -5081,13 +5146,6 @@
           </a:solidFill>
           <a:ln/>
         </p:spPr>
-        <p:txBody>
-          <a:bodyPr/>
-          <a:lstStyle/>
-          <a:p>
-            <a:endParaRPr lang="en-GB"/>
-          </a:p>
-        </p:txBody>
       </p:sp>
       <p:sp>
         <p:nvSpPr>
@@ -5110,7 +5168,7 @@
           <a:bodyPr wrap="square" lIns="0" tIns="0" rIns="0" bIns="0" rtlCol="0" anchor="ctr"/>
           <a:lstStyle/>
           <a:p>
-            <a:pPr marL="0" indent="0" algn="ctr">
+            <a:pPr algn="ctr" indent="0" marL="0">
               <a:buNone/>
             </a:pPr>
             <a:r>
@@ -5137,19 +5195,19 @@
         <p:spPr>
           <a:xfrm>
             <a:off x="1115568" y="3511296"/>
-            <a:ext cx="3200400" cy="310896"/>
-          </a:xfrm>
-          <a:prstGeom prst="rect">
-            <a:avLst/>
-          </a:prstGeom>
-          <a:noFill/>
-          <a:ln/>
-        </p:spPr>
-        <p:txBody>
-          <a:bodyPr wrap="square" lIns="0" tIns="0" rIns="0" bIns="0" rtlCol="0" anchor="ctr"/>
-          <a:lstStyle/>
-          <a:p>
-            <a:pPr marL="0" indent="0">
+            <a:ext cx="3291840" cy="310896"/>
+          </a:xfrm>
+          <a:prstGeom prst="rect">
+            <a:avLst/>
+          </a:prstGeom>
+          <a:noFill/>
+          <a:ln/>
+        </p:spPr>
+        <p:txBody>
+          <a:bodyPr wrap="square" lIns="0" tIns="0" rIns="0" bIns="0" rtlCol="0" anchor="ctr"/>
+          <a:lstStyle/>
+          <a:p>
+            <a:pPr indent="0" marL="0">
               <a:buNone/>
             </a:pPr>
             <a:r>
@@ -5176,19 +5234,19 @@
         <p:spPr>
           <a:xfrm>
             <a:off x="1115568" y="3858768"/>
-            <a:ext cx="5029200" cy="384048"/>
-          </a:xfrm>
-          <a:prstGeom prst="rect">
-            <a:avLst/>
-          </a:prstGeom>
-          <a:noFill/>
-          <a:ln/>
-        </p:spPr>
-        <p:txBody>
-          <a:bodyPr wrap="square" lIns="0" tIns="0" rIns="0" bIns="0" rtlCol="0" anchor="ctr"/>
-          <a:lstStyle/>
-          <a:p>
-            <a:pPr marL="0" indent="0">
+            <a:ext cx="5120640" cy="384048"/>
+          </a:xfrm>
+          <a:prstGeom prst="rect">
+            <a:avLst/>
+          </a:prstGeom>
+          <a:noFill/>
+          <a:ln/>
+        </p:spPr>
+        <p:txBody>
+          <a:bodyPr wrap="square" lIns="0" tIns="0" rIns="0" bIns="0" rtlCol="0" anchor="t"/>
+          <a:lstStyle/>
+          <a:p>
+            <a:pPr indent="0" marL="0">
               <a:buNone/>
             </a:pPr>
             <a:r>
@@ -5200,7 +5258,7 @@
                 <a:ea typeface="Calibri" pitchFamily="34" charset="-122"/>
                 <a:cs typeface="Calibri" pitchFamily="34" charset="-120"/>
               </a:rPr>
-              <a:t>Call-off discipline, variation validation, rates tested on like-for-like work.</a:t>
+              <a:t>Call-off discipline, checking variations, rates on like-for-like work.</a:t>
             </a:r>
             <a:endParaRPr lang="en-US" sz="1200" dirty="0"/>
           </a:p>
@@ -5224,10 +5282,10 @@
           <a:ln/>
         </p:spPr>
         <p:txBody>
-          <a:bodyPr wrap="square" lIns="0" tIns="0" rIns="0" bIns="0" rtlCol="0" anchor="ctr"/>
-          <a:lstStyle/>
-          <a:p>
-            <a:pPr marL="0" indent="0">
+          <a:bodyPr wrap="square" lIns="0" tIns="0" rIns="0" bIns="0" rtlCol="0" anchor="t"/>
+          <a:lstStyle/>
+          <a:p>
+            <a:pPr indent="0" marL="0">
               <a:buNone/>
             </a:pPr>
             <a:r>
@@ -5239,7 +5297,7 @@
                 <a:ea typeface="Calibri" pitchFamily="34" charset="-122"/>
                 <a:cs typeface="Calibri" pitchFamily="34" charset="-120"/>
               </a:rPr>
-              <a:t>Only counts if it reduces paid hours or contractor spend.</a:t>
+              <a:t>Only counts if it reduces hours or contractor spend.</a:t>
             </a:r>
             <a:endParaRPr lang="en-US" sz="1200" dirty="0"/>
           </a:p>
@@ -5264,13 +5322,6 @@
           </a:solidFill>
           <a:ln/>
         </p:spPr>
-        <p:txBody>
-          <a:bodyPr/>
-          <a:lstStyle/>
-          <a:p>
-            <a:endParaRPr lang="en-GB"/>
-          </a:p>
-        </p:txBody>
       </p:sp>
       <p:sp>
         <p:nvSpPr>
@@ -5293,7 +5344,7 @@
           <a:bodyPr wrap="square" lIns="0" tIns="0" rIns="0" bIns="0" rtlCol="0" anchor="ctr"/>
           <a:lstStyle/>
           <a:p>
-            <a:pPr marL="0" indent="0" algn="ctr">
+            <a:pPr algn="ctr" indent="0" marL="0">
               <a:buNone/>
             </a:pPr>
             <a:r>
@@ -5320,19 +5371,19 @@
         <p:spPr>
           <a:xfrm>
             <a:off x="1115568" y="4443984"/>
-            <a:ext cx="3200400" cy="310896"/>
-          </a:xfrm>
-          <a:prstGeom prst="rect">
-            <a:avLst/>
-          </a:prstGeom>
-          <a:noFill/>
-          <a:ln/>
-        </p:spPr>
-        <p:txBody>
-          <a:bodyPr wrap="square" lIns="0" tIns="0" rIns="0" bIns="0" rtlCol="0" anchor="ctr"/>
-          <a:lstStyle/>
-          <a:p>
-            <a:pPr marL="0" indent="0">
+            <a:ext cx="3291840" cy="310896"/>
+          </a:xfrm>
+          <a:prstGeom prst="rect">
+            <a:avLst/>
+          </a:prstGeom>
+          <a:noFill/>
+          <a:ln/>
+        </p:spPr>
+        <p:txBody>
+          <a:bodyPr wrap="square" lIns="0" tIns="0" rIns="0" bIns="0" rtlCol="0" anchor="ctr"/>
+          <a:lstStyle/>
+          <a:p>
+            <a:pPr indent="0" marL="0">
               <a:buNone/>
             </a:pPr>
             <a:r>
@@ -5359,19 +5410,19 @@
         <p:spPr>
           <a:xfrm>
             <a:off x="1115568" y="4791456"/>
-            <a:ext cx="5029200" cy="384048"/>
-          </a:xfrm>
-          <a:prstGeom prst="rect">
-            <a:avLst/>
-          </a:prstGeom>
-          <a:noFill/>
-          <a:ln/>
-        </p:spPr>
-        <p:txBody>
-          <a:bodyPr wrap="square" lIns="0" tIns="0" rIns="0" bIns="0" rtlCol="0" anchor="ctr"/>
-          <a:lstStyle/>
-          <a:p>
-            <a:pPr marL="0" indent="0">
+            <a:ext cx="5120640" cy="384048"/>
+          </a:xfrm>
+          <a:prstGeom prst="rect">
+            <a:avLst/>
+          </a:prstGeom>
+          <a:noFill/>
+          <a:ln/>
+        </p:spPr>
+        <p:txBody>
+          <a:bodyPr wrap="square" lIns="0" tIns="0" rIns="0" bIns="0" rtlCol="0" anchor="t"/>
+          <a:lstStyle/>
+          <a:p>
+            <a:pPr indent="0" marL="0">
               <a:buNone/>
             </a:pPr>
             <a:r>
@@ -5407,10 +5458,10 @@
           <a:ln/>
         </p:spPr>
         <p:txBody>
-          <a:bodyPr wrap="square" lIns="0" tIns="0" rIns="0" bIns="0" rtlCol="0" anchor="ctr"/>
-          <a:lstStyle/>
-          <a:p>
-            <a:pPr marL="0" indent="0">
+          <a:bodyPr wrap="square" lIns="0" tIns="0" rIns="0" bIns="0" rtlCol="0" anchor="t"/>
+          <a:lstStyle/>
+          <a:p>
+            <a:pPr indent="0" marL="0">
               <a:buNone/>
             </a:pPr>
             <a:r>
@@ -5454,13 +5505,6 @@
             <a:prstDash val="solid"/>
           </a:ln>
         </p:spPr>
-        <p:txBody>
-          <a:bodyPr/>
-          <a:lstStyle/>
-          <a:p>
-            <a:endParaRPr lang="en-GB"/>
-          </a:p>
-        </p:txBody>
       </p:sp>
       <p:sp>
         <p:nvSpPr>
@@ -5483,7 +5527,7 @@
           <a:bodyPr wrap="square" lIns="0" tIns="0" rIns="0" bIns="0" rtlCol="0" anchor="ctr"/>
           <a:lstStyle/>
           <a:p>
-            <a:pPr marL="0" indent="0">
+            <a:pPr indent="0" marL="0">
               <a:lnSpc>
                 <a:spcPts val="1800"/>
               </a:lnSpc>
@@ -5498,8 +5542,14 @@
                 <a:ea typeface="Calibri" pitchFamily="34" charset="-122"/>
                 <a:cs typeface="Calibri" pitchFamily="34" charset="-120"/>
               </a:rPr>
-              <a:t>Watch the second-order effect.  </a:t>
-            </a:r>
+              <a:t>Watch the knock-on effect.  </a:t>
+            </a:r>
+            <a:pPr indent="0" marL="0">
+              <a:lnSpc>
+                <a:spcPts val="1800"/>
+              </a:lnSpc>
+              <a:buNone/>
+            </a:pPr>
             <a:r>
               <a:rPr lang="en-US" sz="1300" dirty="0">
                 <a:solidFill>
@@ -5509,7 +5559,7 @@
                 <a:ea typeface="Calibri" pitchFamily="34" charset="-122"/>
                 <a:cs typeface="Calibri" pitchFamily="34" charset="-120"/>
               </a:rPr>
-              <a:t>Deferring planned work usually raises responsive cost later and shifts capitalised spend into revenue — that hits operating surplus, not just timing.</a:t>
+              <a:t>Deferring planned work usually pushes up responsive costs later, and moves spend that would have been capital into revenue — that hits the surplus, not just the timing.</a:t>
             </a:r>
             <a:endParaRPr lang="en-US" sz="1300" dirty="0"/>
           </a:p>
@@ -5536,7 +5586,7 @@
           <a:bodyPr wrap="square" lIns="0" tIns="0" rIns="0" bIns="0" rtlCol="0" anchor="ctr"/>
           <a:lstStyle/>
           <a:p>
-            <a:pPr marL="0" indent="0" algn="l">
+            <a:pPr algn="l" indent="0" marL="0">
               <a:buNone/>
             </a:pPr>
             <a:r>
@@ -5575,7 +5625,7 @@
           <a:bodyPr wrap="square" lIns="0" tIns="0" rIns="0" bIns="0" rtlCol="0" anchor="ctr"/>
           <a:lstStyle/>
           <a:p>
-            <a:pPr marL="0" indent="0" algn="r">
+            <a:pPr algn="r" indent="0" marL="0">
               <a:buNone/>
             </a:pPr>
             <a:r>
@@ -5609,7 +5659,6 @@
         <a:solidFill>
           <a:srgbClr val="FFFFFF"/>
         </a:solidFill>
-        <a:effectLst/>
       </p:bgPr>
     </p:bg>
     <p:spTree>
@@ -5647,11 +5696,11 @@
           <a:bodyPr wrap="square" lIns="0" tIns="0" rIns="0" bIns="0" rtlCol="0" anchor="ctr"/>
           <a:lstStyle/>
           <a:p>
-            <a:pPr marL="0" indent="0">
-              <a:buNone/>
-            </a:pPr>
-            <a:r>
-              <a:rPr lang="en-US" sz="1000" b="1" kern="0" spc="220" dirty="0">
+            <a:pPr indent="0" marL="0">
+              <a:buNone/>
+            </a:pPr>
+            <a:r>
+              <a:rPr lang="en-US" sz="1000" b="1" spc="220" kern="0" dirty="0">
                 <a:solidFill>
                   <a:srgbClr val="C8892F"/>
                 </a:solidFill>
@@ -5686,7 +5735,7 @@
           <a:bodyPr wrap="square" lIns="0" tIns="0" rIns="0" bIns="0" rtlCol="0" anchor="ctr"/>
           <a:lstStyle/>
           <a:p>
-            <a:pPr marL="0" indent="0">
+            <a:pPr indent="0" marL="0">
               <a:buNone/>
             </a:pPr>
             <a:r>
@@ -5698,7 +5747,7 @@
                 <a:ea typeface="Cambria" pitchFamily="34" charset="-122"/>
                 <a:cs typeface="Cambria" pitchFamily="34" charset="-120"/>
               </a:rPr>
-              <a:t>Escalate early, in balance-sheet terms</a:t>
+              <a:t>Escalate early, and in the right terms</a:t>
             </a:r>
             <a:endParaRPr lang="en-US" sz="3000" dirty="0"/>
           </a:p>
@@ -5730,13 +5779,6 @@
             <a:prstDash val="solid"/>
           </a:ln>
         </p:spPr>
-        <p:txBody>
-          <a:bodyPr/>
-          <a:lstStyle/>
-          <a:p>
-            <a:endParaRPr lang="en-GB"/>
-          </a:p>
-        </p:txBody>
       </p:sp>
       <p:sp>
         <p:nvSpPr>
@@ -5759,7 +5801,7 @@
           <a:bodyPr wrap="square" lIns="0" tIns="0" rIns="0" bIns="0" rtlCol="0" anchor="ctr"/>
           <a:lstStyle/>
           <a:p>
-            <a:pPr marL="0" indent="0" algn="ctr">
+            <a:pPr algn="ctr" indent="0" marL="0">
               <a:lnSpc>
                 <a:spcPts val="1700"/>
               </a:lnSpc>
@@ -5779,7 +5821,7 @@
             <a:endParaRPr lang="en-US" sz="1350" dirty="0"/>
           </a:p>
           <a:p>
-            <a:pPr marL="0" indent="0" algn="ctr">
+            <a:pPr algn="ctr" indent="0" marL="0">
               <a:lnSpc>
                 <a:spcPts val="1700"/>
               </a:lnSpc>
@@ -5821,7 +5863,7 @@
           <a:bodyPr wrap="square" lIns="0" tIns="0" rIns="0" bIns="0" rtlCol="0" anchor="ctr"/>
           <a:lstStyle/>
           <a:p>
-            <a:pPr marL="0" indent="0" algn="ctr">
+            <a:pPr algn="ctr" indent="0" marL="0">
               <a:buNone/>
             </a:pPr>
             <a:r>
@@ -5865,13 +5907,6 @@
             <a:prstDash val="solid"/>
           </a:ln>
         </p:spPr>
-        <p:txBody>
-          <a:bodyPr/>
-          <a:lstStyle/>
-          <a:p>
-            <a:endParaRPr lang="en-GB"/>
-          </a:p>
-        </p:txBody>
       </p:sp>
       <p:sp>
         <p:nvSpPr>
@@ -5894,7 +5929,7 @@
           <a:bodyPr wrap="square" lIns="0" tIns="0" rIns="0" bIns="0" rtlCol="0" anchor="ctr"/>
           <a:lstStyle/>
           <a:p>
-            <a:pPr marL="0" indent="0" algn="ctr">
+            <a:pPr algn="ctr" indent="0" marL="0">
               <a:lnSpc>
                 <a:spcPts val="1700"/>
               </a:lnSpc>
@@ -5909,12 +5944,12 @@
                 <a:ea typeface="Calibri" pitchFamily="34" charset="-122"/>
                 <a:cs typeface="Calibri" pitchFamily="34" charset="-120"/>
               </a:rPr>
-              <a:t>Delivery</a:t>
+              <a:t>Latest</a:t>
             </a:r>
             <a:endParaRPr lang="en-US" sz="1350" dirty="0"/>
           </a:p>
           <a:p>
-            <a:pPr marL="0" indent="0" algn="ctr">
+            <a:pPr algn="ctr" indent="0" marL="0">
               <a:lnSpc>
                 <a:spcPts val="1700"/>
               </a:lnSpc>
@@ -5956,7 +5991,7 @@
           <a:bodyPr wrap="square" lIns="0" tIns="0" rIns="0" bIns="0" rtlCol="0" anchor="ctr"/>
           <a:lstStyle/>
           <a:p>
-            <a:pPr marL="0" indent="0" algn="ctr">
+            <a:pPr algn="ctr" indent="0" marL="0">
               <a:buNone/>
             </a:pPr>
             <a:r>
@@ -6000,13 +6035,6 @@
             <a:prstDash val="solid"/>
           </a:ln>
         </p:spPr>
-        <p:txBody>
-          <a:bodyPr/>
-          <a:lstStyle/>
-          <a:p>
-            <a:endParaRPr lang="en-GB"/>
-          </a:p>
-        </p:txBody>
       </p:sp>
       <p:sp>
         <p:nvSpPr>
@@ -6029,7 +6057,7 @@
           <a:bodyPr wrap="square" lIns="0" tIns="0" rIns="0" bIns="0" rtlCol="0" anchor="ctr"/>
           <a:lstStyle/>
           <a:p>
-            <a:pPr marL="0" indent="0" algn="ctr">
+            <a:pPr algn="ctr" indent="0" marL="0">
               <a:lnSpc>
                 <a:spcPts val="1700"/>
               </a:lnSpc>
@@ -6044,12 +6072,12 @@
                 <a:ea typeface="Calibri" pitchFamily="34" charset="-122"/>
                 <a:cs typeface="Calibri" pitchFamily="34" charset="-120"/>
               </a:rPr>
-              <a:t>Owned</a:t>
+              <a:t>Agreed</a:t>
             </a:r>
             <a:endParaRPr lang="en-US" sz="1350" dirty="0"/>
           </a:p>
           <a:p>
-            <a:pPr marL="0" indent="0" algn="ctr">
+            <a:pPr algn="ctr" indent="0" marL="0">
               <a:lnSpc>
                 <a:spcPts val="1700"/>
               </a:lnSpc>
@@ -6091,7 +6119,7 @@
           <a:bodyPr wrap="square" lIns="0" tIns="0" rIns="0" bIns="0" rtlCol="0" anchor="ctr"/>
           <a:lstStyle/>
           <a:p>
-            <a:pPr marL="0" indent="0" algn="ctr">
+            <a:pPr algn="ctr" indent="0" marL="0">
               <a:buNone/>
             </a:pPr>
             <a:r>
@@ -6135,13 +6163,6 @@
             <a:prstDash val="solid"/>
           </a:ln>
         </p:spPr>
-        <p:txBody>
-          <a:bodyPr/>
-          <a:lstStyle/>
-          <a:p>
-            <a:endParaRPr lang="en-GB"/>
-          </a:p>
-        </p:txBody>
       </p:sp>
       <p:sp>
         <p:nvSpPr>
@@ -6164,7 +6185,7 @@
           <a:bodyPr wrap="square" lIns="0" tIns="0" rIns="0" bIns="0" rtlCol="0" anchor="ctr"/>
           <a:lstStyle/>
           <a:p>
-            <a:pPr marL="0" indent="0" algn="ctr">
+            <a:pPr algn="ctr" indent="0" marL="0">
               <a:lnSpc>
                 <a:spcPts val="1700"/>
               </a:lnSpc>
@@ -6179,12 +6200,12 @@
                 <a:ea typeface="Calibri" pitchFamily="34" charset="-122"/>
                 <a:cs typeface="Calibri" pitchFamily="34" charset="-120"/>
               </a:rPr>
-              <a:t>Residual gap</a:t>
+              <a:t>Gap that</a:t>
             </a:r>
             <a:endParaRPr lang="en-US" sz="1350" dirty="0"/>
           </a:p>
           <a:p>
-            <a:pPr marL="0" indent="0" algn="ctr">
+            <a:pPr algn="ctr" indent="0" marL="0">
               <a:lnSpc>
                 <a:spcPts val="1700"/>
               </a:lnSpc>
@@ -6199,7 +6220,7 @@
                 <a:ea typeface="Calibri" pitchFamily="34" charset="-122"/>
                 <a:cs typeface="Calibri" pitchFamily="34" charset="-120"/>
               </a:rPr>
-              <a:t>+ downside</a:t>
+              <a:t>remains</a:t>
             </a:r>
             <a:endParaRPr lang="en-US" sz="1350" dirty="0"/>
           </a:p>
@@ -6226,7 +6247,7 @@
           <a:bodyPr wrap="square" lIns="0" tIns="0" rIns="0" bIns="0" rtlCol="0" anchor="ctr"/>
           <a:lstStyle/>
           <a:p>
-            <a:pPr marL="0" indent="0">
+            <a:pPr indent="0" marL="0">
               <a:buNone/>
             </a:pPr>
             <a:r>
@@ -6238,7 +6259,7 @@
                 <a:ea typeface="Calibri" pitchFamily="34" charset="-122"/>
                 <a:cs typeface="Calibri" pitchFamily="34" charset="-120"/>
               </a:rPr>
-              <a:t>Why an R&amp;M variance is not just a cost variance at Codi</a:t>
+              <a:t>Why a repairs overspend is more than a budget variance</a:t>
             </a:r>
             <a:endParaRPr lang="en-US" sz="1400" dirty="0"/>
           </a:p>
@@ -6270,13 +6291,6 @@
             <a:prstDash val="solid"/>
           </a:ln>
         </p:spPr>
-        <p:txBody>
-          <a:bodyPr/>
-          <a:lstStyle/>
-          <a:p>
-            <a:endParaRPr lang="en-GB"/>
-          </a:p>
-        </p:txBody>
       </p:sp>
       <p:sp>
         <p:nvSpPr>
@@ -6287,19 +6301,19 @@
         <p:spPr>
           <a:xfrm>
             <a:off x="868680" y="3465576"/>
-            <a:ext cx="3931920" cy="292608"/>
-          </a:xfrm>
-          <a:prstGeom prst="rect">
-            <a:avLst/>
-          </a:prstGeom>
-          <a:noFill/>
-          <a:ln/>
-        </p:spPr>
-        <p:txBody>
-          <a:bodyPr wrap="square" lIns="0" tIns="0" rIns="0" bIns="0" rtlCol="0" anchor="ctr"/>
-          <a:lstStyle/>
-          <a:p>
-            <a:pPr marL="0" indent="0">
+            <a:ext cx="4754880" cy="292608"/>
+          </a:xfrm>
+          <a:prstGeom prst="rect">
+            <a:avLst/>
+          </a:prstGeom>
+          <a:noFill/>
+          <a:ln/>
+        </p:spPr>
+        <p:txBody>
+          <a:bodyPr wrap="square" lIns="0" tIns="0" rIns="0" bIns="0" rtlCol="0" anchor="ctr"/>
+          <a:lstStyle/>
+          <a:p>
+            <a:pPr indent="0" marL="0">
               <a:buNone/>
             </a:pPr>
             <a:r>
@@ -6311,7 +6325,7 @@
                 <a:ea typeface="Calibri" pitchFamily="34" charset="-122"/>
                 <a:cs typeface="Calibri" pitchFamily="34" charset="-120"/>
               </a:rPr>
-              <a:t>Viability graded Yellow</a:t>
+              <a:t>It lands on the surplus</a:t>
             </a:r>
             <a:endParaRPr lang="en-US" sz="1300" dirty="0"/>
           </a:p>
@@ -6335,10 +6349,10 @@
           <a:ln/>
         </p:spPr>
         <p:txBody>
-          <a:bodyPr wrap="square" lIns="0" tIns="0" rIns="0" bIns="0" rtlCol="0" anchor="ctr"/>
-          <a:lstStyle/>
-          <a:p>
-            <a:pPr marL="0" indent="0">
+          <a:bodyPr wrap="square" lIns="0" tIns="0" rIns="0" bIns="0" rtlCol="0" anchor="t"/>
+          <a:lstStyle/>
+          <a:p>
+            <a:pPr indent="0" marL="0">
               <a:buNone/>
             </a:pPr>
             <a:r>
@@ -6350,7 +6364,7 @@
                 <a:ea typeface="Calibri" pitchFamily="34" charset="-122"/>
                 <a:cs typeface="Calibri" pitchFamily="34" charset="-120"/>
               </a:rPr>
-              <a:t>The July 2026 regulatory judgement retained the governance grade and identified the effect of the development and planned maintenance programme on financial metrics.</a:t>
+              <a:t>Repairs is largely revenue spend, so an overspend comes off operating surplus — which feeds interest cover and covenant headroom. Finance leaders need it in those terms, not just as a variance.</a:t>
             </a:r>
             <a:endParaRPr lang="en-US" sz="1150" dirty="0"/>
           </a:p>
@@ -6382,13 +6396,6 @@
             <a:prstDash val="solid"/>
           </a:ln>
         </p:spPr>
-        <p:txBody>
-          <a:bodyPr/>
-          <a:lstStyle/>
-          <a:p>
-            <a:endParaRPr lang="en-GB"/>
-          </a:p>
-        </p:txBody>
       </p:sp>
       <p:sp>
         <p:nvSpPr>
@@ -6399,19 +6406,19 @@
         <p:spPr>
           <a:xfrm>
             <a:off x="868680" y="4562856"/>
-            <a:ext cx="3931920" cy="292608"/>
-          </a:xfrm>
-          <a:prstGeom prst="rect">
-            <a:avLst/>
-          </a:prstGeom>
-          <a:noFill/>
-          <a:ln/>
-        </p:spPr>
-        <p:txBody>
-          <a:bodyPr wrap="square" lIns="0" tIns="0" rIns="0" bIns="0" rtlCol="0" anchor="ctr"/>
-          <a:lstStyle/>
-          <a:p>
-            <a:pPr marL="0" indent="0">
+            <a:ext cx="4754880" cy="292608"/>
+          </a:xfrm>
+          <a:prstGeom prst="rect">
+            <a:avLst/>
+          </a:prstGeom>
+          <a:noFill/>
+          <a:ln/>
+        </p:spPr>
+        <p:txBody>
+          <a:bodyPr wrap="square" lIns="0" tIns="0" rIns="0" bIns="0" rtlCol="0" anchor="ctr"/>
+          <a:lstStyle/>
+          <a:p>
+            <a:pPr indent="0" marL="0">
               <a:buNone/>
             </a:pPr>
             <a:r>
@@ -6423,7 +6430,7 @@
                 <a:ea typeface="Calibri" pitchFamily="34" charset="-122"/>
                 <a:cs typeface="Calibri" pitchFamily="34" charset="-120"/>
               </a:rPr>
-              <a:t>£130m sustainability-linked facility</a:t>
+              <a:t>It competes with the investment programme</a:t>
             </a:r>
             <a:endParaRPr lang="en-US" sz="1300" dirty="0"/>
           </a:p>
@@ -6447,10 +6454,10 @@
           <a:ln/>
         </p:spPr>
         <p:txBody>
-          <a:bodyPr wrap="square" lIns="0" tIns="0" rIns="0" bIns="0" rtlCol="0" anchor="ctr"/>
-          <a:lstStyle/>
-          <a:p>
-            <a:pPr marL="0" indent="0">
+          <a:bodyPr wrap="square" lIns="0" tIns="0" rIns="0" bIns="0" rtlCol="0" anchor="t"/>
+          <a:lstStyle/>
+          <a:p>
+            <a:pPr indent="0" marL="0">
               <a:buNone/>
             </a:pPr>
             <a:r>
@@ -6462,7 +6469,7 @@
                 <a:ea typeface="Calibri" pitchFamily="34" charset="-122"/>
                 <a:cs typeface="Calibri" pitchFamily="34" charset="-120"/>
               </a:rPr>
-              <a:t>Margin is tied to environmental and social targets. Retrofit and planned works delivery therefore carries a cost-of-debt consequence, not only a cost consequence.</a:t>
+              <a:t>Money spent unplanned on reactive work is money not available for planned works and new homes. That is the trade-off leadership is actually being asked to make.</a:t>
             </a:r>
             <a:endParaRPr lang="en-US" sz="1150" dirty="0"/>
           </a:p>
@@ -6489,7 +6496,7 @@
           <a:bodyPr wrap="square" lIns="0" tIns="0" rIns="0" bIns="0" rtlCol="0" anchor="ctr"/>
           <a:lstStyle/>
           <a:p>
-            <a:pPr marL="0" indent="0">
+            <a:pPr indent="0" marL="0">
               <a:buNone/>
             </a:pPr>
             <a:r>
@@ -6503,6 +6510,9 @@
               </a:rPr>
               <a:t>So the escalation says: </a:t>
             </a:r>
+            <a:pPr indent="0" marL="0">
+              <a:buNone/>
+            </a:pPr>
             <a:r>
               <a:rPr lang="en-US" sz="1350" b="1" dirty="0">
                 <a:solidFill>
@@ -6539,7 +6549,7 @@
           <a:bodyPr wrap="square" lIns="0" tIns="0" rIns="0" bIns="0" rtlCol="0" anchor="ctr"/>
           <a:lstStyle/>
           <a:p>
-            <a:pPr marL="0" indent="0" algn="l">
+            <a:pPr algn="l" indent="0" marL="0">
               <a:buNone/>
             </a:pPr>
             <a:r>
@@ -6578,7 +6588,7 @@
           <a:bodyPr wrap="square" lIns="0" tIns="0" rIns="0" bIns="0" rtlCol="0" anchor="ctr"/>
           <a:lstStyle/>
           <a:p>
-            <a:pPr marL="0" indent="0" algn="r">
+            <a:pPr algn="r" indent="0" marL="0">
               <a:buNone/>
             </a:pPr>
             <a:r>
@@ -6612,7 +6622,6 @@
         <a:solidFill>
           <a:srgbClr val="13453B"/>
         </a:solidFill>
-        <a:effectLst/>
       </p:bgPr>
     </p:bg>
     <p:spTree>
@@ -6650,11 +6659,11 @@
           <a:bodyPr wrap="square" lIns="0" tIns="0" rIns="0" bIns="0" rtlCol="0" anchor="ctr"/>
           <a:lstStyle/>
           <a:p>
-            <a:pPr marL="0" indent="0">
-              <a:buNone/>
-            </a:pPr>
-            <a:r>
-              <a:rPr lang="en-US" sz="1000" b="1" kern="0" spc="220" dirty="0">
+            <a:pPr indent="0" marL="0">
+              <a:buNone/>
+            </a:pPr>
+            <a:r>
+              <a:rPr lang="en-US" sz="1000" b="1" spc="220" kern="0" dirty="0">
                 <a:solidFill>
                   <a:srgbClr val="C8892F"/>
                 </a:solidFill>
@@ -6689,7 +6698,7 @@
           <a:bodyPr wrap="square" lIns="0" tIns="0" rIns="0" bIns="0" rtlCol="0" anchor="ctr"/>
           <a:lstStyle/>
           <a:p>
-            <a:pPr marL="0" indent="0">
+            <a:pPr indent="0" marL="0">
               <a:buNone/>
             </a:pPr>
             <a:r>
@@ -6728,7 +6737,7 @@
           <a:bodyPr wrap="square" lIns="0" tIns="0" rIns="0" bIns="0" rtlCol="0" anchor="ctr"/>
           <a:lstStyle/>
           <a:p>
-            <a:pPr marL="0" indent="0">
+            <a:pPr indent="0" marL="0">
               <a:buNone/>
             </a:pPr>
             <a:r>
@@ -6767,11 +6776,11 @@
           <a:bodyPr wrap="square" lIns="0" tIns="0" rIns="0" bIns="0" rtlCol="0" anchor="ctr"/>
           <a:lstStyle/>
           <a:p>
-            <a:pPr marL="0" indent="0">
-              <a:buNone/>
-            </a:pPr>
-            <a:r>
-              <a:rPr lang="en-US" sz="1100" b="1" kern="0" spc="180" dirty="0">
+            <a:pPr indent="0" marL="0">
+              <a:buNone/>
+            </a:pPr>
+            <a:r>
+              <a:rPr lang="en-US" sz="1100" b="1" spc="180" kern="0" dirty="0">
                 <a:solidFill>
                   <a:srgbClr val="C8892F"/>
                 </a:solidFill>
@@ -6825,7 +6834,7 @@
                 <a:ea typeface="Calibri" pitchFamily="34" charset="-122"/>
                 <a:cs typeface="Calibri" pitchFamily="34" charset="-120"/>
               </a:rPr>
-              <a:t>Forecast gap, and movement since last forecast</a:t>
+              <a:t>The gap, and how it has moved since last time</a:t>
             </a:r>
             <a:endParaRPr lang="en-US" sz="1300" dirty="0"/>
           </a:p>
@@ -6849,7 +6858,7 @@
                 <a:ea typeface="Calibri" pitchFamily="34" charset="-122"/>
                 <a:cs typeface="Calibri" pitchFamily="34" charset="-120"/>
               </a:rPr>
-              <a:t>Net benefit delivered against the agreed action profile</a:t>
+              <a:t>Whether agreed savings have actually landed</a:t>
             </a:r>
             <a:endParaRPr lang="en-US" sz="1300" dirty="0"/>
           </a:p>
@@ -6873,7 +6882,7 @@
                 <a:ea typeface="Calibri" pitchFamily="34" charset="-122"/>
                 <a:cs typeface="Calibri" pitchFamily="34" charset="-120"/>
               </a:rPr>
-              <a:t>Share of spend capitalised versus revenue</a:t>
+              <a:t>Split between capital and revenue spend</a:t>
             </a:r>
             <a:endParaRPr lang="en-US" sz="1300" dirty="0"/>
           </a:p>
@@ -6897,7 +6906,7 @@
                 <a:ea typeface="Calibri" pitchFamily="34" charset="-122"/>
                 <a:cs typeface="Calibri" pitchFamily="34" charset="-120"/>
               </a:rPr>
-              <a:t>Cost per job, adjusted for work mix</a:t>
+              <a:t>Cost per job, adjusted for the mix of work</a:t>
             </a:r>
             <a:endParaRPr lang="en-US" sz="1300" dirty="0"/>
           </a:p>
@@ -6924,11 +6933,11 @@
           <a:bodyPr wrap="square" lIns="0" tIns="0" rIns="0" bIns="0" rtlCol="0" anchor="ctr"/>
           <a:lstStyle/>
           <a:p>
-            <a:pPr marL="0" indent="0">
-              <a:buNone/>
-            </a:pPr>
-            <a:r>
-              <a:rPr lang="en-US" sz="1100" b="1" kern="0" spc="180" dirty="0">
+            <a:pPr indent="0" marL="0">
+              <a:buNone/>
+            </a:pPr>
+            <a:r>
+              <a:rPr lang="en-US" sz="1100" b="1" spc="180" kern="0" dirty="0">
                 <a:solidFill>
                   <a:srgbClr val="C8892F"/>
                 </a:solidFill>
@@ -6982,7 +6991,7 @@
                 <a:ea typeface="Calibri" pitchFamily="34" charset="-122"/>
                 <a:cs typeface="Calibri" pitchFamily="34" charset="-120"/>
               </a:rPr>
-              <a:t>WHQS hazard response compliance</a:t>
+              <a:t>Outstanding safety and compliance work</a:t>
             </a:r>
             <a:endParaRPr lang="en-US" sz="1300" dirty="0"/>
           </a:p>
@@ -7030,7 +7039,7 @@
                 <a:ea typeface="Calibri" pitchFamily="34" charset="-122"/>
                 <a:cs typeface="Calibri" pitchFamily="34" charset="-120"/>
               </a:rPr>
-              <a:t>Jobs per operative — is insourced capacity landing?</a:t>
+              <a:t>Jobs per operative</a:t>
             </a:r>
             <a:endParaRPr lang="en-US" sz="1300" dirty="0"/>
           </a:p>
@@ -7054,7 +7063,7 @@
                 <a:ea typeface="Calibri" pitchFamily="34" charset="-122"/>
                 <a:cs typeface="Calibri" pitchFamily="34" charset="-120"/>
               </a:rPr>
-              <a:t>Backlog age and overdue safety work</a:t>
+              <a:t>Backlog, and how old it is</a:t>
             </a:r>
             <a:endParaRPr lang="en-US" sz="1300" dirty="0"/>
           </a:p>
@@ -7106,13 +7115,6 @@
             <a:prstDash val="solid"/>
           </a:ln>
         </p:spPr>
-        <p:txBody>
-          <a:bodyPr/>
-          <a:lstStyle/>
-          <a:p>
-            <a:endParaRPr lang="en-GB"/>
-          </a:p>
-        </p:txBody>
       </p:sp>
       <p:sp>
         <p:nvSpPr>
@@ -7135,7 +7137,7 @@
           <a:bodyPr wrap="square" lIns="0" tIns="0" rIns="0" bIns="0" rtlCol="0" anchor="ctr"/>
           <a:lstStyle/>
           <a:p>
-            <a:pPr marL="0" indent="0">
+            <a:pPr indent="0" marL="0">
               <a:buNone/>
             </a:pPr>
             <a:r>
@@ -7147,7 +7149,7 @@
                 <a:ea typeface="Calibri" pitchFamily="34" charset="-122"/>
                 <a:cs typeface="Calibri" pitchFamily="34" charset="-120"/>
               </a:rPr>
-              <a:t>Weekly operational exception review. Monthly signed-off financial position. Safety escalates immediately.</a:t>
+              <a:t>Weekly look at exceptions with the operational team. Monthly signed-off position. Anything safety-related goes straight up.</a:t>
             </a:r>
             <a:endParaRPr lang="en-US" sz="1250" dirty="0"/>
           </a:p>
@@ -7174,7 +7176,7 @@
           <a:bodyPr wrap="square" lIns="0" tIns="0" rIns="0" bIns="0" rtlCol="0" anchor="t"/>
           <a:lstStyle/>
           <a:p>
-            <a:pPr marL="0" indent="0">
+            <a:pPr indent="0" marL="0">
               <a:lnSpc>
                 <a:spcPts val="3000"/>
               </a:lnSpc>
@@ -7216,7 +7218,7 @@
           <a:bodyPr wrap="square" lIns="0" tIns="0" rIns="0" bIns="0" rtlCol="0" anchor="ctr"/>
           <a:lstStyle/>
           <a:p>
-            <a:pPr marL="0" indent="0" algn="l">
+            <a:pPr algn="l" indent="0" marL="0">
               <a:buNone/>
             </a:pPr>
             <a:r>
@@ -7255,7 +7257,7 @@
           <a:bodyPr wrap="square" lIns="0" tIns="0" rIns="0" bIns="0" rtlCol="0" anchor="ctr"/>
           <a:lstStyle/>
           <a:p>
-            <a:pPr marL="0" indent="0" algn="r">
+            <a:pPr algn="r" indent="0" marL="0">
               <a:buNone/>
             </a:pPr>
             <a:r>
@@ -7574,325 +7576,4 @@
     </a:ext>
   </a:extLst>
 </a:theme>
-</file>
-
-<file path=ppt/theme/theme2.xml><?xml version="1.0" encoding="utf-8"?>
-<a:theme xmlns:a="http://schemas.openxmlformats.org/drawingml/2006/main" name="Office Theme">
-  <a:themeElements>
-    <a:clrScheme name="Office">
-      <a:dk1>
-        <a:sysClr val="windowText" lastClr="000000"/>
-      </a:dk1>
-      <a:lt1>
-        <a:sysClr val="window" lastClr="FFFFFF"/>
-      </a:lt1>
-      <a:dk2>
-        <a:srgbClr val="0E2841"/>
-      </a:dk2>
-      <a:lt2>
-        <a:srgbClr val="E8E8E8"/>
-      </a:lt2>
-      <a:accent1>
-        <a:srgbClr val="156082"/>
-      </a:accent1>
-      <a:accent2>
-        <a:srgbClr val="E97132"/>
-      </a:accent2>
-      <a:accent3>
-        <a:srgbClr val="196B24"/>
-      </a:accent3>
-      <a:accent4>
-        <a:srgbClr val="0F9ED5"/>
-      </a:accent4>
-      <a:accent5>
-        <a:srgbClr val="A02B93"/>
-      </a:accent5>
-      <a:accent6>
-        <a:srgbClr val="4EA72E"/>
-      </a:accent6>
-      <a:hlink>
-        <a:srgbClr val="467886"/>
-      </a:hlink>
-      <a:folHlink>
-        <a:srgbClr val="96607D"/>
-      </a:folHlink>
-    </a:clrScheme>
-    <a:fontScheme name="Office">
-      <a:majorFont>
-        <a:latin typeface="Aptos Display" panose="02110004020202020204"/>
-        <a:ea typeface=""/>
-        <a:cs typeface=""/>
-        <a:font script="Jpan" typeface="游ゴシック Light"/>
-        <a:font script="Hang" typeface="맑은 고딕"/>
-        <a:font script="Hans" typeface="等线 Light"/>
-        <a:font script="Hant" typeface="新細明體"/>
-        <a:font script="Arab" typeface="Times New Roman"/>
-        <a:font script="Hebr" typeface="Times New Roman"/>
-        <a:font script="Thai" typeface="Angsana New"/>
-        <a:font script="Ethi" typeface="Nyala"/>
-        <a:font script="Beng" typeface="Vrinda"/>
-        <a:font script="Gujr" typeface="Shruti"/>
-        <a:font script="Khmr" typeface="MoolBoran"/>
-        <a:font script="Knda" typeface="Tunga"/>
-        <a:font script="Guru" typeface="Raavi"/>
-        <a:font script="Cans" typeface="Euphemia"/>
-        <a:font script="Cher" typeface="Plantagenet Cherokee"/>
-        <a:font script="Yiii" typeface="Microsoft Yi Baiti"/>
-        <a:font script="Tibt" typeface="Microsoft Himalaya"/>
-        <a:font script="Thaa" typeface="MV Boli"/>
-        <a:font script="Deva" typeface="Mangal"/>
-        <a:font script="Telu" typeface="Gautami"/>
-        <a:font script="Taml" typeface="Latha"/>
-        <a:font script="Syrc" typeface="Estrangelo Edessa"/>
-        <a:font script="Orya" typeface="Kalinga"/>
-        <a:font script="Mlym" typeface="Kartika"/>
-        <a:font script="Laoo" typeface="DokChampa"/>
-        <a:font script="Sinh" typeface="Iskoola Pota"/>
-        <a:font script="Mong" typeface="Mongolian Baiti"/>
-        <a:font script="Viet" typeface="Times New Roman"/>
-        <a:font script="Uigh" typeface="Microsoft Uighur"/>
-        <a:font script="Geor" typeface="Sylfaen"/>
-        <a:font script="Armn" typeface="Arial"/>
-        <a:font script="Bugi" typeface="Leelawadee UI"/>
-        <a:font script="Bopo" typeface="Microsoft JhengHei"/>
-        <a:font script="Java" typeface="Javanese Text"/>
-        <a:font script="Lisu" typeface="Segoe UI"/>
-        <a:font script="Mymr" typeface="Myanmar Text"/>
-        <a:font script="Nkoo" typeface="Ebrima"/>
-        <a:font script="Olck" typeface="Nirmala UI"/>
-        <a:font script="Osma" typeface="Ebrima"/>
-        <a:font script="Phag" typeface="Phagspa"/>
-        <a:font script="Syrn" typeface="Estrangelo Edessa"/>
-        <a:font script="Syrj" typeface="Estrangelo Edessa"/>
-        <a:font script="Syre" typeface="Estrangelo Edessa"/>
-        <a:font script="Sora" typeface="Nirmala UI"/>
-        <a:font script="Tale" typeface="Microsoft Tai Le"/>
-        <a:font script="Talu" typeface="Microsoft New Tai Lue"/>
-        <a:font script="Tfng" typeface="Ebrima"/>
-      </a:majorFont>
-      <a:minorFont>
-        <a:latin typeface="Aptos" panose="02110004020202020204"/>
-        <a:ea typeface=""/>
-        <a:cs typeface=""/>
-        <a:font script="Jpan" typeface="游ゴシック"/>
-        <a:font script="Hang" typeface="맑은 고딕"/>
-        <a:font script="Hans" typeface="等线"/>
-        <a:font script="Hant" typeface="新細明體"/>
-        <a:font script="Arab" typeface="Arial"/>
-        <a:font script="Hebr" typeface="Arial"/>
-        <a:font script="Thai" typeface="Cordia New"/>
-        <a:font script="Ethi" typeface="Nyala"/>
-        <a:font script="Beng" typeface="Vrinda"/>
-        <a:font script="Gujr" typeface="Shruti"/>
-        <a:font script="Khmr" typeface="DaunPenh"/>
-        <a:font script="Knda" typeface="Tunga"/>
-        <a:font script="Guru" typeface="Raavi"/>
-        <a:font script="Cans" typeface="Euphemia"/>
-        <a:font script="Cher" typeface="Plantagenet Cherokee"/>
-        <a:font script="Yiii" typeface="Microsoft Yi Baiti"/>
-        <a:font script="Tibt" typeface="Microsoft Himalaya"/>
-        <a:font script="Thaa" typeface="MV Boli"/>
-        <a:font script="Deva" typeface="Mangal"/>
-        <a:font script="Telu" typeface="Gautami"/>
-        <a:font script="Taml" typeface="Latha"/>
-        <a:font script="Syrc" typeface="Estrangelo Edessa"/>
-        <a:font script="Orya" typeface="Kalinga"/>
-        <a:font script="Mlym" typeface="Kartika"/>
-        <a:font script="Laoo" typeface="DokChampa"/>
-        <a:font script="Sinh" typeface="Iskoola Pota"/>
-        <a:font script="Mong" typeface="Mongolian Baiti"/>
-        <a:font script="Viet" typeface="Arial"/>
-        <a:font script="Uigh" typeface="Microsoft Uighur"/>
-        <a:font script="Geor" typeface="Sylfaen"/>
-        <a:font script="Armn" typeface="Arial"/>
-        <a:font script="Bugi" typeface="Leelawadee UI"/>
-        <a:font script="Bopo" typeface="Microsoft JhengHei"/>
-        <a:font script="Java" typeface="Javanese Text"/>
-        <a:font script="Lisu" typeface="Segoe UI"/>
-        <a:font script="Mymr" typeface="Myanmar Text"/>
-        <a:font script="Nkoo" typeface="Ebrima"/>
-        <a:font script="Olck" typeface="Nirmala UI"/>
-        <a:font script="Osma" typeface="Ebrima"/>
-        <a:font script="Phag" typeface="Phagspa"/>
-        <a:font script="Syrn" typeface="Estrangelo Edessa"/>
-        <a:font script="Syrj" typeface="Estrangelo Edessa"/>
-        <a:font script="Syre" typeface="Estrangelo Edessa"/>
-        <a:font script="Sora" typeface="Nirmala UI"/>
-        <a:font script="Tale" typeface="Microsoft Tai Le"/>
-        <a:font script="Talu" typeface="Microsoft New Tai Lue"/>
-        <a:font script="Tfng" typeface="Ebrima"/>
-      </a:minorFont>
-    </a:fontScheme>
-    <a:fmtScheme name="Office">
-      <a:fillStyleLst>
-        <a:solidFill>
-          <a:schemeClr val="phClr"/>
-        </a:solidFill>
-        <a:gradFill rotWithShape="1">
-          <a:gsLst>
-            <a:gs pos="0">
-              <a:schemeClr val="phClr">
-                <a:lumMod val="110000"/>
-                <a:satMod val="105000"/>
-                <a:tint val="67000"/>
-              </a:schemeClr>
-            </a:gs>
-            <a:gs pos="50000">
-              <a:schemeClr val="phClr">
-                <a:lumMod val="105000"/>
-                <a:satMod val="103000"/>
-                <a:tint val="73000"/>
-              </a:schemeClr>
-            </a:gs>
-            <a:gs pos="100000">
-              <a:schemeClr val="phClr">
-                <a:lumMod val="105000"/>
-                <a:satMod val="109000"/>
-                <a:tint val="81000"/>
-              </a:schemeClr>
-            </a:gs>
-          </a:gsLst>
-          <a:lin ang="5400000" scaled="0"/>
-        </a:gradFill>
-        <a:gradFill rotWithShape="1">
-          <a:gsLst>
-            <a:gs pos="0">
-              <a:schemeClr val="phClr">
-                <a:satMod val="103000"/>
-                <a:lumMod val="102000"/>
-                <a:tint val="94000"/>
-              </a:schemeClr>
-            </a:gs>
-            <a:gs pos="50000">
-              <a:schemeClr val="phClr">
-                <a:satMod val="110000"/>
-                <a:lumMod val="100000"/>
-                <a:shade val="100000"/>
-              </a:schemeClr>
-            </a:gs>
-            <a:gs pos="100000">
-              <a:schemeClr val="phClr">
-                <a:lumMod val="99000"/>
-                <a:satMod val="120000"/>
-                <a:shade val="78000"/>
-              </a:schemeClr>
-            </a:gs>
-          </a:gsLst>
-          <a:lin ang="5400000" scaled="0"/>
-        </a:gradFill>
-      </a:fillStyleLst>
-      <a:lnStyleLst>
-        <a:ln w="12700" cap="flat" cmpd="sng" algn="ctr">
-          <a:solidFill>
-            <a:schemeClr val="phClr"/>
-          </a:solidFill>
-          <a:prstDash val="solid"/>
-          <a:miter lim="800000"/>
-        </a:ln>
-        <a:ln w="19050" cap="flat" cmpd="sng" algn="ctr">
-          <a:solidFill>
-            <a:schemeClr val="phClr"/>
-          </a:solidFill>
-          <a:prstDash val="solid"/>
-          <a:miter lim="800000"/>
-        </a:ln>
-        <a:ln w="25400" cap="flat" cmpd="sng" algn="ctr">
-          <a:solidFill>
-            <a:schemeClr val="phClr"/>
-          </a:solidFill>
-          <a:prstDash val="solid"/>
-          <a:miter lim="800000"/>
-        </a:ln>
-      </a:lnStyleLst>
-      <a:effectStyleLst>
-        <a:effectStyle>
-          <a:effectLst/>
-        </a:effectStyle>
-        <a:effectStyle>
-          <a:effectLst/>
-        </a:effectStyle>
-        <a:effectStyle>
-          <a:effectLst>
-            <a:outerShdw blurRad="57150" dist="19050" dir="5400000" algn="ctr" rotWithShape="0">
-              <a:srgbClr val="000000">
-                <a:alpha val="63000"/>
-              </a:srgbClr>
-            </a:outerShdw>
-          </a:effectLst>
-        </a:effectStyle>
-      </a:effectStyleLst>
-      <a:bgFillStyleLst>
-        <a:solidFill>
-          <a:schemeClr val="phClr"/>
-        </a:solidFill>
-        <a:solidFill>
-          <a:schemeClr val="phClr">
-            <a:tint val="95000"/>
-            <a:satMod val="170000"/>
-          </a:schemeClr>
-        </a:solidFill>
-        <a:gradFill rotWithShape="1">
-          <a:gsLst>
-            <a:gs pos="0">
-              <a:schemeClr val="phClr">
-                <a:tint val="93000"/>
-                <a:satMod val="150000"/>
-                <a:shade val="98000"/>
-                <a:lumMod val="102000"/>
-              </a:schemeClr>
-            </a:gs>
-            <a:gs pos="50000">
-              <a:schemeClr val="phClr">
-                <a:tint val="98000"/>
-                <a:satMod val="130000"/>
-                <a:shade val="90000"/>
-                <a:lumMod val="103000"/>
-              </a:schemeClr>
-            </a:gs>
-            <a:gs pos="100000">
-              <a:schemeClr val="phClr">
-                <a:shade val="63000"/>
-                <a:satMod val="120000"/>
-              </a:schemeClr>
-            </a:gs>
-          </a:gsLst>
-          <a:lin ang="5400000" scaled="0"/>
-        </a:gradFill>
-      </a:bgFillStyleLst>
-    </a:fmtScheme>
-  </a:themeElements>
-  <a:objectDefaults>
-    <a:lnDef>
-      <a:spPr/>
-      <a:bodyPr/>
-      <a:lstStyle/>
-      <a:style>
-        <a:lnRef idx="2">
-          <a:schemeClr val="accent1"/>
-        </a:lnRef>
-        <a:fillRef idx="0">
-          <a:schemeClr val="accent1"/>
-        </a:fillRef>
-        <a:effectRef idx="1">
-          <a:schemeClr val="accent1"/>
-        </a:effectRef>
-        <a:fontRef idx="minor">
-          <a:schemeClr val="tx1"/>
-        </a:fontRef>
-      </a:style>
-    </a:lnDef>
-  </a:objectDefaults>
-  <a:extraClrSchemeLst/>
-  <a:extLst>
-    <a:ext uri="{05A4C25C-085E-4340-85A3-A5531E510DB2}">
-      <thm15:themeFamily xmlns:thm15="http://schemas.microsoft.com/office/thememl/2012/main" name="Office Theme" id="{2E142A2C-CD16-42D6-873A-C26D2A0506FA}" vid="{1BDDFF52-6CD6-40A5-AB3C-68EB2F1E4D0A}"/>
-    </a:ext>
-  </a:extLst>
-</a:theme>
-</file>
-
-<file path=docMetadata/LabelInfo.xml><?xml version="1.0" encoding="utf-8"?>
-<clbl:labelList xmlns:clbl="http://schemas.microsoft.com/office/2020/mipLabelMetadata">
-  <clbl:label id="{2e8712ce-4b1c-42f0-8103-696d10633cf9}" enabled="1" method="Privileged" siteId="{ddd66cce-ffe1-4029-967c-5e15ef73127f}" contentBits="3" removed="0"/>
-</clbl:labelList>
 </file>